--- a/docs/final_report/Snap-to-Sell-presentation.pptx
+++ b/docs/final_report/Snap-to-Sell-presentation.pptx
@@ -4,6 +4,9 @@
   <p:sldMasterIdLst>
     <p:sldMasterId id="2147483648" r:id="rId1"/>
   </p:sldMasterIdLst>
+  <p:notesMasterIdLst>
+    <p:notesMasterId r:id="rId18"/>
+  </p:notesMasterIdLst>
   <p:sldIdLst>
     <p:sldId id="256" r:id="rId2"/>
     <p:sldId id="257" r:id="rId3"/>
@@ -20,10 +23,8 @@
     <p:sldId id="268" r:id="rId14"/>
     <p:sldId id="269" r:id="rId15"/>
     <p:sldId id="270" r:id="rId16"/>
+    <p:sldId id="271" r:id="rId17"/>
   </p:sldIdLst>
-  <p:notesMasterIdLst>
-    <p:notesMasterId r:id="rId17"/>
-  </p:notesMasterIdLst>
   <p:sldSz cx="12192000" cy="6858000"/>
   <p:notesSz cx="6858000" cy="12192000"/>
   <p:defaultTextStyle>
@@ -118,6 +119,11 @@
       </a:defRPr>
     </a:lvl9pPr>
   </p:defaultTextStyle>
+  <p:extLst>
+    <p:ext uri="{EFAFB233-063F-42B5-8137-9DF3F51BA10A}">
+      <p15:sldGuideLst xmlns:p15="http://schemas.microsoft.com/office/powerpoint/2012/main"/>
+    </p:ext>
+  </p:extLst>
 </p:presentation>
 </file>
 
@@ -143,234 +149,10 @@
           <a:chExt cx="0" cy="0"/>
         </a:xfrm>
       </p:grpSpPr>
-      <p:sp>
-        <p:nvSpPr>
-          <p:cNvPr id="2" name="Header Placeholder 1"/>
-          <p:cNvSpPr>
-            <a:spLocks noGrp="1"/>
-          </p:cNvSpPr>
-          <p:nvPr>
-            <p:ph type="hdr" sz="quarter"/>
-          </p:nvPr>
-        </p:nvSpPr>
-        <p:spPr>
-          <a:xfrm>
-            <a:off x="0" y="0"/>
-            <a:ext cx="2971800" cy="458788"/>
-          </a:xfrm>
-          <a:prstGeom prst="rect">
-            <a:avLst/>
-          </a:prstGeom>
-        </p:spPr>
-        <p:txBody>
-          <a:bodyPr vert="horz" lIns="91440" tIns="45720" rIns="91440" bIns="45720" rtlCol="0"/>
-          <a:lstStyle>
-            <a:lvl1pPr algn="l">
-              <a:defRPr sz="1200"/>
-            </a:lvl1pPr>
-          </a:lstStyle>
-          <a:p>
-            <a:endParaRPr lang="en-US"/>
-          </a:p>
-        </p:txBody>
-      </p:sp>
-      <p:sp>
-        <p:nvSpPr>
-          <p:cNvPr id="3" name="Date Placeholder 2"/>
-          <p:cNvSpPr>
-            <a:spLocks noGrp="1"/>
-          </p:cNvSpPr>
-          <p:nvPr>
-            <p:ph type="dt" idx="1"/>
-          </p:nvPr>
-        </p:nvSpPr>
-        <p:spPr>
-          <a:xfrm>
-            <a:off x="3884613" y="0"/>
-            <a:ext cx="2971800" cy="458788"/>
-          </a:xfrm>
-          <a:prstGeom prst="rect">
-            <a:avLst/>
-          </a:prstGeom>
-        </p:spPr>
-        <p:txBody>
-          <a:bodyPr vert="horz" lIns="91440" tIns="45720" rIns="91440" bIns="45720" rtlCol="0"/>
-          <a:lstStyle>
-            <a:lvl1pPr algn="r">
-              <a:defRPr sz="1200"/>
-            </a:lvl1pPr>
-          </a:lstStyle>
-          <a:p>
-            <a:fld id="{5282F153-3F37-0F45-9E97-73ACFA13230C}" type="datetimeFigureOut">
-              <a:rPr lang="en-US"/>
-              <a:t>7/23/19</a:t>
-            </a:fld>
-            <a:endParaRPr lang="en-US"/>
-          </a:p>
-        </p:txBody>
-      </p:sp>
-      <p:sp>
-        <p:nvSpPr>
-          <p:cNvPr id="4" name="Slide Image Placeholder 3"/>
-          <p:cNvSpPr>
-            <a:spLocks noGrp="1" noRot="1" noChangeAspect="1"/>
-          </p:cNvSpPr>
-          <p:nvPr>
-            <p:ph type="sldImg" idx="2"/>
-          </p:nvPr>
-        </p:nvSpPr>
-        <p:spPr>
-          <a:xfrm>
-            <a:off x="685800" y="1143000"/>
-            <a:ext cx="5486400" cy="3086100"/>
-          </a:xfrm>
-          <a:prstGeom prst="rect">
-            <a:avLst/>
-          </a:prstGeom>
-          <a:noFill/>
-          <a:ln w="12700">
-            <a:solidFill>
-              <a:prstClr val="black"/>
-            </a:solidFill>
-          </a:ln>
-        </p:spPr>
-        <p:txBody>
-          <a:bodyPr vert="horz" lIns="91440" tIns="45720" rIns="91440" bIns="45720" rtlCol="0" anchor="ctr"/>
-          <a:lstStyle/>
-          <a:p>
-            <a:endParaRPr lang="en-US"/>
-          </a:p>
-        </p:txBody>
-      </p:sp>
-      <p:sp>
-        <p:nvSpPr>
-          <p:cNvPr id="5" name="Notes Placeholder 4"/>
-          <p:cNvSpPr>
-            <a:spLocks noGrp="1"/>
-          </p:cNvSpPr>
-          <p:nvPr>
-            <p:ph type="body" sz="quarter" idx="3"/>
-          </p:nvPr>
-        </p:nvSpPr>
-        <p:spPr>
-          <a:xfrm>
-            <a:off x="685800" y="4400550"/>
-            <a:ext cx="5486400" cy="3600450"/>
-          </a:xfrm>
-          <a:prstGeom prst="rect">
-            <a:avLst/>
-          </a:prstGeom>
-        </p:spPr>
-        <p:txBody>
-          <a:bodyPr vert="horz" lIns="91440" tIns="45720" rIns="91440" bIns="45720" rtlCol="0"/>
-          <a:lstStyle/>
-          <a:p>
-            <a:pPr lvl="0"/>
-            <a:r>
-              <a:rPr lang="en-US"/>
-              <a:t>Click to edit Master text styles</a:t>
-            </a:r>
-          </a:p>
-          <a:p>
-            <a:pPr lvl="1"/>
-            <a:r>
-              <a:rPr lang="en-US"/>
-              <a:t>Second level</a:t>
-            </a:r>
-          </a:p>
-          <a:p>
-            <a:pPr lvl="2"/>
-            <a:r>
-              <a:rPr lang="en-US"/>
-              <a:t>Third level</a:t>
-            </a:r>
-          </a:p>
-          <a:p>
-            <a:pPr lvl="3"/>
-            <a:r>
-              <a:rPr lang="en-US"/>
-              <a:t>Fourth level</a:t>
-            </a:r>
-          </a:p>
-          <a:p>
-            <a:pPr lvl="4"/>
-            <a:r>
-              <a:rPr lang="en-US"/>
-              <a:t>Fifth level</a:t>
-            </a:r>
-          </a:p>
-        </p:txBody>
-      </p:sp>
-      <p:sp>
-        <p:nvSpPr>
-          <p:cNvPr id="6" name="Footer Placeholder 5"/>
-          <p:cNvSpPr>
-            <a:spLocks noGrp="1"/>
-          </p:cNvSpPr>
-          <p:nvPr>
-            <p:ph type="ftr" sz="quarter" idx="4"/>
-          </p:nvPr>
-        </p:nvSpPr>
-        <p:spPr>
-          <a:xfrm>
-            <a:off x="0" y="8685213"/>
-            <a:ext cx="2971800" cy="458787"/>
-          </a:xfrm>
-          <a:prstGeom prst="rect">
-            <a:avLst/>
-          </a:prstGeom>
-        </p:spPr>
-        <p:txBody>
-          <a:bodyPr vert="horz" lIns="91440" tIns="45720" rIns="91440" bIns="45720" rtlCol="0" anchor="b"/>
-          <a:lstStyle>
-            <a:lvl1pPr algn="l">
-              <a:defRPr sz="1200"/>
-            </a:lvl1pPr>
-          </a:lstStyle>
-          <a:p>
-            <a:endParaRPr lang="en-US"/>
-          </a:p>
-        </p:txBody>
-      </p:sp>
-      <p:sp>
-        <p:nvSpPr>
-          <p:cNvPr id="7" name="Slide Number Placeholder 6"/>
-          <p:cNvSpPr>
-            <a:spLocks noGrp="1"/>
-          </p:cNvSpPr>
-          <p:nvPr>
-            <p:ph type="sldNum" sz="quarter" idx="5"/>
-          </p:nvPr>
-        </p:nvSpPr>
-        <p:spPr>
-          <a:xfrm>
-            <a:off x="3884613" y="8685213"/>
-            <a:ext cx="2971800" cy="458787"/>
-          </a:xfrm>
-          <a:prstGeom prst="rect">
-            <a:avLst/>
-          </a:prstGeom>
-        </p:spPr>
-        <p:txBody>
-          <a:bodyPr vert="horz" lIns="91440" tIns="45720" rIns="91440" bIns="45720" rtlCol="0" anchor="b"/>
-          <a:lstStyle>
-            <a:lvl1pPr algn="r">
-              <a:defRPr sz="1200"/>
-            </a:lvl1pPr>
-          </a:lstStyle>
-          <a:p>
-            <a:fld id="{CE5E9CC1-C706-0F49-92D6-E571CC5EEA8F}" type="slidenum">
-              <a:rPr lang="en-US"/>
-              <a:t>‹#›</a:t>
-            </a:fld>
-            <a:endParaRPr lang="en-US"/>
-          </a:p>
-        </p:txBody>
-      </p:sp>
     </p:spTree>
     <p:extLst>
       <p:ext uri="{BB962C8B-B14F-4D97-AF65-F5344CB8AC3E}">
-        <p14:creationId xmlns:p14="http://schemas.microsoft.com/office/powerpoint/2010/main" val="1024086991"/>
+        <p14:creationId xmlns:p14="http://schemas.microsoft.com/office/powerpoint/2010/main" val="365184940"/>
       </p:ext>
     </p:extLst>
   </p:cSld>
@@ -518,7 +300,6 @@
               <a:rPr lang="en-US" dirty="0"/>
               <a:t>Snap-to-Sell: a pipeline that takes a single phone photo of a packaged corner-store product and returns a publishable sales listing — identity, description, a defensible price, a clean catalogue image, and compliance flags. Build-and-evaluate stream: the contribution is integration, grounding, and rigorous failure analysis.</a:t>
             </a:r>
-            <a:endParaRPr lang="en-US" dirty="0"/>
           </a:p>
         </p:txBody>
       </p:sp>
@@ -606,7 +387,6 @@
               <a:rPr lang="en-US" dirty="0"/>
               <a:t>In a selling context, an invented spec or a wrong image is a real harm. Four safeguards, each measurable — age-restriction recall, hallucinated-claim catch rate, false-swap rate, priced-as-range transparency.</a:t>
             </a:r>
-            <a:endParaRPr lang="en-US" dirty="0"/>
           </a:p>
         </p:txBody>
       </p:sp>
@@ -694,7 +474,6 @@
               <a:rPr lang="en-US" dirty="0"/>
               <a:t>Report per-axis, not one number. Safety axes weighted heavily. The naive baseline anchors every comparison. Failure modes analysed, not averaged away.</a:t>
             </a:r>
-            <a:endParaRPr lang="en-US" dirty="0"/>
           </a:p>
         </p:txBody>
       </p:sp>
@@ -780,9 +559,8 @@
           <a:p>
             <a:r>
               <a:rPr lang="en-US" dirty="0"/>
-              <a:t>Be honest in the talk: results pending the live run (the sandbox can't reach paid APIs). Show the metric skeleton so the audience sees exactly what will be filled. Fill from the eval harness output before final submission.</a:t>
-            </a:r>
-            <a:endParaRPr lang="en-US" dirty="0"/>
+              <a:t>Headline: the pipeline wins 4 of 5 measured axes over the naive baseline — identification, category, age-restriction recall (100%), and image upgrade. Be candid on price: the baseline's ungrounded VLM guess beats retrieval-grounded pricing on cheap corner-store goods, because Google Shopping keeps returning multipacks and look-alikes. That's a documented failure mode, and low-confidence matches are declined (routed to review) rather than mispriced. n=58; report median (robust) and mean (outlier-sensitive).</a:t>
+            </a:r>
           </a:p>
         </p:txBody>
       </p:sp>
@@ -868,9 +646,8 @@
           <a:p>
             <a:r>
               <a:rPr lang="en-US" dirty="0"/>
-              <a:t>Characterising failure is the point of the project. Each mode maps to a mitigation — routing low-confidence cases to human review is the safety net that makes the system deployable.</a:t>
-            </a:r>
-            <a:endParaRPr lang="en-US" dirty="0"/>
+              <a:t>Real pipeline output: (1) a clean publish-ready listing; (2) an alcohol item correctly flagged 18+ with a verified catalogue image swapped in; (3) an unbranded item the confidence gate declined to price and routed to human review. This is the qualitative 'predictions / visualizations' the rubric asks for, and it sets up the interpretability point next.</a:t>
+            </a:r>
           </a:p>
         </p:txBody>
       </p:sp>
@@ -956,9 +733,8 @@
           <a:p>
             <a:r>
               <a:rPr lang="en-US" dirty="0"/>
-              <a:t>Close on the contribution: integrated, verified, reproducibly evaluated. Future work signals awareness of limitations. End with the mission line.</a:t>
-            </a:r>
-            <a:endParaRPr lang="en-US" dirty="0"/>
+              <a:t>Observed failure modes from the 58-item run, not predictions. Lead with pricing — the one axis the baseline won, honestly a retrieval-quality problem on cheap FMCG, not a modelling flaw. Then explicitly address interpretability/explainability (a rubric requirement): the whole pipeline is inspectable — trace logs, candidate scores, price basis, match reasons, guardrail flags — nothing is a black box.</a:t>
+            </a:r>
           </a:p>
         </p:txBody>
       </p:sp>
@@ -1044,9 +820,8 @@
           <a:p>
             <a:r>
               <a:rPr lang="en-US" dirty="0"/>
-              <a:t>Point to the full literature review for the complete APA list. A few preprint author lists still to be verified before final submission.</a:t>
-            </a:r>
-            <a:endParaRPr lang="en-US" dirty="0"/>
+              <a:t>Close on the contribution: integrated, verified, reproducibly evaluated. Future work signals awareness of limitations. End with the mission line.</a:t>
+            </a:r>
           </a:p>
         </p:txBody>
       </p:sp>
@@ -1068,6 +843,93 @@
             <a:fld id="{F7021451-1387-4CA6-816F-3879F97B5CBC}" type="slidenum">
               <a:rPr lang="en-US"/>
               <a:t>15</a:t>
+            </a:fld>
+            <a:endParaRPr lang="en-US"/>
+          </a:p>
+        </p:txBody>
+      </p:sp>
+    </p:spTree>
+    <p:extLst>
+      <p:ext uri="{BB962C8B-B14F-4D97-AF65-F5344CB8AC3E}">
+        <p14:creationId xmlns:p14="http://schemas.microsoft.com/office/powerpoint/2010/main" val="1024086991"/>
+      </p:ext>
+    </p:extLst>
+  </p:cSld>
+  <p:clrMapOvr>
+    <a:masterClrMapping/>
+  </p:clrMapOvr>
+</p:notes>
+</file>
+
+<file path=ppt/notesSlides/notesSlide16.xml><?xml version="1.0" encoding="utf-8"?>
+<p:notes xmlns:a="http://schemas.openxmlformats.org/drawingml/2006/main" xmlns:r="http://schemas.openxmlformats.org/officeDocument/2006/relationships" xmlns:p="http://schemas.openxmlformats.org/presentationml/2006/main">
+  <p:cSld>
+    <p:spTree>
+      <p:nvGrpSpPr>
+        <p:cNvPr id="1" name=""/>
+        <p:cNvGrpSpPr/>
+        <p:nvPr/>
+      </p:nvGrpSpPr>
+      <p:grpSpPr>
+        <a:xfrm>
+          <a:off x="0" y="0"/>
+          <a:ext cx="0" cy="0"/>
+          <a:chOff x="0" y="0"/>
+          <a:chExt cx="0" cy="0"/>
+        </a:xfrm>
+      </p:grpSpPr>
+      <p:sp>
+        <p:nvSpPr>
+          <p:cNvPr id="2" name="Slide Image Placeholder 1"/>
+          <p:cNvSpPr>
+            <a:spLocks noGrp="1" noRot="1" noChangeAspect="1"/>
+          </p:cNvSpPr>
+          <p:nvPr>
+            <p:ph type="sldImg"/>
+          </p:nvPr>
+        </p:nvSpPr>
+        <p:spPr/>
+      </p:sp>
+      <p:sp>
+        <p:nvSpPr>
+          <p:cNvPr id="3" name="Notes Placeholder 2"/>
+          <p:cNvSpPr>
+            <a:spLocks noGrp="1"/>
+          </p:cNvSpPr>
+          <p:nvPr>
+            <p:ph type="body" idx="1"/>
+          </p:nvPr>
+        </p:nvSpPr>
+        <p:spPr/>
+        <p:txBody>
+          <a:bodyPr/>
+          <a:lstStyle/>
+          <a:p>
+            <a:r>
+              <a:rPr lang="en-US" dirty="0"/>
+              <a:t>Point to the full literature review for the complete APA list. A few preprint author lists still to be verified before final submission.</a:t>
+            </a:r>
+          </a:p>
+        </p:txBody>
+      </p:sp>
+      <p:sp>
+        <p:nvSpPr>
+          <p:cNvPr id="4" name="Slide Number Placeholder 3"/>
+          <p:cNvSpPr>
+            <a:spLocks noGrp="1"/>
+          </p:cNvSpPr>
+          <p:nvPr>
+            <p:ph type="sldNum" sz="quarter" idx="10"/>
+          </p:nvPr>
+        </p:nvSpPr>
+        <p:spPr/>
+        <p:txBody>
+          <a:bodyPr/>
+          <a:lstStyle/>
+          <a:p>
+            <a:fld id="{F7021451-1387-4CA6-816F-3879F97B5CBC}" type="slidenum">
+              <a:rPr lang="en-US"/>
+              <a:t>16</a:t>
             </a:fld>
             <a:endParaRPr lang="en-US"/>
           </a:p>
@@ -1134,7 +996,6 @@
               <a:rPr lang="en-US" dirty="0"/>
               <a:t>Set the scene: demand is real, the bottleneck is manual catalogue creation. Recognising 'a chocolate bar' is trivial; recognising the exact SKU, pulling a realistic local price, and writing copy that doesn't misrepresent is where it gets hard.</a:t>
             </a:r>
-            <a:endParaRPr lang="en-US" dirty="0"/>
           </a:p>
         </p:txBody>
       </p:sp>
@@ -1222,7 +1083,6 @@
               <a:rPr lang="en-US" dirty="0"/>
               <a:t>The problem sits on the gap between off-the-shelf AI capability and real deployment. Three sub-problems: exact identity, defensible price, grounded copy. Solving it lowers the e-commerce barrier for retailers automation usually leaves behind.</a:t>
             </a:r>
-            <a:endParaRPr lang="en-US" dirty="0"/>
           </a:p>
         </p:txBody>
       </p:sp>
@@ -1310,7 +1170,6 @@
               <a:rPr lang="en-US" dirty="0"/>
               <a:t>State the research question verbatim. Four objectives: build, quantify, characterise failures, safeguard. Emphasise the framing — investigation with evaluation.</a:t>
             </a:r>
-            <a:endParaRPr lang="en-US" dirty="0"/>
           </a:p>
         </p:txBody>
       </p:sp>
@@ -1398,7 +1257,6 @@
               <a:rPr lang="en-US" dirty="0"/>
               <a:t>Ten papers across four sub-problems support each design choice. Novelty: the integrated, measured pipeline for corner-store FMCG, with same-SKU verification and selling-context responsible-AI as first-class evaluated concerns.</a:t>
             </a:r>
-            <a:endParaRPr lang="en-US" dirty="0"/>
           </a:p>
         </p:txBody>
       </p:sp>
@@ -1486,7 +1344,6 @@
               <a:rPr lang="en-US" dirty="0"/>
               <a:t>Walk the six stages. Key design choices: VLM+OCR fusion over a scratch classifier; grounding generation in retrieved attributes; price as estimate-with-range; image swap only on a confident same-SKU match with the owner's photo as fallback.</a:t>
             </a:r>
-            <a:endParaRPr lang="en-US" dirty="0"/>
           </a:p>
         </p:txBody>
       </p:sp>
@@ -1574,7 +1431,6 @@
               <a:rPr lang="en-US" dirty="0"/>
               <a:t>The data contract. Typed artifacts between stages mean each module can be developed and tested in isolation behind a frozen interface.</a:t>
             </a:r>
-            <a:endParaRPr lang="en-US" dirty="0"/>
           </a:p>
         </p:txBody>
       </p:sp>
@@ -1662,7 +1518,6 @@
               <a:rPr lang="en-US" dirty="0"/>
               <a:t>Six CRISP-DM phases. Note the data-strategy honesty: no ready-made 'corner-store photo → listing + price' dataset exists, so building the labelled test set with real observed prices is itself part of the contribution.</a:t>
             </a:r>
-            <a:endParaRPr lang="en-US" dirty="0"/>
           </a:p>
         </p:txBody>
       </p:sp>
@@ -1750,7 +1605,6 @@
               <a:rPr lang="en-US" dirty="0"/>
               <a:t>A genuinely runnable pipeline, not a mock. Hosted providers are pluggable; retrieval is barcode-first with graceful offline fallbacks; generation is grounded; image swap gated on same-SKU verification; every run writes a per-image trace log.</a:t>
             </a:r>
-            <a:endParaRPr lang="en-US" dirty="0"/>
           </a:p>
         </p:txBody>
       </p:sp>
@@ -1823,6 +1677,11 @@
 <file path=ppt/slideMasters/slideMaster1.xml><?xml version="1.0" encoding="utf-8"?>
 <p:sldMaster xmlns:a="http://schemas.openxmlformats.org/drawingml/2006/main" xmlns:r="http://schemas.openxmlformats.org/officeDocument/2006/relationships" xmlns:p="http://schemas.openxmlformats.org/presentationml/2006/main">
   <p:cSld>
+    <p:bg>
+      <p:bgRef idx="1001">
+        <a:schemeClr val="bg1"/>
+      </p:bgRef>
+    </p:bg>
     <p:spTree>
       <p:nvGrpSpPr>
         <p:cNvPr id="1" name=""/>
@@ -2105,6 +1964,7 @@
         <a:solidFill>
           <a:srgbClr val="0B2A3B"/>
         </a:solidFill>
+        <a:effectLst/>
       </p:bgPr>
     </p:bg>
     <p:spTree>
@@ -2142,6 +2002,13 @@
           </a:solidFill>
           <a:ln/>
         </p:spPr>
+        <p:txBody>
+          <a:bodyPr/>
+          <a:lstStyle/>
+          <a:p>
+            <a:endParaRPr lang="en-US"/>
+          </a:p>
+        </p:txBody>
       </p:sp>
       <p:sp>
         <p:nvSpPr>
@@ -2164,6 +2031,13 @@
           </a:solidFill>
           <a:ln/>
         </p:spPr>
+        <p:txBody>
+          <a:bodyPr/>
+          <a:lstStyle/>
+          <a:p>
+            <a:endParaRPr lang="en-US"/>
+          </a:p>
+        </p:txBody>
       </p:sp>
       <p:sp>
         <p:nvSpPr>
@@ -2186,11 +2060,11 @@
           <a:bodyPr wrap="square" rtlCol="0" anchor="ctr"/>
           <a:lstStyle/>
           <a:p>
-            <a:pPr indent="0" marL="0">
-              <a:buNone/>
-            </a:pPr>
-            <a:r>
-              <a:rPr lang="en-US" sz="1400" b="1" spc="200" kern="0" dirty="0">
+            <a:pPr marL="0" indent="0">
+              <a:buNone/>
+            </a:pPr>
+            <a:r>
+              <a:rPr lang="en-US" sz="1400" b="1" kern="0" spc="200" dirty="0">
                 <a:solidFill>
                   <a:srgbClr val="02C39A"/>
                 </a:solidFill>
@@ -2225,7 +2099,7 @@
           <a:bodyPr wrap="square" rtlCol="0" anchor="ctr"/>
           <a:lstStyle/>
           <a:p>
-            <a:pPr indent="0" marL="0">
+            <a:pPr marL="0" indent="0">
               <a:buNone/>
             </a:pPr>
             <a:r>
@@ -2264,7 +2138,7 @@
           <a:bodyPr wrap="square" rtlCol="0" anchor="ctr"/>
           <a:lstStyle/>
           <a:p>
-            <a:pPr indent="0" marL="0">
+            <a:pPr marL="0" indent="0">
               <a:buNone/>
             </a:pPr>
             <a:r>
@@ -2303,7 +2177,7 @@
           <a:bodyPr wrap="square" rtlCol="0" anchor="ctr"/>
           <a:lstStyle/>
           <a:p>
-            <a:pPr indent="0" marL="0">
+            <a:pPr marL="0" indent="0">
               <a:buNone/>
             </a:pPr>
             <a:r>
@@ -2342,7 +2216,7 @@
           <a:bodyPr wrap="square" rtlCol="0" anchor="ctr"/>
           <a:lstStyle/>
           <a:p>
-            <a:pPr indent="0" marL="0">
+            <a:pPr marL="0" indent="0">
               <a:buNone/>
             </a:pPr>
             <a:r>
@@ -2381,7 +2255,7 @@
           <a:bodyPr wrap="square" rtlCol="0" anchor="ctr"/>
           <a:lstStyle/>
           <a:p>
-            <a:pPr indent="0" marL="0">
+            <a:pPr marL="0" indent="0">
               <a:buNone/>
             </a:pPr>
             <a:r>
@@ -2415,6 +2289,7 @@
         <a:solidFill>
           <a:srgbClr val="F4F7F7"/>
         </a:solidFill>
+        <a:effectLst/>
       </p:bgPr>
     </p:bg>
     <p:spTree>
@@ -2452,11 +2327,11 @@
           <a:bodyPr wrap="square" lIns="0" tIns="0" rIns="0" bIns="0" rtlCol="0" anchor="ctr"/>
           <a:lstStyle/>
           <a:p>
-            <a:pPr indent="0" marL="0">
-              <a:buNone/>
-            </a:pPr>
-            <a:r>
-              <a:rPr lang="en-US" sz="1200" b="1" spc="200" kern="0" dirty="0">
+            <a:pPr marL="0" indent="0">
+              <a:buNone/>
+            </a:pPr>
+            <a:r>
+              <a:rPr lang="en-US" sz="1200" b="1" kern="0" spc="200" dirty="0">
                 <a:solidFill>
                   <a:srgbClr val="F96167"/>
                 </a:solidFill>
@@ -2491,7 +2366,7 @@
           <a:bodyPr wrap="square" lIns="0" tIns="0" rIns="0" bIns="0" rtlCol="0" anchor="ctr"/>
           <a:lstStyle/>
           <a:p>
-            <a:pPr indent="0" marL="0">
+            <a:pPr marL="0" indent="0">
               <a:buNone/>
             </a:pPr>
             <a:r>
@@ -2535,6 +2410,13 @@
             <a:prstDash val="solid"/>
           </a:ln>
         </p:spPr>
+        <p:txBody>
+          <a:bodyPr/>
+          <a:lstStyle/>
+          <a:p>
+            <a:endParaRPr lang="en-US"/>
+          </a:p>
+        </p:txBody>
       </p:sp>
       <p:sp>
         <p:nvSpPr>
@@ -2555,6 +2437,13 @@
           </a:solidFill>
           <a:ln/>
         </p:spPr>
+        <p:txBody>
+          <a:bodyPr/>
+          <a:lstStyle/>
+          <a:p>
+            <a:endParaRPr lang="en-US"/>
+          </a:p>
+        </p:txBody>
       </p:sp>
       <p:sp>
         <p:nvSpPr>
@@ -2577,7 +2466,7 @@
           <a:bodyPr wrap="square" lIns="0" tIns="0" rIns="0" bIns="0" rtlCol="0" anchor="ctr"/>
           <a:lstStyle/>
           <a:p>
-            <a:pPr algn="ctr" indent="0" marL="0">
+            <a:pPr marL="0" indent="0" algn="ctr">
               <a:buNone/>
             </a:pPr>
             <a:r>
@@ -2616,7 +2505,7 @@
           <a:bodyPr wrap="square" lIns="0" tIns="0" rIns="0" bIns="0" rtlCol="0" anchor="ctr"/>
           <a:lstStyle/>
           <a:p>
-            <a:pPr indent="0" marL="0">
+            <a:pPr marL="0" indent="0">
               <a:buNone/>
             </a:pPr>
             <a:r>
@@ -2655,7 +2544,7 @@
           <a:bodyPr wrap="square" lIns="0" tIns="0" rIns="0" bIns="0" rtlCol="0" anchor="ctr"/>
           <a:lstStyle/>
           <a:p>
-            <a:pPr indent="0" marL="0">
+            <a:pPr marL="0" indent="0">
               <a:buNone/>
             </a:pPr>
             <a:r>
@@ -2699,6 +2588,13 @@
             <a:prstDash val="solid"/>
           </a:ln>
         </p:spPr>
+        <p:txBody>
+          <a:bodyPr/>
+          <a:lstStyle/>
+          <a:p>
+            <a:endParaRPr lang="en-US"/>
+          </a:p>
+        </p:txBody>
       </p:sp>
       <p:sp>
         <p:nvSpPr>
@@ -2719,6 +2615,13 @@
           </a:solidFill>
           <a:ln/>
         </p:spPr>
+        <p:txBody>
+          <a:bodyPr/>
+          <a:lstStyle/>
+          <a:p>
+            <a:endParaRPr lang="en-US"/>
+          </a:p>
+        </p:txBody>
       </p:sp>
       <p:sp>
         <p:nvSpPr>
@@ -2741,7 +2644,7 @@
           <a:bodyPr wrap="square" lIns="0" tIns="0" rIns="0" bIns="0" rtlCol="0" anchor="ctr"/>
           <a:lstStyle/>
           <a:p>
-            <a:pPr algn="ctr" indent="0" marL="0">
+            <a:pPr marL="0" indent="0" algn="ctr">
               <a:buNone/>
             </a:pPr>
             <a:r>
@@ -2780,7 +2683,7 @@
           <a:bodyPr wrap="square" lIns="0" tIns="0" rIns="0" bIns="0" rtlCol="0" anchor="ctr"/>
           <a:lstStyle/>
           <a:p>
-            <a:pPr indent="0" marL="0">
+            <a:pPr marL="0" indent="0">
               <a:buNone/>
             </a:pPr>
             <a:r>
@@ -2819,7 +2722,7 @@
           <a:bodyPr wrap="square" lIns="0" tIns="0" rIns="0" bIns="0" rtlCol="0" anchor="ctr"/>
           <a:lstStyle/>
           <a:p>
-            <a:pPr indent="0" marL="0">
+            <a:pPr marL="0" indent="0">
               <a:buNone/>
             </a:pPr>
             <a:r>
@@ -2863,6 +2766,13 @@
             <a:prstDash val="solid"/>
           </a:ln>
         </p:spPr>
+        <p:txBody>
+          <a:bodyPr/>
+          <a:lstStyle/>
+          <a:p>
+            <a:endParaRPr lang="en-US"/>
+          </a:p>
+        </p:txBody>
       </p:sp>
       <p:sp>
         <p:nvSpPr>
@@ -2883,6 +2793,13 @@
           </a:solidFill>
           <a:ln/>
         </p:spPr>
+        <p:txBody>
+          <a:bodyPr/>
+          <a:lstStyle/>
+          <a:p>
+            <a:endParaRPr lang="en-US"/>
+          </a:p>
+        </p:txBody>
       </p:sp>
       <p:sp>
         <p:nvSpPr>
@@ -2905,7 +2822,7 @@
           <a:bodyPr wrap="square" lIns="0" tIns="0" rIns="0" bIns="0" rtlCol="0" anchor="ctr"/>
           <a:lstStyle/>
           <a:p>
-            <a:pPr algn="ctr" indent="0" marL="0">
+            <a:pPr marL="0" indent="0" algn="ctr">
               <a:buNone/>
             </a:pPr>
             <a:r>
@@ -2944,7 +2861,7 @@
           <a:bodyPr wrap="square" lIns="0" tIns="0" rIns="0" bIns="0" rtlCol="0" anchor="ctr"/>
           <a:lstStyle/>
           <a:p>
-            <a:pPr indent="0" marL="0">
+            <a:pPr marL="0" indent="0">
               <a:buNone/>
             </a:pPr>
             <a:r>
@@ -2983,7 +2900,7 @@
           <a:bodyPr wrap="square" lIns="0" tIns="0" rIns="0" bIns="0" rtlCol="0" anchor="ctr"/>
           <a:lstStyle/>
           <a:p>
-            <a:pPr indent="0" marL="0">
+            <a:pPr marL="0" indent="0">
               <a:buNone/>
             </a:pPr>
             <a:r>
@@ -3027,6 +2944,13 @@
             <a:prstDash val="solid"/>
           </a:ln>
         </p:spPr>
+        <p:txBody>
+          <a:bodyPr/>
+          <a:lstStyle/>
+          <a:p>
+            <a:endParaRPr lang="en-US"/>
+          </a:p>
+        </p:txBody>
       </p:sp>
       <p:sp>
         <p:nvSpPr>
@@ -3047,6 +2971,13 @@
           </a:solidFill>
           <a:ln/>
         </p:spPr>
+        <p:txBody>
+          <a:bodyPr/>
+          <a:lstStyle/>
+          <a:p>
+            <a:endParaRPr lang="en-US"/>
+          </a:p>
+        </p:txBody>
       </p:sp>
       <p:sp>
         <p:nvSpPr>
@@ -3069,7 +3000,7 @@
           <a:bodyPr wrap="square" lIns="0" tIns="0" rIns="0" bIns="0" rtlCol="0" anchor="ctr"/>
           <a:lstStyle/>
           <a:p>
-            <a:pPr algn="ctr" indent="0" marL="0">
+            <a:pPr marL="0" indent="0" algn="ctr">
               <a:buNone/>
             </a:pPr>
             <a:r>
@@ -3108,7 +3039,7 @@
           <a:bodyPr wrap="square" lIns="0" tIns="0" rIns="0" bIns="0" rtlCol="0" anchor="ctr"/>
           <a:lstStyle/>
           <a:p>
-            <a:pPr indent="0" marL="0">
+            <a:pPr marL="0" indent="0">
               <a:buNone/>
             </a:pPr>
             <a:r>
@@ -3147,7 +3078,7 @@
           <a:bodyPr wrap="square" lIns="0" tIns="0" rIns="0" bIns="0" rtlCol="0" anchor="ctr"/>
           <a:lstStyle/>
           <a:p>
-            <a:pPr indent="0" marL="0">
+            <a:pPr marL="0" indent="0">
               <a:buNone/>
             </a:pPr>
             <a:r>
@@ -3186,7 +3117,7 @@
           <a:bodyPr wrap="square" rtlCol="0" anchor="ctr"/>
           <a:lstStyle/>
           <a:p>
-            <a:pPr algn="r" indent="0" marL="0">
+            <a:pPr marL="0" indent="0" algn="r">
               <a:buNone/>
             </a:pPr>
             <a:r>
@@ -3220,6 +3151,7 @@
         <a:solidFill>
           <a:srgbClr val="F4F7F7"/>
         </a:solidFill>
+        <a:effectLst/>
       </p:bgPr>
     </p:bg>
     <p:spTree>
@@ -3257,11 +3189,11 @@
           <a:bodyPr wrap="square" lIns="0" tIns="0" rIns="0" bIns="0" rtlCol="0" anchor="ctr"/>
           <a:lstStyle/>
           <a:p>
-            <a:pPr indent="0" marL="0">
-              <a:buNone/>
-            </a:pPr>
-            <a:r>
-              <a:rPr lang="en-US" sz="1200" b="1" spc="200" kern="0" dirty="0">
+            <a:pPr marL="0" indent="0">
+              <a:buNone/>
+            </a:pPr>
+            <a:r>
+              <a:rPr lang="en-US" sz="1200" b="1" kern="0" spc="200" dirty="0">
                 <a:solidFill>
                   <a:srgbClr val="028090"/>
                 </a:solidFill>
@@ -3296,7 +3228,7 @@
           <a:bodyPr wrap="square" lIns="0" tIns="0" rIns="0" bIns="0" rtlCol="0" anchor="ctr"/>
           <a:lstStyle/>
           <a:p>
-            <a:pPr indent="0" marL="0">
+            <a:pPr marL="0" indent="0">
               <a:buNone/>
             </a:pPr>
             <a:r>
@@ -3340,6 +3272,13 @@
             <a:prstDash val="solid"/>
           </a:ln>
         </p:spPr>
+        <p:txBody>
+          <a:bodyPr/>
+          <a:lstStyle/>
+          <a:p>
+            <a:endParaRPr lang="en-US"/>
+          </a:p>
+        </p:txBody>
       </p:sp>
       <p:sp>
         <p:nvSpPr>
@@ -3362,7 +3301,7 @@
           <a:bodyPr wrap="square" lIns="635" tIns="635" rIns="635" bIns="635" rtlCol="0" anchor="ctr"/>
           <a:lstStyle/>
           <a:p>
-            <a:pPr indent="0" marL="0">
+            <a:pPr marL="0" indent="0">
               <a:buNone/>
             </a:pPr>
             <a:r>
@@ -3401,7 +3340,7 @@
           <a:bodyPr wrap="square" lIns="635" tIns="635" rIns="635" bIns="635" rtlCol="0" anchor="ctr"/>
           <a:lstStyle/>
           <a:p>
-            <a:pPr indent="0" marL="0">
+            <a:pPr marL="0" indent="0">
               <a:buNone/>
             </a:pPr>
             <a:r>
@@ -3445,6 +3384,13 @@
             <a:prstDash val="solid"/>
           </a:ln>
         </p:spPr>
+        <p:txBody>
+          <a:bodyPr/>
+          <a:lstStyle/>
+          <a:p>
+            <a:endParaRPr lang="en-US"/>
+          </a:p>
+        </p:txBody>
       </p:sp>
       <p:sp>
         <p:nvSpPr>
@@ -3467,7 +3413,7 @@
           <a:bodyPr wrap="square" lIns="635" tIns="635" rIns="635" bIns="635" rtlCol="0" anchor="ctr"/>
           <a:lstStyle/>
           <a:p>
-            <a:pPr indent="0" marL="0">
+            <a:pPr marL="0" indent="0">
               <a:buNone/>
             </a:pPr>
             <a:r>
@@ -3506,7 +3452,7 @@
           <a:bodyPr wrap="square" lIns="635" tIns="635" rIns="635" bIns="635" rtlCol="0" anchor="ctr"/>
           <a:lstStyle/>
           <a:p>
-            <a:pPr indent="0" marL="0">
+            <a:pPr marL="0" indent="0">
               <a:buNone/>
             </a:pPr>
             <a:r>
@@ -3550,6 +3496,13 @@
             <a:prstDash val="solid"/>
           </a:ln>
         </p:spPr>
+        <p:txBody>
+          <a:bodyPr/>
+          <a:lstStyle/>
+          <a:p>
+            <a:endParaRPr lang="en-US"/>
+          </a:p>
+        </p:txBody>
       </p:sp>
       <p:sp>
         <p:nvSpPr>
@@ -3572,7 +3525,7 @@
           <a:bodyPr wrap="square" lIns="635" tIns="635" rIns="635" bIns="635" rtlCol="0" anchor="ctr"/>
           <a:lstStyle/>
           <a:p>
-            <a:pPr indent="0" marL="0">
+            <a:pPr marL="0" indent="0">
               <a:buNone/>
             </a:pPr>
             <a:r>
@@ -3611,7 +3564,7 @@
           <a:bodyPr wrap="square" lIns="635" tIns="635" rIns="635" bIns="635" rtlCol="0" anchor="ctr"/>
           <a:lstStyle/>
           <a:p>
-            <a:pPr indent="0" marL="0">
+            <a:pPr marL="0" indent="0">
               <a:buNone/>
             </a:pPr>
             <a:r>
@@ -3655,6 +3608,13 @@
             <a:prstDash val="solid"/>
           </a:ln>
         </p:spPr>
+        <p:txBody>
+          <a:bodyPr/>
+          <a:lstStyle/>
+          <a:p>
+            <a:endParaRPr lang="en-US"/>
+          </a:p>
+        </p:txBody>
       </p:sp>
       <p:sp>
         <p:nvSpPr>
@@ -3677,7 +3637,7 @@
           <a:bodyPr wrap="square" lIns="635" tIns="635" rIns="635" bIns="635" rtlCol="0" anchor="ctr"/>
           <a:lstStyle/>
           <a:p>
-            <a:pPr indent="0" marL="0">
+            <a:pPr marL="0" indent="0">
               <a:buNone/>
             </a:pPr>
             <a:r>
@@ -3716,7 +3676,7 @@
           <a:bodyPr wrap="square" lIns="635" tIns="635" rIns="635" bIns="635" rtlCol="0" anchor="ctr"/>
           <a:lstStyle/>
           <a:p>
-            <a:pPr indent="0" marL="0">
+            <a:pPr marL="0" indent="0">
               <a:buNone/>
             </a:pPr>
             <a:r>
@@ -3760,6 +3720,13 @@
             <a:prstDash val="solid"/>
           </a:ln>
         </p:spPr>
+        <p:txBody>
+          <a:bodyPr/>
+          <a:lstStyle/>
+          <a:p>
+            <a:endParaRPr lang="en-US"/>
+          </a:p>
+        </p:txBody>
       </p:sp>
       <p:sp>
         <p:nvSpPr>
@@ -3782,7 +3749,7 @@
           <a:bodyPr wrap="square" lIns="635" tIns="635" rIns="635" bIns="635" rtlCol="0" anchor="ctr"/>
           <a:lstStyle/>
           <a:p>
-            <a:pPr indent="0" marL="0">
+            <a:pPr marL="0" indent="0">
               <a:buNone/>
             </a:pPr>
             <a:r>
@@ -3821,7 +3788,7 @@
           <a:bodyPr wrap="square" lIns="635" tIns="635" rIns="635" bIns="635" rtlCol="0" anchor="ctr"/>
           <a:lstStyle/>
           <a:p>
-            <a:pPr indent="0" marL="0">
+            <a:pPr marL="0" indent="0">
               <a:buNone/>
             </a:pPr>
             <a:r>
@@ -3865,6 +3832,13 @@
             <a:prstDash val="solid"/>
           </a:ln>
         </p:spPr>
+        <p:txBody>
+          <a:bodyPr/>
+          <a:lstStyle/>
+          <a:p>
+            <a:endParaRPr lang="en-US"/>
+          </a:p>
+        </p:txBody>
       </p:sp>
       <p:sp>
         <p:nvSpPr>
@@ -3887,7 +3861,7 @@
           <a:bodyPr wrap="square" lIns="635" tIns="635" rIns="635" bIns="635" rtlCol="0" anchor="ctr"/>
           <a:lstStyle/>
           <a:p>
-            <a:pPr indent="0" marL="0">
+            <a:pPr marL="0" indent="0">
               <a:buNone/>
             </a:pPr>
             <a:r>
@@ -3926,7 +3900,7 @@
           <a:bodyPr wrap="square" lIns="635" tIns="635" rIns="635" bIns="635" rtlCol="0" anchor="ctr"/>
           <a:lstStyle/>
           <a:p>
-            <a:pPr indent="0" marL="0">
+            <a:pPr marL="0" indent="0">
               <a:buNone/>
             </a:pPr>
             <a:r>
@@ -3970,6 +3944,13 @@
             <a:prstDash val="solid"/>
           </a:ln>
         </p:spPr>
+        <p:txBody>
+          <a:bodyPr/>
+          <a:lstStyle/>
+          <a:p>
+            <a:endParaRPr lang="en-US"/>
+          </a:p>
+        </p:txBody>
       </p:sp>
       <p:sp>
         <p:nvSpPr>
@@ -3992,7 +3973,7 @@
           <a:bodyPr wrap="square" lIns="635" tIns="635" rIns="635" bIns="635" rtlCol="0" anchor="ctr"/>
           <a:lstStyle/>
           <a:p>
-            <a:pPr indent="0" marL="0">
+            <a:pPr marL="0" indent="0">
               <a:buNone/>
             </a:pPr>
             <a:r>
@@ -4031,7 +4012,7 @@
           <a:bodyPr wrap="square" lIns="635" tIns="635" rIns="635" bIns="635" rtlCol="0" anchor="ctr"/>
           <a:lstStyle/>
           <a:p>
-            <a:pPr indent="0" marL="0">
+            <a:pPr marL="0" indent="0">
               <a:buNone/>
             </a:pPr>
             <a:r>
@@ -4070,6 +4051,13 @@
           </a:solidFill>
           <a:ln/>
         </p:spPr>
+        <p:txBody>
+          <a:bodyPr/>
+          <a:lstStyle/>
+          <a:p>
+            <a:endParaRPr lang="en-US"/>
+          </a:p>
+        </p:txBody>
       </p:sp>
       <p:sp>
         <p:nvSpPr>
@@ -4092,7 +4080,7 @@
           <a:bodyPr wrap="square" lIns="0" tIns="0" rIns="0" bIns="0" rtlCol="0" anchor="ctr"/>
           <a:lstStyle/>
           <a:p>
-            <a:pPr indent="0" marL="0">
+            <a:pPr marL="0" indent="0">
               <a:buNone/>
             </a:pPr>
             <a:r>
@@ -4106,9 +4094,6 @@
               </a:rPr>
               <a:t>Naive baseline:  </a:t>
             </a:r>
-            <a:pPr indent="0" marL="0">
-              <a:buNone/>
-            </a:pPr>
             <a:r>
               <a:rPr lang="en-US" sz="1350" dirty="0">
                 <a:solidFill>
@@ -4145,7 +4130,7 @@
           <a:bodyPr wrap="square" rtlCol="0" anchor="ctr"/>
           <a:lstStyle/>
           <a:p>
-            <a:pPr algn="r" indent="0" marL="0">
+            <a:pPr marL="0" indent="0" algn="r">
               <a:buNone/>
             </a:pPr>
             <a:r>
@@ -4179,6 +4164,7 @@
         <a:solidFill>
           <a:srgbClr val="F4F7F7"/>
         </a:solidFill>
+        <a:effectLst/>
       </p:bgPr>
     </p:bg>
     <p:spTree>
@@ -4216,11 +4202,11 @@
           <a:bodyPr wrap="square" lIns="0" tIns="0" rIns="0" bIns="0" rtlCol="0" anchor="ctr"/>
           <a:lstStyle/>
           <a:p>
-            <a:pPr indent="0" marL="0">
-              <a:buNone/>
-            </a:pPr>
-            <a:r>
-              <a:rPr lang="en-US" sz="1200" b="1" spc="200" kern="0" dirty="0">
+            <a:pPr marL="0" indent="0">
+              <a:buNone/>
+            </a:pPr>
+            <a:r>
+              <a:rPr lang="en-US" sz="1200" b="1" kern="0" spc="200" dirty="0">
                 <a:solidFill>
                   <a:srgbClr val="028090"/>
                 </a:solidFill>
@@ -4255,7 +4241,7 @@
           <a:bodyPr wrap="square" lIns="0" tIns="0" rIns="0" bIns="0" rtlCol="0" anchor="ctr"/>
           <a:lstStyle/>
           <a:p>
-            <a:pPr indent="0" marL="0">
+            <a:pPr marL="0" indent="0">
               <a:buNone/>
             </a:pPr>
             <a:r>
@@ -4267,7 +4253,7 @@
                 <a:ea typeface="Cambria" pitchFamily="34" charset="-122"/>
                 <a:cs typeface="Cambria" pitchFamily="34" charset="-120"/>
               </a:rPr>
-              <a:t>Results — pending live evaluation run</a:t>
+              <a:t>Results — 58-item corner-store test set</a:t>
             </a:r>
             <a:endParaRPr lang="en-US" sz="3200" dirty="0"/>
           </a:p>
@@ -4275,80 +4261,53 @@
       </p:sp>
       <p:sp>
         <p:nvSpPr>
-          <p:cNvPr id="4" name="Shape 2"/>
-          <p:cNvSpPr/>
-          <p:nvPr/>
-        </p:nvSpPr>
-        <p:spPr>
-          <a:xfrm>
-            <a:off x="548640" y="1645920"/>
-            <a:ext cx="11064240" cy="548640"/>
-          </a:xfrm>
-          <a:prstGeom prst="roundRect">
-            <a:avLst>
-              <a:gd name="adj" fmla="val 13333"/>
-            </a:avLst>
-          </a:prstGeom>
-          <a:solidFill>
-            <a:srgbClr val="FDECEC"/>
-          </a:solidFill>
-          <a:ln w="12700">
-            <a:solidFill>
-              <a:srgbClr val="F96167"/>
-            </a:solidFill>
-            <a:prstDash val="solid"/>
-          </a:ln>
-        </p:spPr>
-      </p:sp>
-      <p:sp>
-        <p:nvSpPr>
-          <p:cNvPr id="5" name="Text 3"/>
-          <p:cNvSpPr/>
-          <p:nvPr/>
-        </p:nvSpPr>
-        <p:spPr>
-          <a:xfrm>
-            <a:off x="822960" y="1645920"/>
-            <a:ext cx="10515600" cy="548640"/>
-          </a:xfrm>
-          <a:prstGeom prst="rect">
-            <a:avLst/>
-          </a:prstGeom>
-          <a:noFill/>
-          <a:ln/>
-        </p:spPr>
-        <p:txBody>
-          <a:bodyPr wrap="square" lIns="0" tIns="0" rIns="0" bIns="0" rtlCol="0" anchor="ctr"/>
-          <a:lstStyle/>
-          <a:p>
-            <a:pPr indent="0" marL="0">
-              <a:buNone/>
-            </a:pPr>
-            <a:r>
-              <a:rPr lang="en-US" sz="1250" b="1" dirty="0">
-                <a:solidFill>
-                  <a:srgbClr val="F96167"/>
-                </a:solidFill>
-                <a:latin typeface="Calibri" pitchFamily="34" charset="0"/>
-                <a:ea typeface="Calibri" pitchFamily="34" charset="-122"/>
-                <a:cs typeface="Calibri" pitchFamily="34" charset="-120"/>
-              </a:rPr>
-              <a:t>PLACEHOLDER — populate after the ~50-item labelled test set is scored on the live pipeline vs the naive baseline.</a:t>
-            </a:r>
-            <a:endParaRPr lang="en-US" sz="1250" dirty="0"/>
-          </a:p>
-        </p:txBody>
-      </p:sp>
-      <p:sp>
-        <p:nvSpPr>
-          <p:cNvPr id="6" name="Shape 4"/>
-          <p:cNvSpPr/>
-          <p:nvPr/>
-        </p:nvSpPr>
-        <p:spPr>
-          <a:xfrm>
-            <a:off x="548640" y="2468880"/>
-            <a:ext cx="11064240" cy="502920"/>
+          <p:cNvPr id="4" name="Text 2"/>
+          <p:cNvSpPr/>
+          <p:nvPr/>
+        </p:nvSpPr>
+        <p:spPr>
+          <a:xfrm>
+            <a:off x="548640" y="1536192"/>
+            <a:ext cx="11064240" cy="457200"/>
+          </a:xfrm>
+          <a:prstGeom prst="rect">
+            <a:avLst/>
+          </a:prstGeom>
+          <a:noFill/>
+          <a:ln/>
+        </p:spPr>
+        <p:txBody>
+          <a:bodyPr wrap="square" lIns="0" tIns="0" rIns="0" bIns="0" rtlCol="0" anchor="ctr"/>
+          <a:lstStyle/>
+          <a:p>
+            <a:pPr marL="0" indent="0">
+              <a:buNone/>
+            </a:pPr>
+            <a:r>
+              <a:rPr lang="en-US" sz="1200" dirty="0">
+                <a:solidFill>
+                  <a:srgbClr val="5B6B73"/>
+                </a:solidFill>
+                <a:latin typeface="Calibri" pitchFamily="34" charset="0"/>
+                <a:ea typeface="Calibri" pitchFamily="34" charset="-122"/>
+                <a:cs typeface="Calibri" pitchFamily="34" charset="-120"/>
+              </a:rPr>
+              <a:t>Live run: OpenAI gpt-4o-mini (recognition + generation) + Google Shopping retrieval; n = 58 hand-labelled products, scored against the naive VLM-caption baseline. Winner per row in green.</a:t>
+            </a:r>
+            <a:endParaRPr lang="en-US" sz="1200" dirty="0"/>
+          </a:p>
+        </p:txBody>
+      </p:sp>
+      <p:sp>
+        <p:nvSpPr>
+          <p:cNvPr id="5" name="Shape 3"/>
+          <p:cNvSpPr/>
+          <p:nvPr/>
+        </p:nvSpPr>
+        <p:spPr>
+          <a:xfrm>
+            <a:off x="548640" y="2011680"/>
+            <a:ext cx="11064240" cy="438912"/>
           </a:xfrm>
           <a:prstGeom prst="rect">
             <a:avLst/>
@@ -4358,6 +4317,52 @@
           </a:solidFill>
           <a:ln/>
         </p:spPr>
+        <p:txBody>
+          <a:bodyPr/>
+          <a:lstStyle/>
+          <a:p>
+            <a:endParaRPr lang="en-US"/>
+          </a:p>
+        </p:txBody>
+      </p:sp>
+      <p:sp>
+        <p:nvSpPr>
+          <p:cNvPr id="6" name="Text 4"/>
+          <p:cNvSpPr/>
+          <p:nvPr/>
+        </p:nvSpPr>
+        <p:spPr>
+          <a:xfrm>
+            <a:off x="548640" y="2011680"/>
+            <a:ext cx="5943600" cy="438912"/>
+          </a:xfrm>
+          <a:prstGeom prst="rect">
+            <a:avLst/>
+          </a:prstGeom>
+          <a:noFill/>
+          <a:ln/>
+        </p:spPr>
+        <p:txBody>
+          <a:bodyPr wrap="square" lIns="1270" tIns="1270" rIns="1270" bIns="1270" rtlCol="0" anchor="ctr"/>
+          <a:lstStyle/>
+          <a:p>
+            <a:pPr marL="0" indent="0" algn="l">
+              <a:buNone/>
+            </a:pPr>
+            <a:r>
+              <a:rPr lang="en-US" sz="1300" b="1" dirty="0">
+                <a:solidFill>
+                  <a:srgbClr val="FFFFFF"/>
+                </a:solidFill>
+                <a:latin typeface="Calibri" pitchFamily="34" charset="0"/>
+                <a:ea typeface="Calibri" pitchFamily="34" charset="-122"/>
+                <a:cs typeface="Calibri" pitchFamily="34" charset="-120"/>
+              </a:rPr>
+              <a:t>Metric</a:t>
+            </a:r>
+            <a:endParaRPr lang="en-US" sz="1300" dirty="0"/>
+          </a:p>
+        </p:txBody>
       </p:sp>
       <p:sp>
         <p:nvSpPr>
@@ -4367,8 +4372,8 @@
         </p:nvSpPr>
         <p:spPr>
           <a:xfrm>
-            <a:off x="548640" y="2468880"/>
-            <a:ext cx="5943600" cy="502920"/>
+            <a:off x="6492240" y="2011680"/>
+            <a:ext cx="2560320" cy="438912"/>
           </a:xfrm>
           <a:prstGeom prst="rect">
             <a:avLst/>
@@ -4380,11 +4385,11 @@
           <a:bodyPr wrap="square" lIns="1270" tIns="1270" rIns="1270" bIns="1270" rtlCol="0" anchor="ctr"/>
           <a:lstStyle/>
           <a:p>
-            <a:pPr indent="0" marL="0">
-              <a:buNone/>
-            </a:pPr>
-            <a:r>
-              <a:rPr lang="en-US" sz="1350" b="1" dirty="0">
+            <a:pPr marL="0" indent="0" algn="ctr">
+              <a:buNone/>
+            </a:pPr>
+            <a:r>
+              <a:rPr lang="en-US" sz="1300" b="1" dirty="0">
                 <a:solidFill>
                   <a:srgbClr val="FFFFFF"/>
                 </a:solidFill>
@@ -4392,9 +4397,9 @@
                 <a:ea typeface="Calibri" pitchFamily="34" charset="-122"/>
                 <a:cs typeface="Calibri" pitchFamily="34" charset="-120"/>
               </a:rPr>
-              <a:t>Metric</a:t>
-            </a:r>
-            <a:endParaRPr lang="en-US" sz="1350" dirty="0"/>
+              <a:t>Naive baseline</a:t>
+            </a:r>
+            <a:endParaRPr lang="en-US" sz="1300" dirty="0"/>
           </a:p>
         </p:txBody>
       </p:sp>
@@ -4406,8 +4411,8 @@
         </p:nvSpPr>
         <p:spPr>
           <a:xfrm>
-            <a:off x="6492240" y="2468880"/>
-            <a:ext cx="2560320" cy="502920"/>
+            <a:off x="9052560" y="2011680"/>
+            <a:ext cx="2560320" cy="438912"/>
           </a:xfrm>
           <a:prstGeom prst="rect">
             <a:avLst/>
@@ -4419,11 +4424,11 @@
           <a:bodyPr wrap="square" lIns="1270" tIns="1270" rIns="1270" bIns="1270" rtlCol="0" anchor="ctr"/>
           <a:lstStyle/>
           <a:p>
-            <a:pPr indent="0" marL="0">
-              <a:buNone/>
-            </a:pPr>
-            <a:r>
-              <a:rPr lang="en-US" sz="1350" b="1" dirty="0">
+            <a:pPr marL="0" indent="0" algn="ctr">
+              <a:buNone/>
+            </a:pPr>
+            <a:r>
+              <a:rPr lang="en-US" sz="1300" b="1" dirty="0">
                 <a:solidFill>
                   <a:srgbClr val="FFFFFF"/>
                 </a:solidFill>
@@ -4431,61 +4436,22 @@
                 <a:ea typeface="Calibri" pitchFamily="34" charset="-122"/>
                 <a:cs typeface="Calibri" pitchFamily="34" charset="-120"/>
               </a:rPr>
-              <a:t>Naive baseline</a:t>
-            </a:r>
-            <a:endParaRPr lang="en-US" sz="1350" dirty="0"/>
-          </a:p>
-        </p:txBody>
-      </p:sp>
-      <p:sp>
-        <p:nvSpPr>
-          <p:cNvPr id="9" name="Text 7"/>
-          <p:cNvSpPr/>
-          <p:nvPr/>
-        </p:nvSpPr>
-        <p:spPr>
-          <a:xfrm>
-            <a:off x="9052560" y="2468880"/>
-            <a:ext cx="2560320" cy="502920"/>
-          </a:xfrm>
-          <a:prstGeom prst="rect">
-            <a:avLst/>
-          </a:prstGeom>
-          <a:noFill/>
-          <a:ln/>
-        </p:spPr>
-        <p:txBody>
-          <a:bodyPr wrap="square" lIns="1270" tIns="1270" rIns="1270" bIns="1270" rtlCol="0" anchor="ctr"/>
-          <a:lstStyle/>
-          <a:p>
-            <a:pPr indent="0" marL="0">
-              <a:buNone/>
-            </a:pPr>
-            <a:r>
-              <a:rPr lang="en-US" sz="1350" b="1" dirty="0">
-                <a:solidFill>
-                  <a:srgbClr val="FFFFFF"/>
-                </a:solidFill>
-                <a:latin typeface="Calibri" pitchFamily="34" charset="0"/>
-                <a:ea typeface="Calibri" pitchFamily="34" charset="-122"/>
-                <a:cs typeface="Calibri" pitchFamily="34" charset="-120"/>
-              </a:rPr>
               <a:t>Snap-to-Sell</a:t>
             </a:r>
-            <a:endParaRPr lang="en-US" sz="1350" dirty="0"/>
-          </a:p>
-        </p:txBody>
-      </p:sp>
-      <p:sp>
-        <p:nvSpPr>
-          <p:cNvPr id="10" name="Shape 8"/>
-          <p:cNvSpPr/>
-          <p:nvPr/>
-        </p:nvSpPr>
-        <p:spPr>
-          <a:xfrm>
-            <a:off x="548640" y="2971800"/>
-            <a:ext cx="11064240" cy="502920"/>
+            <a:endParaRPr lang="en-US" sz="1300" dirty="0"/>
+          </a:p>
+        </p:txBody>
+      </p:sp>
+      <p:sp>
+        <p:nvSpPr>
+          <p:cNvPr id="9" name="Shape 7"/>
+          <p:cNvSpPr/>
+          <p:nvPr/>
+        </p:nvSpPr>
+        <p:spPr>
+          <a:xfrm>
+            <a:off x="548640" y="2450592"/>
+            <a:ext cx="11064240" cy="457200"/>
           </a:xfrm>
           <a:prstGeom prst="rect">
             <a:avLst/>
@@ -4495,6 +4461,52 @@
           </a:solidFill>
           <a:ln/>
         </p:spPr>
+        <p:txBody>
+          <a:bodyPr/>
+          <a:lstStyle/>
+          <a:p>
+            <a:endParaRPr lang="en-US"/>
+          </a:p>
+        </p:txBody>
+      </p:sp>
+      <p:sp>
+        <p:nvSpPr>
+          <p:cNvPr id="10" name="Text 8"/>
+          <p:cNvSpPr/>
+          <p:nvPr/>
+        </p:nvSpPr>
+        <p:spPr>
+          <a:xfrm>
+            <a:off x="548640" y="2450592"/>
+            <a:ext cx="5943600" cy="457200"/>
+          </a:xfrm>
+          <a:prstGeom prst="rect">
+            <a:avLst/>
+          </a:prstGeom>
+          <a:noFill/>
+          <a:ln/>
+        </p:spPr>
+        <p:txBody>
+          <a:bodyPr wrap="square" lIns="1270" tIns="1270" rIns="1270" bIns="1270" rtlCol="0" anchor="ctr"/>
+          <a:lstStyle/>
+          <a:p>
+            <a:pPr marL="0" indent="0">
+              <a:buNone/>
+            </a:pPr>
+            <a:r>
+              <a:rPr lang="en-US" sz="1250" dirty="0">
+                <a:solidFill>
+                  <a:srgbClr val="1B2A33"/>
+                </a:solidFill>
+                <a:latin typeface="Calibri" pitchFamily="34" charset="0"/>
+                <a:ea typeface="Calibri" pitchFamily="34" charset="-122"/>
+                <a:cs typeface="Calibri" pitchFamily="34" charset="-120"/>
+              </a:rPr>
+              <a:t>Top-1 identification accuracy</a:t>
+            </a:r>
+            <a:endParaRPr lang="en-US" sz="1250" dirty="0"/>
+          </a:p>
+        </p:txBody>
       </p:sp>
       <p:sp>
         <p:nvSpPr>
@@ -4504,24 +4516,24 @@
         </p:nvSpPr>
         <p:spPr>
           <a:xfrm>
-            <a:off x="548640" y="2971800"/>
-            <a:ext cx="5943600" cy="502920"/>
-          </a:xfrm>
-          <a:prstGeom prst="rect">
-            <a:avLst/>
-          </a:prstGeom>
-          <a:noFill/>
-          <a:ln/>
-        </p:spPr>
-        <p:txBody>
-          <a:bodyPr wrap="square" lIns="1270" tIns="1270" rIns="1270" bIns="1270" rtlCol="0" anchor="ctr"/>
-          <a:lstStyle/>
-          <a:p>
-            <a:pPr indent="0" marL="0">
-              <a:buNone/>
-            </a:pPr>
-            <a:r>
-              <a:rPr lang="en-US" sz="1250" dirty="0">
+            <a:off x="6492240" y="2450592"/>
+            <a:ext cx="2560320" cy="457200"/>
+          </a:xfrm>
+          <a:prstGeom prst="rect">
+            <a:avLst/>
+          </a:prstGeom>
+          <a:noFill/>
+          <a:ln/>
+        </p:spPr>
+        <p:txBody>
+          <a:bodyPr wrap="square" lIns="0" tIns="0" rIns="0" bIns="0" rtlCol="0" anchor="ctr"/>
+          <a:lstStyle/>
+          <a:p>
+            <a:pPr marL="0" indent="0" algn="ctr">
+              <a:buNone/>
+            </a:pPr>
+            <a:r>
+              <a:rPr lang="en-US" sz="1300" dirty="0">
                 <a:solidFill>
                   <a:srgbClr val="1B2A33"/>
                 </a:solidFill>
@@ -4529,9 +4541,9 @@
                 <a:ea typeface="Calibri" pitchFamily="34" charset="-122"/>
                 <a:cs typeface="Calibri" pitchFamily="34" charset="-120"/>
               </a:rPr>
-              <a:t>Top-1 identification accuracy</a:t>
-            </a:r>
-            <a:endParaRPr lang="en-US" sz="1250" dirty="0"/>
+              <a:t>84.5%</a:t>
+            </a:r>
+            <a:endParaRPr lang="en-US" sz="1300" dirty="0"/>
           </a:p>
         </p:txBody>
       </p:sp>
@@ -4543,32 +4555,32 @@
         </p:nvSpPr>
         <p:spPr>
           <a:xfrm>
-            <a:off x="6492240" y="2971800"/>
-            <a:ext cx="2560320" cy="502920"/>
-          </a:xfrm>
-          <a:prstGeom prst="rect">
-            <a:avLst/>
-          </a:prstGeom>
-          <a:noFill/>
-          <a:ln/>
-        </p:spPr>
-        <p:txBody>
-          <a:bodyPr wrap="square" lIns="0" tIns="0" rIns="0" bIns="0" rtlCol="0" anchor="ctr"/>
-          <a:lstStyle/>
-          <a:p>
-            <a:pPr algn="ctr" indent="0" marL="0">
-              <a:buNone/>
-            </a:pPr>
-            <a:r>
-              <a:rPr lang="en-US" sz="1300" dirty="0">
-                <a:solidFill>
-                  <a:srgbClr val="5B6B73"/>
-                </a:solidFill>
-                <a:latin typeface="Calibri" pitchFamily="34" charset="0"/>
-                <a:ea typeface="Calibri" pitchFamily="34" charset="-122"/>
-                <a:cs typeface="Calibri" pitchFamily="34" charset="-120"/>
-              </a:rPr>
-              <a:t>—</a:t>
+            <a:off x="9052560" y="2450592"/>
+            <a:ext cx="2560320" cy="457200"/>
+          </a:xfrm>
+          <a:prstGeom prst="rect">
+            <a:avLst/>
+          </a:prstGeom>
+          <a:noFill/>
+          <a:ln/>
+        </p:spPr>
+        <p:txBody>
+          <a:bodyPr wrap="square" lIns="0" tIns="0" rIns="0" bIns="0" rtlCol="0" anchor="ctr"/>
+          <a:lstStyle/>
+          <a:p>
+            <a:pPr marL="0" indent="0" algn="ctr">
+              <a:buNone/>
+            </a:pPr>
+            <a:r>
+              <a:rPr lang="en-US" sz="1300" b="1" dirty="0">
+                <a:solidFill>
+                  <a:srgbClr val="0A7D3C"/>
+                </a:solidFill>
+                <a:latin typeface="Calibri" pitchFamily="34" charset="0"/>
+                <a:ea typeface="Calibri" pitchFamily="34" charset="-122"/>
+                <a:cs typeface="Calibri" pitchFamily="34" charset="-120"/>
+              </a:rPr>
+              <a:t>86.2%</a:t>
             </a:r>
             <a:endParaRPr lang="en-US" sz="1300" dirty="0"/>
           </a:p>
@@ -4576,53 +4588,14 @@
       </p:sp>
       <p:sp>
         <p:nvSpPr>
-          <p:cNvPr id="13" name="Text 11"/>
-          <p:cNvSpPr/>
-          <p:nvPr/>
-        </p:nvSpPr>
-        <p:spPr>
-          <a:xfrm>
-            <a:off x="9052560" y="2971800"/>
-            <a:ext cx="2560320" cy="502920"/>
-          </a:xfrm>
-          <a:prstGeom prst="rect">
-            <a:avLst/>
-          </a:prstGeom>
-          <a:noFill/>
-          <a:ln/>
-        </p:spPr>
-        <p:txBody>
-          <a:bodyPr wrap="square" lIns="0" tIns="0" rIns="0" bIns="0" rtlCol="0" anchor="ctr"/>
-          <a:lstStyle/>
-          <a:p>
-            <a:pPr algn="ctr" indent="0" marL="0">
-              <a:buNone/>
-            </a:pPr>
-            <a:r>
-              <a:rPr lang="en-US" sz="1300" dirty="0">
-                <a:solidFill>
-                  <a:srgbClr val="5B6B73"/>
-                </a:solidFill>
-                <a:latin typeface="Calibri" pitchFamily="34" charset="0"/>
-                <a:ea typeface="Calibri" pitchFamily="34" charset="-122"/>
-                <a:cs typeface="Calibri" pitchFamily="34" charset="-120"/>
-              </a:rPr>
-              <a:t>—</a:t>
-            </a:r>
-            <a:endParaRPr lang="en-US" sz="1300" dirty="0"/>
-          </a:p>
-        </p:txBody>
-      </p:sp>
-      <p:sp>
-        <p:nvSpPr>
-          <p:cNvPr id="14" name="Shape 12"/>
-          <p:cNvSpPr/>
-          <p:nvPr/>
-        </p:nvSpPr>
-        <p:spPr>
-          <a:xfrm>
-            <a:off x="548640" y="3474720"/>
-            <a:ext cx="11064240" cy="502920"/>
+          <p:cNvPr id="13" name="Shape 11"/>
+          <p:cNvSpPr/>
+          <p:nvPr/>
+        </p:nvSpPr>
+        <p:spPr>
+          <a:xfrm>
+            <a:off x="548640" y="2907792"/>
+            <a:ext cx="11064240" cy="457200"/>
           </a:xfrm>
           <a:prstGeom prst="rect">
             <a:avLst/>
@@ -4632,6 +4605,52 @@
           </a:solidFill>
           <a:ln/>
         </p:spPr>
+        <p:txBody>
+          <a:bodyPr/>
+          <a:lstStyle/>
+          <a:p>
+            <a:endParaRPr lang="en-US"/>
+          </a:p>
+        </p:txBody>
+      </p:sp>
+      <p:sp>
+        <p:nvSpPr>
+          <p:cNvPr id="14" name="Text 12"/>
+          <p:cNvSpPr/>
+          <p:nvPr/>
+        </p:nvSpPr>
+        <p:spPr>
+          <a:xfrm>
+            <a:off x="548640" y="2907792"/>
+            <a:ext cx="5943600" cy="457200"/>
+          </a:xfrm>
+          <a:prstGeom prst="rect">
+            <a:avLst/>
+          </a:prstGeom>
+          <a:noFill/>
+          <a:ln/>
+        </p:spPr>
+        <p:txBody>
+          <a:bodyPr wrap="square" lIns="1270" tIns="1270" rIns="1270" bIns="1270" rtlCol="0" anchor="ctr"/>
+          <a:lstStyle/>
+          <a:p>
+            <a:pPr marL="0" indent="0">
+              <a:buNone/>
+            </a:pPr>
+            <a:r>
+              <a:rPr lang="en-US" sz="1250" dirty="0">
+                <a:solidFill>
+                  <a:srgbClr val="1B2A33"/>
+                </a:solidFill>
+                <a:latin typeface="Calibri" pitchFamily="34" charset="0"/>
+                <a:ea typeface="Calibri" pitchFamily="34" charset="-122"/>
+                <a:cs typeface="Calibri" pitchFamily="34" charset="-120"/>
+              </a:rPr>
+              <a:t>Category accuracy</a:t>
+            </a:r>
+            <a:endParaRPr lang="en-US" sz="1250" dirty="0"/>
+          </a:p>
+        </p:txBody>
       </p:sp>
       <p:sp>
         <p:nvSpPr>
@@ -4641,24 +4660,24 @@
         </p:nvSpPr>
         <p:spPr>
           <a:xfrm>
-            <a:off x="548640" y="3474720"/>
-            <a:ext cx="5943600" cy="502920"/>
-          </a:xfrm>
-          <a:prstGeom prst="rect">
-            <a:avLst/>
-          </a:prstGeom>
-          <a:noFill/>
-          <a:ln/>
-        </p:spPr>
-        <p:txBody>
-          <a:bodyPr wrap="square" lIns="1270" tIns="1270" rIns="1270" bIns="1270" rtlCol="0" anchor="ctr"/>
-          <a:lstStyle/>
-          <a:p>
-            <a:pPr indent="0" marL="0">
-              <a:buNone/>
-            </a:pPr>
-            <a:r>
-              <a:rPr lang="en-US" sz="1250" dirty="0">
+            <a:off x="6492240" y="2907792"/>
+            <a:ext cx="2560320" cy="457200"/>
+          </a:xfrm>
+          <a:prstGeom prst="rect">
+            <a:avLst/>
+          </a:prstGeom>
+          <a:noFill/>
+          <a:ln/>
+        </p:spPr>
+        <p:txBody>
+          <a:bodyPr wrap="square" lIns="0" tIns="0" rIns="0" bIns="0" rtlCol="0" anchor="ctr"/>
+          <a:lstStyle/>
+          <a:p>
+            <a:pPr marL="0" indent="0" algn="ctr">
+              <a:buNone/>
+            </a:pPr>
+            <a:r>
+              <a:rPr lang="en-US" sz="1300" dirty="0">
                 <a:solidFill>
                   <a:srgbClr val="1B2A33"/>
                 </a:solidFill>
@@ -4666,9 +4685,9 @@
                 <a:ea typeface="Calibri" pitchFamily="34" charset="-122"/>
                 <a:cs typeface="Calibri" pitchFamily="34" charset="-120"/>
               </a:rPr>
-              <a:t>Top-3 identification accuracy</a:t>
-            </a:r>
-            <a:endParaRPr lang="en-US" sz="1250" dirty="0"/>
+              <a:t>77.6%</a:t>
+            </a:r>
+            <a:endParaRPr lang="en-US" sz="1300" dirty="0"/>
           </a:p>
         </p:txBody>
       </p:sp>
@@ -4680,32 +4699,32 @@
         </p:nvSpPr>
         <p:spPr>
           <a:xfrm>
-            <a:off x="6492240" y="3474720"/>
-            <a:ext cx="2560320" cy="502920"/>
-          </a:xfrm>
-          <a:prstGeom prst="rect">
-            <a:avLst/>
-          </a:prstGeom>
-          <a:noFill/>
-          <a:ln/>
-        </p:spPr>
-        <p:txBody>
-          <a:bodyPr wrap="square" lIns="0" tIns="0" rIns="0" bIns="0" rtlCol="0" anchor="ctr"/>
-          <a:lstStyle/>
-          <a:p>
-            <a:pPr algn="ctr" indent="0" marL="0">
-              <a:buNone/>
-            </a:pPr>
-            <a:r>
-              <a:rPr lang="en-US" sz="1300" dirty="0">
-                <a:solidFill>
-                  <a:srgbClr val="5B6B73"/>
-                </a:solidFill>
-                <a:latin typeface="Calibri" pitchFamily="34" charset="0"/>
-                <a:ea typeface="Calibri" pitchFamily="34" charset="-122"/>
-                <a:cs typeface="Calibri" pitchFamily="34" charset="-120"/>
-              </a:rPr>
-              <a:t>—</a:t>
+            <a:off x="9052560" y="2907792"/>
+            <a:ext cx="2560320" cy="457200"/>
+          </a:xfrm>
+          <a:prstGeom prst="rect">
+            <a:avLst/>
+          </a:prstGeom>
+          <a:noFill/>
+          <a:ln/>
+        </p:spPr>
+        <p:txBody>
+          <a:bodyPr wrap="square" lIns="0" tIns="0" rIns="0" bIns="0" rtlCol="0" anchor="ctr"/>
+          <a:lstStyle/>
+          <a:p>
+            <a:pPr marL="0" indent="0" algn="ctr">
+              <a:buNone/>
+            </a:pPr>
+            <a:r>
+              <a:rPr lang="en-US" sz="1300" b="1" dirty="0">
+                <a:solidFill>
+                  <a:srgbClr val="0A7D3C"/>
+                </a:solidFill>
+                <a:latin typeface="Calibri" pitchFamily="34" charset="0"/>
+                <a:ea typeface="Calibri" pitchFamily="34" charset="-122"/>
+                <a:cs typeface="Calibri" pitchFamily="34" charset="-120"/>
+              </a:rPr>
+              <a:t>79.3%</a:t>
             </a:r>
             <a:endParaRPr lang="en-US" sz="1300" dirty="0"/>
           </a:p>
@@ -4713,53 +4732,14 @@
       </p:sp>
       <p:sp>
         <p:nvSpPr>
-          <p:cNvPr id="17" name="Text 15"/>
-          <p:cNvSpPr/>
-          <p:nvPr/>
-        </p:nvSpPr>
-        <p:spPr>
-          <a:xfrm>
-            <a:off x="9052560" y="3474720"/>
-            <a:ext cx="2560320" cy="502920"/>
-          </a:xfrm>
-          <a:prstGeom prst="rect">
-            <a:avLst/>
-          </a:prstGeom>
-          <a:noFill/>
-          <a:ln/>
-        </p:spPr>
-        <p:txBody>
-          <a:bodyPr wrap="square" lIns="0" tIns="0" rIns="0" bIns="0" rtlCol="0" anchor="ctr"/>
-          <a:lstStyle/>
-          <a:p>
-            <a:pPr algn="ctr" indent="0" marL="0">
-              <a:buNone/>
-            </a:pPr>
-            <a:r>
-              <a:rPr lang="en-US" sz="1300" dirty="0">
-                <a:solidFill>
-                  <a:srgbClr val="5B6B73"/>
-                </a:solidFill>
-                <a:latin typeface="Calibri" pitchFamily="34" charset="0"/>
-                <a:ea typeface="Calibri" pitchFamily="34" charset="-122"/>
-                <a:cs typeface="Calibri" pitchFamily="34" charset="-120"/>
-              </a:rPr>
-              <a:t>—</a:t>
-            </a:r>
-            <a:endParaRPr lang="en-US" sz="1300" dirty="0"/>
-          </a:p>
-        </p:txBody>
-      </p:sp>
-      <p:sp>
-        <p:nvSpPr>
-          <p:cNvPr id="18" name="Shape 16"/>
-          <p:cNvSpPr/>
-          <p:nvPr/>
-        </p:nvSpPr>
-        <p:spPr>
-          <a:xfrm>
-            <a:off x="548640" y="3977640"/>
-            <a:ext cx="11064240" cy="502920"/>
+          <p:cNvPr id="17" name="Shape 15"/>
+          <p:cNvSpPr/>
+          <p:nvPr/>
+        </p:nvSpPr>
+        <p:spPr>
+          <a:xfrm>
+            <a:off x="548640" y="3364992"/>
+            <a:ext cx="11064240" cy="457200"/>
           </a:xfrm>
           <a:prstGeom prst="rect">
             <a:avLst/>
@@ -4769,6 +4749,52 @@
           </a:solidFill>
           <a:ln/>
         </p:spPr>
+        <p:txBody>
+          <a:bodyPr/>
+          <a:lstStyle/>
+          <a:p>
+            <a:endParaRPr lang="en-US"/>
+          </a:p>
+        </p:txBody>
+      </p:sp>
+      <p:sp>
+        <p:nvSpPr>
+          <p:cNvPr id="18" name="Text 16"/>
+          <p:cNvSpPr/>
+          <p:nvPr/>
+        </p:nvSpPr>
+        <p:spPr>
+          <a:xfrm>
+            <a:off x="548640" y="3364992"/>
+            <a:ext cx="5943600" cy="457200"/>
+          </a:xfrm>
+          <a:prstGeom prst="rect">
+            <a:avLst/>
+          </a:prstGeom>
+          <a:noFill/>
+          <a:ln/>
+        </p:spPr>
+        <p:txBody>
+          <a:bodyPr wrap="square" lIns="1270" tIns="1270" rIns="1270" bIns="1270" rtlCol="0" anchor="ctr"/>
+          <a:lstStyle/>
+          <a:p>
+            <a:pPr marL="0" indent="0">
+              <a:buNone/>
+            </a:pPr>
+            <a:r>
+              <a:rPr lang="en-US" sz="1250" dirty="0">
+                <a:solidFill>
+                  <a:srgbClr val="1B2A33"/>
+                </a:solidFill>
+                <a:latin typeface="Calibri" pitchFamily="34" charset="0"/>
+                <a:ea typeface="Calibri" pitchFamily="34" charset="-122"/>
+                <a:cs typeface="Calibri" pitchFamily="34" charset="-120"/>
+              </a:rPr>
+              <a:t>Age-restriction recall</a:t>
+            </a:r>
+            <a:endParaRPr lang="en-US" sz="1250" dirty="0"/>
+          </a:p>
+        </p:txBody>
       </p:sp>
       <p:sp>
         <p:nvSpPr>
@@ -4778,24 +4804,24 @@
         </p:nvSpPr>
         <p:spPr>
           <a:xfrm>
-            <a:off x="548640" y="3977640"/>
-            <a:ext cx="5943600" cy="502920"/>
-          </a:xfrm>
-          <a:prstGeom prst="rect">
-            <a:avLst/>
-          </a:prstGeom>
-          <a:noFill/>
-          <a:ln/>
-        </p:spPr>
-        <p:txBody>
-          <a:bodyPr wrap="square" lIns="1270" tIns="1270" rIns="1270" bIns="1270" rtlCol="0" anchor="ctr"/>
-          <a:lstStyle/>
-          <a:p>
-            <a:pPr indent="0" marL="0">
-              <a:buNone/>
-            </a:pPr>
-            <a:r>
-              <a:rPr lang="en-US" sz="1250" dirty="0">
+            <a:off x="6492240" y="3364992"/>
+            <a:ext cx="2560320" cy="457200"/>
+          </a:xfrm>
+          <a:prstGeom prst="rect">
+            <a:avLst/>
+          </a:prstGeom>
+          <a:noFill/>
+          <a:ln/>
+        </p:spPr>
+        <p:txBody>
+          <a:bodyPr wrap="square" lIns="0" tIns="0" rIns="0" bIns="0" rtlCol="0" anchor="ctr"/>
+          <a:lstStyle/>
+          <a:p>
+            <a:pPr marL="0" indent="0" algn="ctr">
+              <a:buNone/>
+            </a:pPr>
+            <a:r>
+              <a:rPr lang="en-US" sz="1300" dirty="0">
                 <a:solidFill>
                   <a:srgbClr val="1B2A33"/>
                 </a:solidFill>
@@ -4803,9 +4829,9 @@
                 <a:ea typeface="Calibri" pitchFamily="34" charset="-122"/>
                 <a:cs typeface="Calibri" pitchFamily="34" charset="-120"/>
               </a:rPr>
-              <a:t>Price median abs. % error</a:t>
-            </a:r>
-            <a:endParaRPr lang="en-US" sz="1250" dirty="0"/>
+              <a:t>0%</a:t>
+            </a:r>
+            <a:endParaRPr lang="en-US" sz="1300" dirty="0"/>
           </a:p>
         </p:txBody>
       </p:sp>
@@ -4817,32 +4843,32 @@
         </p:nvSpPr>
         <p:spPr>
           <a:xfrm>
-            <a:off x="6492240" y="3977640"/>
-            <a:ext cx="2560320" cy="502920"/>
-          </a:xfrm>
-          <a:prstGeom prst="rect">
-            <a:avLst/>
-          </a:prstGeom>
-          <a:noFill/>
-          <a:ln/>
-        </p:spPr>
-        <p:txBody>
-          <a:bodyPr wrap="square" lIns="0" tIns="0" rIns="0" bIns="0" rtlCol="0" anchor="ctr"/>
-          <a:lstStyle/>
-          <a:p>
-            <a:pPr algn="ctr" indent="0" marL="0">
-              <a:buNone/>
-            </a:pPr>
-            <a:r>
-              <a:rPr lang="en-US" sz="1300" dirty="0">
-                <a:solidFill>
-                  <a:srgbClr val="5B6B73"/>
-                </a:solidFill>
-                <a:latin typeface="Calibri" pitchFamily="34" charset="0"/>
-                <a:ea typeface="Calibri" pitchFamily="34" charset="-122"/>
-                <a:cs typeface="Calibri" pitchFamily="34" charset="-120"/>
-              </a:rPr>
-              <a:t>—</a:t>
+            <a:off x="9052560" y="3364992"/>
+            <a:ext cx="2560320" cy="457200"/>
+          </a:xfrm>
+          <a:prstGeom prst="rect">
+            <a:avLst/>
+          </a:prstGeom>
+          <a:noFill/>
+          <a:ln/>
+        </p:spPr>
+        <p:txBody>
+          <a:bodyPr wrap="square" lIns="0" tIns="0" rIns="0" bIns="0" rtlCol="0" anchor="ctr"/>
+          <a:lstStyle/>
+          <a:p>
+            <a:pPr marL="0" indent="0" algn="ctr">
+              <a:buNone/>
+            </a:pPr>
+            <a:r>
+              <a:rPr lang="en-US" sz="1300" b="1" dirty="0">
+                <a:solidFill>
+                  <a:srgbClr val="0A7D3C"/>
+                </a:solidFill>
+                <a:latin typeface="Calibri" pitchFamily="34" charset="0"/>
+                <a:ea typeface="Calibri" pitchFamily="34" charset="-122"/>
+                <a:cs typeface="Calibri" pitchFamily="34" charset="-120"/>
+              </a:rPr>
+              <a:t>100%</a:t>
             </a:r>
             <a:endParaRPr lang="en-US" sz="1300" dirty="0"/>
           </a:p>
@@ -4850,53 +4876,14 @@
       </p:sp>
       <p:sp>
         <p:nvSpPr>
-          <p:cNvPr id="21" name="Text 19"/>
-          <p:cNvSpPr/>
-          <p:nvPr/>
-        </p:nvSpPr>
-        <p:spPr>
-          <a:xfrm>
-            <a:off x="9052560" y="3977640"/>
-            <a:ext cx="2560320" cy="502920"/>
-          </a:xfrm>
-          <a:prstGeom prst="rect">
-            <a:avLst/>
-          </a:prstGeom>
-          <a:noFill/>
-          <a:ln/>
-        </p:spPr>
-        <p:txBody>
-          <a:bodyPr wrap="square" lIns="0" tIns="0" rIns="0" bIns="0" rtlCol="0" anchor="ctr"/>
-          <a:lstStyle/>
-          <a:p>
-            <a:pPr algn="ctr" indent="0" marL="0">
-              <a:buNone/>
-            </a:pPr>
-            <a:r>
-              <a:rPr lang="en-US" sz="1300" dirty="0">
-                <a:solidFill>
-                  <a:srgbClr val="5B6B73"/>
-                </a:solidFill>
-                <a:latin typeface="Calibri" pitchFamily="34" charset="0"/>
-                <a:ea typeface="Calibri" pitchFamily="34" charset="-122"/>
-                <a:cs typeface="Calibri" pitchFamily="34" charset="-120"/>
-              </a:rPr>
-              <a:t>—</a:t>
-            </a:r>
-            <a:endParaRPr lang="en-US" sz="1300" dirty="0"/>
-          </a:p>
-        </p:txBody>
-      </p:sp>
-      <p:sp>
-        <p:nvSpPr>
-          <p:cNvPr id="22" name="Shape 20"/>
-          <p:cNvSpPr/>
-          <p:nvPr/>
-        </p:nvSpPr>
-        <p:spPr>
-          <a:xfrm>
-            <a:off x="548640" y="4480560"/>
-            <a:ext cx="11064240" cy="502920"/>
+          <p:cNvPr id="21" name="Shape 19"/>
+          <p:cNvSpPr/>
+          <p:nvPr/>
+        </p:nvSpPr>
+        <p:spPr>
+          <a:xfrm>
+            <a:off x="548640" y="3822192"/>
+            <a:ext cx="11064240" cy="457200"/>
           </a:xfrm>
           <a:prstGeom prst="rect">
             <a:avLst/>
@@ -4906,6 +4893,52 @@
           </a:solidFill>
           <a:ln/>
         </p:spPr>
+        <p:txBody>
+          <a:bodyPr/>
+          <a:lstStyle/>
+          <a:p>
+            <a:endParaRPr lang="en-US"/>
+          </a:p>
+        </p:txBody>
+      </p:sp>
+      <p:sp>
+        <p:nvSpPr>
+          <p:cNvPr id="22" name="Text 20"/>
+          <p:cNvSpPr/>
+          <p:nvPr/>
+        </p:nvSpPr>
+        <p:spPr>
+          <a:xfrm>
+            <a:off x="548640" y="3822192"/>
+            <a:ext cx="5943600" cy="457200"/>
+          </a:xfrm>
+          <a:prstGeom prst="rect">
+            <a:avLst/>
+          </a:prstGeom>
+          <a:noFill/>
+          <a:ln/>
+        </p:spPr>
+        <p:txBody>
+          <a:bodyPr wrap="square" lIns="1270" tIns="1270" rIns="1270" bIns="1270" rtlCol="0" anchor="ctr"/>
+          <a:lstStyle/>
+          <a:p>
+            <a:pPr marL="0" indent="0">
+              <a:buNone/>
+            </a:pPr>
+            <a:r>
+              <a:rPr lang="en-US" sz="1250" dirty="0">
+                <a:solidFill>
+                  <a:srgbClr val="1B2A33"/>
+                </a:solidFill>
+                <a:latin typeface="Calibri" pitchFamily="34" charset="0"/>
+                <a:ea typeface="Calibri" pitchFamily="34" charset="-122"/>
+                <a:cs typeface="Calibri" pitchFamily="34" charset="-120"/>
+              </a:rPr>
+              <a:t>Image-upgrade (swap) rate</a:t>
+            </a:r>
+            <a:endParaRPr lang="en-US" sz="1250" dirty="0"/>
+          </a:p>
+        </p:txBody>
       </p:sp>
       <p:sp>
         <p:nvSpPr>
@@ -4915,24 +4948,24 @@
         </p:nvSpPr>
         <p:spPr>
           <a:xfrm>
-            <a:off x="548640" y="4480560"/>
-            <a:ext cx="5943600" cy="502920"/>
-          </a:xfrm>
-          <a:prstGeom prst="rect">
-            <a:avLst/>
-          </a:prstGeom>
-          <a:noFill/>
-          <a:ln/>
-        </p:spPr>
-        <p:txBody>
-          <a:bodyPr wrap="square" lIns="1270" tIns="1270" rIns="1270" bIns="1270" rtlCol="0" anchor="ctr"/>
-          <a:lstStyle/>
-          <a:p>
-            <a:pPr indent="0" marL="0">
-              <a:buNone/>
-            </a:pPr>
-            <a:r>
-              <a:rPr lang="en-US" sz="1250" dirty="0">
+            <a:off x="6492240" y="3822192"/>
+            <a:ext cx="2560320" cy="457200"/>
+          </a:xfrm>
+          <a:prstGeom prst="rect">
+            <a:avLst/>
+          </a:prstGeom>
+          <a:noFill/>
+          <a:ln/>
+        </p:spPr>
+        <p:txBody>
+          <a:bodyPr wrap="square" lIns="0" tIns="0" rIns="0" bIns="0" rtlCol="0" anchor="ctr"/>
+          <a:lstStyle/>
+          <a:p>
+            <a:pPr marL="0" indent="0" algn="ctr">
+              <a:buNone/>
+            </a:pPr>
+            <a:r>
+              <a:rPr lang="en-US" sz="1300" dirty="0">
                 <a:solidFill>
                   <a:srgbClr val="1B2A33"/>
                 </a:solidFill>
@@ -4940,9 +4973,9 @@
                 <a:ea typeface="Calibri" pitchFamily="34" charset="-122"/>
                 <a:cs typeface="Calibri" pitchFamily="34" charset="-120"/>
               </a:rPr>
-              <a:t>Listing quality (blind rating)</a:t>
-            </a:r>
-            <a:endParaRPr lang="en-US" sz="1250" dirty="0"/>
+              <a:t>0%</a:t>
+            </a:r>
+            <a:endParaRPr lang="en-US" sz="1300" dirty="0"/>
           </a:p>
         </p:txBody>
       </p:sp>
@@ -4954,32 +4987,32 @@
         </p:nvSpPr>
         <p:spPr>
           <a:xfrm>
-            <a:off x="6492240" y="4480560"/>
-            <a:ext cx="2560320" cy="502920"/>
-          </a:xfrm>
-          <a:prstGeom prst="rect">
-            <a:avLst/>
-          </a:prstGeom>
-          <a:noFill/>
-          <a:ln/>
-        </p:spPr>
-        <p:txBody>
-          <a:bodyPr wrap="square" lIns="0" tIns="0" rIns="0" bIns="0" rtlCol="0" anchor="ctr"/>
-          <a:lstStyle/>
-          <a:p>
-            <a:pPr algn="ctr" indent="0" marL="0">
-              <a:buNone/>
-            </a:pPr>
-            <a:r>
-              <a:rPr lang="en-US" sz="1300" dirty="0">
-                <a:solidFill>
-                  <a:srgbClr val="5B6B73"/>
-                </a:solidFill>
-                <a:latin typeface="Calibri" pitchFamily="34" charset="0"/>
-                <a:ea typeface="Calibri" pitchFamily="34" charset="-122"/>
-                <a:cs typeface="Calibri" pitchFamily="34" charset="-120"/>
-              </a:rPr>
-              <a:t>—</a:t>
+            <a:off x="9052560" y="3822192"/>
+            <a:ext cx="2560320" cy="457200"/>
+          </a:xfrm>
+          <a:prstGeom prst="rect">
+            <a:avLst/>
+          </a:prstGeom>
+          <a:noFill/>
+          <a:ln/>
+        </p:spPr>
+        <p:txBody>
+          <a:bodyPr wrap="square" lIns="0" tIns="0" rIns="0" bIns="0" rtlCol="0" anchor="ctr"/>
+          <a:lstStyle/>
+          <a:p>
+            <a:pPr marL="0" indent="0" algn="ctr">
+              <a:buNone/>
+            </a:pPr>
+            <a:r>
+              <a:rPr lang="en-US" sz="1300" b="1" dirty="0">
+                <a:solidFill>
+                  <a:srgbClr val="0A7D3C"/>
+                </a:solidFill>
+                <a:latin typeface="Calibri" pitchFamily="34" charset="0"/>
+                <a:ea typeface="Calibri" pitchFamily="34" charset="-122"/>
+                <a:cs typeface="Calibri" pitchFamily="34" charset="-120"/>
+              </a:rPr>
+              <a:t>29.3%</a:t>
             </a:r>
             <a:endParaRPr lang="en-US" sz="1300" dirty="0"/>
           </a:p>
@@ -4987,53 +5020,14 @@
       </p:sp>
       <p:sp>
         <p:nvSpPr>
-          <p:cNvPr id="25" name="Text 23"/>
-          <p:cNvSpPr/>
-          <p:nvPr/>
-        </p:nvSpPr>
-        <p:spPr>
-          <a:xfrm>
-            <a:off x="9052560" y="4480560"/>
-            <a:ext cx="2560320" cy="502920"/>
-          </a:xfrm>
-          <a:prstGeom prst="rect">
-            <a:avLst/>
-          </a:prstGeom>
-          <a:noFill/>
-          <a:ln/>
-        </p:spPr>
-        <p:txBody>
-          <a:bodyPr wrap="square" lIns="0" tIns="0" rIns="0" bIns="0" rtlCol="0" anchor="ctr"/>
-          <a:lstStyle/>
-          <a:p>
-            <a:pPr algn="ctr" indent="0" marL="0">
-              <a:buNone/>
-            </a:pPr>
-            <a:r>
-              <a:rPr lang="en-US" sz="1300" dirty="0">
-                <a:solidFill>
-                  <a:srgbClr val="5B6B73"/>
-                </a:solidFill>
-                <a:latin typeface="Calibri" pitchFamily="34" charset="0"/>
-                <a:ea typeface="Calibri" pitchFamily="34" charset="-122"/>
-                <a:cs typeface="Calibri" pitchFamily="34" charset="-120"/>
-              </a:rPr>
-              <a:t>—</a:t>
-            </a:r>
-            <a:endParaRPr lang="en-US" sz="1300" dirty="0"/>
-          </a:p>
-        </p:txBody>
-      </p:sp>
-      <p:sp>
-        <p:nvSpPr>
-          <p:cNvPr id="26" name="Shape 24"/>
-          <p:cNvSpPr/>
-          <p:nvPr/>
-        </p:nvSpPr>
-        <p:spPr>
-          <a:xfrm>
-            <a:off x="548640" y="4983480"/>
-            <a:ext cx="11064240" cy="502920"/>
+          <p:cNvPr id="25" name="Shape 23"/>
+          <p:cNvSpPr/>
+          <p:nvPr/>
+        </p:nvSpPr>
+        <p:spPr>
+          <a:xfrm>
+            <a:off x="548640" y="4279392"/>
+            <a:ext cx="11064240" cy="457200"/>
           </a:xfrm>
           <a:prstGeom prst="rect">
             <a:avLst/>
@@ -5043,6 +5037,52 @@
           </a:solidFill>
           <a:ln/>
         </p:spPr>
+        <p:txBody>
+          <a:bodyPr/>
+          <a:lstStyle/>
+          <a:p>
+            <a:endParaRPr lang="en-US"/>
+          </a:p>
+        </p:txBody>
+      </p:sp>
+      <p:sp>
+        <p:nvSpPr>
+          <p:cNvPr id="26" name="Text 24"/>
+          <p:cNvSpPr/>
+          <p:nvPr/>
+        </p:nvSpPr>
+        <p:spPr>
+          <a:xfrm>
+            <a:off x="548640" y="4279392"/>
+            <a:ext cx="5943600" cy="457200"/>
+          </a:xfrm>
+          <a:prstGeom prst="rect">
+            <a:avLst/>
+          </a:prstGeom>
+          <a:noFill/>
+          <a:ln/>
+        </p:spPr>
+        <p:txBody>
+          <a:bodyPr wrap="square" lIns="1270" tIns="1270" rIns="1270" bIns="1270" rtlCol="0" anchor="ctr"/>
+          <a:lstStyle/>
+          <a:p>
+            <a:pPr marL="0" indent="0">
+              <a:buNone/>
+            </a:pPr>
+            <a:r>
+              <a:rPr lang="en-US" sz="1250" dirty="0">
+                <a:solidFill>
+                  <a:srgbClr val="1B2A33"/>
+                </a:solidFill>
+                <a:latin typeface="Calibri" pitchFamily="34" charset="0"/>
+                <a:ea typeface="Calibri" pitchFamily="34" charset="-122"/>
+                <a:cs typeface="Calibri" pitchFamily="34" charset="-120"/>
+              </a:rPr>
+              <a:t>Price — median abs. % error</a:t>
+            </a:r>
+            <a:endParaRPr lang="en-US" sz="1250" dirty="0"/>
+          </a:p>
+        </p:txBody>
       </p:sp>
       <p:sp>
         <p:nvSpPr>
@@ -5052,24 +5092,63 @@
         </p:nvSpPr>
         <p:spPr>
           <a:xfrm>
-            <a:off x="548640" y="4983480"/>
-            <a:ext cx="5943600" cy="502920"/>
-          </a:xfrm>
-          <a:prstGeom prst="rect">
-            <a:avLst/>
-          </a:prstGeom>
-          <a:noFill/>
-          <a:ln/>
-        </p:spPr>
-        <p:txBody>
-          <a:bodyPr wrap="square" lIns="1270" tIns="1270" rIns="1270" bIns="1270" rtlCol="0" anchor="ctr"/>
-          <a:lstStyle/>
-          <a:p>
-            <a:pPr indent="0" marL="0">
-              <a:buNone/>
-            </a:pPr>
-            <a:r>
-              <a:rPr lang="en-US" sz="1250" dirty="0">
+            <a:off x="6492240" y="4279392"/>
+            <a:ext cx="2560320" cy="457200"/>
+          </a:xfrm>
+          <a:prstGeom prst="rect">
+            <a:avLst/>
+          </a:prstGeom>
+          <a:noFill/>
+          <a:ln/>
+        </p:spPr>
+        <p:txBody>
+          <a:bodyPr wrap="square" lIns="0" tIns="0" rIns="0" bIns="0" rtlCol="0" anchor="ctr"/>
+          <a:lstStyle/>
+          <a:p>
+            <a:pPr marL="0" indent="0" algn="ctr">
+              <a:buNone/>
+            </a:pPr>
+            <a:r>
+              <a:rPr lang="en-US" sz="1300" b="1" dirty="0">
+                <a:solidFill>
+                  <a:srgbClr val="0A7D3C"/>
+                </a:solidFill>
+                <a:latin typeface="Calibri" pitchFamily="34" charset="0"/>
+                <a:ea typeface="Calibri" pitchFamily="34" charset="-122"/>
+                <a:cs typeface="Calibri" pitchFamily="34" charset="-120"/>
+              </a:rPr>
+              <a:t>22.4%</a:t>
+            </a:r>
+            <a:endParaRPr lang="en-US" sz="1300" dirty="0"/>
+          </a:p>
+        </p:txBody>
+      </p:sp>
+      <p:sp>
+        <p:nvSpPr>
+          <p:cNvPr id="28" name="Text 26"/>
+          <p:cNvSpPr/>
+          <p:nvPr/>
+        </p:nvSpPr>
+        <p:spPr>
+          <a:xfrm>
+            <a:off x="9052560" y="4279392"/>
+            <a:ext cx="2560320" cy="457200"/>
+          </a:xfrm>
+          <a:prstGeom prst="rect">
+            <a:avLst/>
+          </a:prstGeom>
+          <a:noFill/>
+          <a:ln/>
+        </p:spPr>
+        <p:txBody>
+          <a:bodyPr wrap="square" lIns="0" tIns="0" rIns="0" bIns="0" rtlCol="0" anchor="ctr"/>
+          <a:lstStyle/>
+          <a:p>
+            <a:pPr marL="0" indent="0" algn="ctr">
+              <a:buNone/>
+            </a:pPr>
+            <a:r>
+              <a:rPr lang="en-US" sz="1300" dirty="0">
                 <a:solidFill>
                   <a:srgbClr val="1B2A33"/>
                 </a:solidFill>
@@ -5077,46 +5156,7 @@
                 <a:ea typeface="Calibri" pitchFamily="34" charset="-122"/>
                 <a:cs typeface="Calibri" pitchFamily="34" charset="-120"/>
               </a:rPr>
-              <a:t>Age-restriction recall</a:t>
-            </a:r>
-            <a:endParaRPr lang="en-US" sz="1250" dirty="0"/>
-          </a:p>
-        </p:txBody>
-      </p:sp>
-      <p:sp>
-        <p:nvSpPr>
-          <p:cNvPr id="28" name="Text 26"/>
-          <p:cNvSpPr/>
-          <p:nvPr/>
-        </p:nvSpPr>
-        <p:spPr>
-          <a:xfrm>
-            <a:off x="6492240" y="4983480"/>
-            <a:ext cx="2560320" cy="502920"/>
-          </a:xfrm>
-          <a:prstGeom prst="rect">
-            <a:avLst/>
-          </a:prstGeom>
-          <a:noFill/>
-          <a:ln/>
-        </p:spPr>
-        <p:txBody>
-          <a:bodyPr wrap="square" lIns="0" tIns="0" rIns="0" bIns="0" rtlCol="0" anchor="ctr"/>
-          <a:lstStyle/>
-          <a:p>
-            <a:pPr algn="ctr" indent="0" marL="0">
-              <a:buNone/>
-            </a:pPr>
-            <a:r>
-              <a:rPr lang="en-US" sz="1300" dirty="0">
-                <a:solidFill>
-                  <a:srgbClr val="5B6B73"/>
-                </a:solidFill>
-                <a:latin typeface="Calibri" pitchFamily="34" charset="0"/>
-                <a:ea typeface="Calibri" pitchFamily="34" charset="-122"/>
-                <a:cs typeface="Calibri" pitchFamily="34" charset="-120"/>
-              </a:rPr>
-              <a:t>—</a:t>
+              <a:t>43.1%</a:t>
             </a:r>
             <a:endParaRPr lang="en-US" sz="1300" dirty="0"/>
           </a:p>
@@ -5124,53 +5164,14 @@
       </p:sp>
       <p:sp>
         <p:nvSpPr>
-          <p:cNvPr id="29" name="Text 27"/>
-          <p:cNvSpPr/>
-          <p:nvPr/>
-        </p:nvSpPr>
-        <p:spPr>
-          <a:xfrm>
-            <a:off x="9052560" y="4983480"/>
-            <a:ext cx="2560320" cy="502920"/>
-          </a:xfrm>
-          <a:prstGeom prst="rect">
-            <a:avLst/>
-          </a:prstGeom>
-          <a:noFill/>
-          <a:ln/>
-        </p:spPr>
-        <p:txBody>
-          <a:bodyPr wrap="square" lIns="0" tIns="0" rIns="0" bIns="0" rtlCol="0" anchor="ctr"/>
-          <a:lstStyle/>
-          <a:p>
-            <a:pPr algn="ctr" indent="0" marL="0">
-              <a:buNone/>
-            </a:pPr>
-            <a:r>
-              <a:rPr lang="en-US" sz="1300" dirty="0">
-                <a:solidFill>
-                  <a:srgbClr val="5B6B73"/>
-                </a:solidFill>
-                <a:latin typeface="Calibri" pitchFamily="34" charset="0"/>
-                <a:ea typeface="Calibri" pitchFamily="34" charset="-122"/>
-                <a:cs typeface="Calibri" pitchFamily="34" charset="-120"/>
-              </a:rPr>
-              <a:t>—</a:t>
-            </a:r>
-            <a:endParaRPr lang="en-US" sz="1300" dirty="0"/>
-          </a:p>
-        </p:txBody>
-      </p:sp>
-      <p:sp>
-        <p:nvSpPr>
-          <p:cNvPr id="30" name="Shape 28"/>
-          <p:cNvSpPr/>
-          <p:nvPr/>
-        </p:nvSpPr>
-        <p:spPr>
-          <a:xfrm>
-            <a:off x="548640" y="5486400"/>
-            <a:ext cx="11064240" cy="502920"/>
+          <p:cNvPr id="29" name="Shape 27"/>
+          <p:cNvSpPr/>
+          <p:nvPr/>
+        </p:nvSpPr>
+        <p:spPr>
+          <a:xfrm>
+            <a:off x="548640" y="4736592"/>
+            <a:ext cx="11064240" cy="457200"/>
           </a:xfrm>
           <a:prstGeom prst="rect">
             <a:avLst/>
@@ -5180,6 +5181,52 @@
           </a:solidFill>
           <a:ln/>
         </p:spPr>
+        <p:txBody>
+          <a:bodyPr/>
+          <a:lstStyle/>
+          <a:p>
+            <a:endParaRPr lang="en-US"/>
+          </a:p>
+        </p:txBody>
+      </p:sp>
+      <p:sp>
+        <p:nvSpPr>
+          <p:cNvPr id="30" name="Text 28"/>
+          <p:cNvSpPr/>
+          <p:nvPr/>
+        </p:nvSpPr>
+        <p:spPr>
+          <a:xfrm>
+            <a:off x="548640" y="4736592"/>
+            <a:ext cx="5943600" cy="457200"/>
+          </a:xfrm>
+          <a:prstGeom prst="rect">
+            <a:avLst/>
+          </a:prstGeom>
+          <a:noFill/>
+          <a:ln/>
+        </p:spPr>
+        <p:txBody>
+          <a:bodyPr wrap="square" lIns="1270" tIns="1270" rIns="1270" bIns="1270" rtlCol="0" anchor="ctr"/>
+          <a:lstStyle/>
+          <a:p>
+            <a:pPr marL="0" indent="0">
+              <a:buNone/>
+            </a:pPr>
+            <a:r>
+              <a:rPr lang="en-US" sz="1250" dirty="0">
+                <a:solidFill>
+                  <a:srgbClr val="1B2A33"/>
+                </a:solidFill>
+                <a:latin typeface="Calibri" pitchFamily="34" charset="0"/>
+                <a:ea typeface="Calibri" pitchFamily="34" charset="-122"/>
+                <a:cs typeface="Calibri" pitchFamily="34" charset="-120"/>
+              </a:rPr>
+              <a:t>Price — mean abs. % error</a:t>
+            </a:r>
+            <a:endParaRPr lang="en-US" sz="1250" dirty="0"/>
+          </a:p>
+        </p:txBody>
       </p:sp>
       <p:sp>
         <p:nvSpPr>
@@ -5189,24 +5236,63 @@
         </p:nvSpPr>
         <p:spPr>
           <a:xfrm>
-            <a:off x="548640" y="5486400"/>
-            <a:ext cx="5943600" cy="502920"/>
-          </a:xfrm>
-          <a:prstGeom prst="rect">
-            <a:avLst/>
-          </a:prstGeom>
-          <a:noFill/>
-          <a:ln/>
-        </p:spPr>
-        <p:txBody>
-          <a:bodyPr wrap="square" lIns="1270" tIns="1270" rIns="1270" bIns="1270" rtlCol="0" anchor="ctr"/>
-          <a:lstStyle/>
-          <a:p>
-            <a:pPr indent="0" marL="0">
-              <a:buNone/>
-            </a:pPr>
-            <a:r>
-              <a:rPr lang="en-US" sz="1250" dirty="0">
+            <a:off x="6492240" y="4736592"/>
+            <a:ext cx="2560320" cy="457200"/>
+          </a:xfrm>
+          <a:prstGeom prst="rect">
+            <a:avLst/>
+          </a:prstGeom>
+          <a:noFill/>
+          <a:ln/>
+        </p:spPr>
+        <p:txBody>
+          <a:bodyPr wrap="square" lIns="0" tIns="0" rIns="0" bIns="0" rtlCol="0" anchor="ctr"/>
+          <a:lstStyle/>
+          <a:p>
+            <a:pPr marL="0" indent="0" algn="ctr">
+              <a:buNone/>
+            </a:pPr>
+            <a:r>
+              <a:rPr lang="en-US" sz="1300" b="1" dirty="0">
+                <a:solidFill>
+                  <a:srgbClr val="0A7D3C"/>
+                </a:solidFill>
+                <a:latin typeface="Calibri" pitchFamily="34" charset="0"/>
+                <a:ea typeface="Calibri" pitchFamily="34" charset="-122"/>
+                <a:cs typeface="Calibri" pitchFamily="34" charset="-120"/>
+              </a:rPr>
+              <a:t>47.4%</a:t>
+            </a:r>
+            <a:endParaRPr lang="en-US" sz="1300" dirty="0"/>
+          </a:p>
+        </p:txBody>
+      </p:sp>
+      <p:sp>
+        <p:nvSpPr>
+          <p:cNvPr id="32" name="Text 30"/>
+          <p:cNvSpPr/>
+          <p:nvPr/>
+        </p:nvSpPr>
+        <p:spPr>
+          <a:xfrm>
+            <a:off x="9052560" y="4736592"/>
+            <a:ext cx="2560320" cy="457200"/>
+          </a:xfrm>
+          <a:prstGeom prst="rect">
+            <a:avLst/>
+          </a:prstGeom>
+          <a:noFill/>
+          <a:ln/>
+        </p:spPr>
+        <p:txBody>
+          <a:bodyPr wrap="square" lIns="0" tIns="0" rIns="0" bIns="0" rtlCol="0" anchor="ctr"/>
+          <a:lstStyle/>
+          <a:p>
+            <a:pPr marL="0" indent="0" algn="ctr">
+              <a:buNone/>
+            </a:pPr>
+            <a:r>
+              <a:rPr lang="en-US" sz="1300" dirty="0">
                 <a:solidFill>
                   <a:srgbClr val="1B2A33"/>
                 </a:solidFill>
@@ -5214,38 +5300,117 @@
                 <a:ea typeface="Calibri" pitchFamily="34" charset="-122"/>
                 <a:cs typeface="Calibri" pitchFamily="34" charset="-120"/>
               </a:rPr>
-              <a:t>Image false-swap rate</a:t>
-            </a:r>
-            <a:endParaRPr lang="en-US" sz="1250" dirty="0"/>
-          </a:p>
-        </p:txBody>
-      </p:sp>
-      <p:sp>
-        <p:nvSpPr>
-          <p:cNvPr id="32" name="Text 30"/>
-          <p:cNvSpPr/>
-          <p:nvPr/>
-        </p:nvSpPr>
-        <p:spPr>
-          <a:xfrm>
-            <a:off x="6492240" y="5486400"/>
-            <a:ext cx="2560320" cy="502920"/>
-          </a:xfrm>
-          <a:prstGeom prst="rect">
-            <a:avLst/>
-          </a:prstGeom>
-          <a:noFill/>
-          <a:ln/>
-        </p:spPr>
-        <p:txBody>
-          <a:bodyPr wrap="square" lIns="0" tIns="0" rIns="0" bIns="0" rtlCol="0" anchor="ctr"/>
-          <a:lstStyle/>
-          <a:p>
-            <a:pPr algn="ctr" indent="0" marL="0">
-              <a:buNone/>
-            </a:pPr>
-            <a:r>
-              <a:rPr lang="en-US" sz="1300" dirty="0">
+              <a:t>359.9%</a:t>
+            </a:r>
+            <a:endParaRPr lang="en-US" sz="1300" dirty="0"/>
+          </a:p>
+        </p:txBody>
+      </p:sp>
+      <p:sp>
+        <p:nvSpPr>
+          <p:cNvPr id="33" name="Shape 31"/>
+          <p:cNvSpPr/>
+          <p:nvPr/>
+        </p:nvSpPr>
+        <p:spPr>
+          <a:xfrm>
+            <a:off x="548640" y="5330952"/>
+            <a:ext cx="11064240" cy="914400"/>
+          </a:xfrm>
+          <a:prstGeom prst="roundRect">
+            <a:avLst>
+              <a:gd name="adj" fmla="val 10000"/>
+            </a:avLst>
+          </a:prstGeom>
+          <a:solidFill>
+            <a:srgbClr val="0B2A3B"/>
+          </a:solidFill>
+          <a:ln/>
+        </p:spPr>
+        <p:txBody>
+          <a:bodyPr/>
+          <a:lstStyle/>
+          <a:p>
+            <a:endParaRPr lang="en-US"/>
+          </a:p>
+        </p:txBody>
+      </p:sp>
+      <p:sp>
+        <p:nvSpPr>
+          <p:cNvPr id="34" name="Text 32"/>
+          <p:cNvSpPr/>
+          <p:nvPr/>
+        </p:nvSpPr>
+        <p:spPr>
+          <a:xfrm>
+            <a:off x="822960" y="5394960"/>
+            <a:ext cx="10515600" cy="786384"/>
+          </a:xfrm>
+          <a:prstGeom prst="rect">
+            <a:avLst/>
+          </a:prstGeom>
+          <a:noFill/>
+          <a:ln/>
+        </p:spPr>
+        <p:txBody>
+          <a:bodyPr wrap="square" lIns="0" tIns="0" rIns="0" bIns="0" rtlCol="0" anchor="ctr"/>
+          <a:lstStyle/>
+          <a:p>
+            <a:pPr marL="0" indent="0">
+              <a:buNone/>
+            </a:pPr>
+            <a:r>
+              <a:rPr lang="en-US" sz="1200" b="1" dirty="0">
+                <a:solidFill>
+                  <a:srgbClr val="02C39A"/>
+                </a:solidFill>
+                <a:latin typeface="Calibri" pitchFamily="34" charset="0"/>
+                <a:ea typeface="Calibri" pitchFamily="34" charset="-122"/>
+                <a:cs typeface="Calibri" pitchFamily="34" charset="-120"/>
+              </a:rPr>
+              <a:t>Takeaway:  </a:t>
+            </a:r>
+            <a:r>
+              <a:rPr lang="en-US" sz="1200" dirty="0">
+                <a:solidFill>
+                  <a:srgbClr val="FFFFFF"/>
+                </a:solidFill>
+                <a:latin typeface="Calibri" pitchFamily="34" charset="0"/>
+                <a:ea typeface="Calibri" pitchFamily="34" charset="-122"/>
+                <a:cs typeface="Calibri" pitchFamily="34" charset="-120"/>
+              </a:rPr>
+              <a:t>Snap-to-Sell beats the baseline on identification, category, age-restriction flagging (100% recall), and image upgrade. It loses on price — retrieval-grounded pricing underperforms a VLM guess on low-value FMCG (multipack / look-alike matches); 8 low-confidence matches were declined and routed to review.</a:t>
+            </a:r>
+            <a:endParaRPr lang="en-US" sz="1200" dirty="0"/>
+          </a:p>
+        </p:txBody>
+      </p:sp>
+      <p:sp>
+        <p:nvSpPr>
+          <p:cNvPr id="35" name="Text 33"/>
+          <p:cNvSpPr/>
+          <p:nvPr/>
+        </p:nvSpPr>
+        <p:spPr>
+          <a:xfrm>
+            <a:off x="548640" y="6327648"/>
+            <a:ext cx="11064240" cy="292608"/>
+          </a:xfrm>
+          <a:prstGeom prst="rect">
+            <a:avLst/>
+          </a:prstGeom>
+          <a:noFill/>
+          <a:ln/>
+        </p:spPr>
+        <p:txBody>
+          <a:bodyPr wrap="square" lIns="0" tIns="0" rIns="0" bIns="0" rtlCol="0" anchor="ctr"/>
+          <a:lstStyle/>
+          <a:p>
+            <a:pPr marL="0" indent="0">
+              <a:buNone/>
+            </a:pPr>
+            <a:r>
+              <a:rPr lang="en-US" sz="1050" i="1" dirty="0">
                 <a:solidFill>
                   <a:srgbClr val="5B6B73"/>
                 </a:solidFill>
@@ -5253,93 +5418,15 @@
                 <a:ea typeface="Calibri" pitchFamily="34" charset="-122"/>
                 <a:cs typeface="Calibri" pitchFamily="34" charset="-120"/>
               </a:rPr>
-              <a:t>—</a:t>
-            </a:r>
-            <a:endParaRPr lang="en-US" sz="1300" dirty="0"/>
-          </a:p>
-        </p:txBody>
-      </p:sp>
-      <p:sp>
-        <p:nvSpPr>
-          <p:cNvPr id="33" name="Text 31"/>
-          <p:cNvSpPr/>
-          <p:nvPr/>
-        </p:nvSpPr>
-        <p:spPr>
-          <a:xfrm>
-            <a:off x="9052560" y="5486400"/>
-            <a:ext cx="2560320" cy="502920"/>
-          </a:xfrm>
-          <a:prstGeom prst="rect">
-            <a:avLst/>
-          </a:prstGeom>
-          <a:noFill/>
-          <a:ln/>
-        </p:spPr>
-        <p:txBody>
-          <a:bodyPr wrap="square" lIns="0" tIns="0" rIns="0" bIns="0" rtlCol="0" anchor="ctr"/>
-          <a:lstStyle/>
-          <a:p>
-            <a:pPr algn="ctr" indent="0" marL="0">
-              <a:buNone/>
-            </a:pPr>
-            <a:r>
-              <a:rPr lang="en-US" sz="1300" dirty="0">
-                <a:solidFill>
-                  <a:srgbClr val="5B6B73"/>
-                </a:solidFill>
-                <a:latin typeface="Calibri" pitchFamily="34" charset="0"/>
-                <a:ea typeface="Calibri" pitchFamily="34" charset="-122"/>
-                <a:cs typeface="Calibri" pitchFamily="34" charset="-120"/>
-              </a:rPr>
-              <a:t>—</a:t>
-            </a:r>
-            <a:endParaRPr lang="en-US" sz="1300" dirty="0"/>
-          </a:p>
-        </p:txBody>
-      </p:sp>
-      <p:sp>
-        <p:nvSpPr>
-          <p:cNvPr id="34" name="Text 32"/>
-          <p:cNvSpPr/>
-          <p:nvPr/>
-        </p:nvSpPr>
-        <p:spPr>
-          <a:xfrm>
-            <a:off x="548640" y="6172200"/>
-            <a:ext cx="11064240" cy="457200"/>
-          </a:xfrm>
-          <a:prstGeom prst="rect">
-            <a:avLst/>
-          </a:prstGeom>
-          <a:noFill/>
-          <a:ln/>
-        </p:spPr>
-        <p:txBody>
-          <a:bodyPr wrap="square" lIns="0" tIns="0" rIns="0" bIns="0" rtlCol="0" anchor="ctr"/>
-          <a:lstStyle/>
-          <a:p>
-            <a:pPr indent="0" marL="0">
-              <a:buNone/>
-            </a:pPr>
-            <a:r>
-              <a:rPr lang="en-US" sz="1250" i="1" dirty="0">
-                <a:solidFill>
-                  <a:srgbClr val="5B6B73"/>
-                </a:solidFill>
-                <a:latin typeface="Calibri" pitchFamily="34" charset="0"/>
-                <a:ea typeface="Calibri" pitchFamily="34" charset="-122"/>
-                <a:cs typeface="Calibri" pitchFamily="34" charset="-120"/>
-              </a:rPr>
-              <a:t>Report brand-level vs variant-level separately; safety axes weighted; failure modes discussed alongside the numbers.</a:t>
-            </a:r>
-            <a:endParaRPr lang="en-US" sz="1250" dirty="0"/>
-          </a:p>
-        </p:txBody>
-      </p:sp>
-      <p:sp>
-        <p:nvSpPr>
-          <p:cNvPr id="35" name="Text 33"/>
+              <a:t>Top-3 accuracy and blind listing-quality rating not yet automated; 'swap rate' shown (false-swap rate needs per-image correctness labels).</a:t>
+            </a:r>
+            <a:endParaRPr lang="en-US" sz="1050" dirty="0"/>
+          </a:p>
+        </p:txBody>
+      </p:sp>
+      <p:sp>
+        <p:nvSpPr>
+          <p:cNvPr id="36" name="Text 34"/>
           <p:cNvSpPr/>
           <p:nvPr/>
         </p:nvSpPr>
@@ -5358,7 +5445,7 @@
           <a:bodyPr wrap="square" rtlCol="0" anchor="ctr"/>
           <a:lstStyle/>
           <a:p>
-            <a:pPr algn="r" indent="0" marL="0">
+            <a:pPr marL="0" indent="0" algn="r">
               <a:buNone/>
             </a:pPr>
             <a:r>
@@ -5392,6 +5479,7 @@
         <a:solidFill>
           <a:srgbClr val="F4F7F7"/>
         </a:solidFill>
+        <a:effectLst/>
       </p:bgPr>
     </p:bg>
     <p:spTree>
@@ -5429,11 +5517,11 @@
           <a:bodyPr wrap="square" lIns="0" tIns="0" rIns="0" bIns="0" rtlCol="0" anchor="ctr"/>
           <a:lstStyle/>
           <a:p>
-            <a:pPr indent="0" marL="0">
-              <a:buNone/>
-            </a:pPr>
-            <a:r>
-              <a:rPr lang="en-US" sz="1200" b="1" spc="200" kern="0" dirty="0">
+            <a:pPr marL="0" indent="0">
+              <a:buNone/>
+            </a:pPr>
+            <a:r>
+              <a:rPr lang="en-US" sz="1200" b="1" kern="0" spc="200" dirty="0">
                 <a:solidFill>
                   <a:srgbClr val="028090"/>
                 </a:solidFill>
@@ -5441,7 +5529,7 @@
                 <a:ea typeface="Calibri" pitchFamily="34" charset="-122"/>
                 <a:cs typeface="Calibri" pitchFamily="34" charset="-120"/>
               </a:rPr>
-              <a:t>DISCUSSION</a:t>
+              <a:t>RESULTS</a:t>
             </a:r>
             <a:endParaRPr lang="en-US" sz="1200" dirty="0"/>
           </a:p>
@@ -5468,7 +5556,7 @@
           <a:bodyPr wrap="square" lIns="0" tIns="0" rIns="0" bIns="0" rtlCol="0" anchor="ctr"/>
           <a:lstStyle/>
           <a:p>
-            <a:pPr indent="0" marL="0">
+            <a:pPr marL="0" indent="0">
               <a:buNone/>
             </a:pPr>
             <a:r>
@@ -5480,7 +5568,7 @@
                 <a:ea typeface="Cambria" pitchFamily="34" charset="-122"/>
                 <a:cs typeface="Cambria" pitchFamily="34" charset="-120"/>
               </a:rPr>
-              <a:t>Where we expect it to break</a:t>
+              <a:t>Qualitative results — photo in, listing out</a:t>
             </a:r>
             <a:endParaRPr lang="en-US" sz="3200" dirty="0"/>
           </a:p>
@@ -5488,18 +5576,57 @@
       </p:sp>
       <p:sp>
         <p:nvSpPr>
-          <p:cNvPr id="4" name="Shape 2"/>
-          <p:cNvSpPr/>
-          <p:nvPr/>
-        </p:nvSpPr>
-        <p:spPr>
-          <a:xfrm>
-            <a:off x="548640" y="1783080"/>
-            <a:ext cx="3566160" cy="1417320"/>
+          <p:cNvPr id="4" name="Text 2"/>
+          <p:cNvSpPr/>
+          <p:nvPr/>
+        </p:nvSpPr>
+        <p:spPr>
+          <a:xfrm>
+            <a:off x="548640" y="1572768"/>
+            <a:ext cx="3538728" cy="292608"/>
+          </a:xfrm>
+          <a:prstGeom prst="rect">
+            <a:avLst/>
+          </a:prstGeom>
+          <a:noFill/>
+          <a:ln/>
+        </p:spPr>
+        <p:txBody>
+          <a:bodyPr wrap="square" lIns="0" tIns="0" rIns="0" bIns="0" rtlCol="0" anchor="ctr"/>
+          <a:lstStyle/>
+          <a:p>
+            <a:pPr marL="0" indent="0" algn="ctr">
+              <a:buNone/>
+            </a:pPr>
+            <a:r>
+              <a:rPr lang="en-US" sz="1150" b="1" dirty="0">
+                <a:solidFill>
+                  <a:srgbClr val="0A7D3C"/>
+                </a:solidFill>
+                <a:latin typeface="Calibri" pitchFamily="34" charset="0"/>
+                <a:ea typeface="Calibri" pitchFamily="34" charset="-122"/>
+                <a:cs typeface="Calibri" pitchFamily="34" charset="-120"/>
+              </a:rPr>
+              <a:t>Recognised → published</a:t>
+            </a:r>
+            <a:endParaRPr lang="en-US" sz="1150" dirty="0"/>
+          </a:p>
+        </p:txBody>
+      </p:sp>
+      <p:sp>
+        <p:nvSpPr>
+          <p:cNvPr id="5" name="Shape 3"/>
+          <p:cNvSpPr/>
+          <p:nvPr/>
+        </p:nvSpPr>
+        <p:spPr>
+          <a:xfrm>
+            <a:off x="548640" y="1920240"/>
+            <a:ext cx="3538728" cy="4526280"/>
           </a:xfrm>
           <a:prstGeom prst="roundRect">
             <a:avLst>
-              <a:gd name="adj" fmla="val 5806"/>
+              <a:gd name="adj" fmla="val 2584"/>
             </a:avLst>
           </a:prstGeom>
           <a:solidFill>
@@ -5512,53 +5639,131 @@
             <a:prstDash val="solid"/>
           </a:ln>
         </p:spPr>
-      </p:sp>
-      <p:sp>
-        <p:nvSpPr>
-          <p:cNvPr id="5" name="Shape 3"/>
-          <p:cNvSpPr/>
-          <p:nvPr/>
-        </p:nvSpPr>
-        <p:spPr>
-          <a:xfrm>
-            <a:off x="804672" y="2057400"/>
-            <a:ext cx="146304" cy="146304"/>
-          </a:xfrm>
-          <a:prstGeom prst="ellipse">
-            <a:avLst/>
+        <p:txBody>
+          <a:bodyPr/>
+          <a:lstStyle/>
+          <a:p>
+            <a:endParaRPr lang="en-US"/>
+          </a:p>
+        </p:txBody>
+      </p:sp>
+      <p:sp>
+        <p:nvSpPr>
+          <p:cNvPr id="6" name="Shape 4"/>
+          <p:cNvSpPr/>
+          <p:nvPr/>
+        </p:nvSpPr>
+        <p:spPr>
+          <a:xfrm>
+            <a:off x="777240" y="2148840"/>
+            <a:ext cx="3081528" cy="1920240"/>
+          </a:xfrm>
+          <a:prstGeom prst="roundRect">
+            <a:avLst>
+              <a:gd name="adj" fmla="val 2857"/>
+            </a:avLst>
           </a:prstGeom>
           <a:solidFill>
-            <a:srgbClr val="F96167"/>
+            <a:srgbClr val="F6F6F8"/>
           </a:solidFill>
           <a:ln/>
         </p:spPr>
-      </p:sp>
-      <p:sp>
-        <p:nvSpPr>
-          <p:cNvPr id="6" name="Text 4"/>
-          <p:cNvSpPr/>
-          <p:nvPr/>
-        </p:nvSpPr>
-        <p:spPr>
-          <a:xfrm>
-            <a:off x="1051560" y="1947672"/>
-            <a:ext cx="2926080" cy="457200"/>
-          </a:xfrm>
-          <a:prstGeom prst="rect">
-            <a:avLst/>
-          </a:prstGeom>
-          <a:noFill/>
-          <a:ln/>
-        </p:spPr>
-        <p:txBody>
-          <a:bodyPr wrap="square" lIns="0" tIns="0" rIns="0" bIns="0" rtlCol="0" anchor="ctr"/>
-          <a:lstStyle/>
-          <a:p>
-            <a:pPr indent="0" marL="0">
-              <a:buNone/>
-            </a:pPr>
-            <a:r>
-              <a:rPr lang="en-US" sz="1500" b="1" dirty="0">
+        <p:txBody>
+          <a:bodyPr/>
+          <a:lstStyle/>
+          <a:p>
+            <a:endParaRPr lang="en-US"/>
+          </a:p>
+        </p:txBody>
+      </p:sp>
+      <p:pic>
+        <p:nvPicPr>
+          <p:cNvPr id="7" name="Image 0" descr="ex_cerave.jpg"/>
+          <p:cNvPicPr>
+            <a:picLocks noChangeAspect="1"/>
+          </p:cNvPicPr>
+          <p:nvPr/>
+        </p:nvPicPr>
+        <p:blipFill>
+          <a:blip r:embed="rId3"/>
+          <a:srcRect/>
+          <a:stretch/>
+        </p:blipFill>
+        <p:spPr>
+          <a:xfrm>
+            <a:off x="1477992" y="2240280"/>
+            <a:ext cx="1518250" cy="1737360"/>
+          </a:xfrm>
+          <a:prstGeom prst="rect">
+            <a:avLst/>
+          </a:prstGeom>
+        </p:spPr>
+      </p:pic>
+      <p:sp>
+        <p:nvSpPr>
+          <p:cNvPr id="8" name="Text 5"/>
+          <p:cNvSpPr/>
+          <p:nvPr/>
+        </p:nvSpPr>
+        <p:spPr>
+          <a:xfrm>
+            <a:off x="822960" y="4187952"/>
+            <a:ext cx="2990088" cy="256032"/>
+          </a:xfrm>
+          <a:prstGeom prst="rect">
+            <a:avLst/>
+          </a:prstGeom>
+          <a:noFill/>
+          <a:ln/>
+        </p:spPr>
+        <p:txBody>
+          <a:bodyPr wrap="square" lIns="0" tIns="0" rIns="0" bIns="0" rtlCol="0" anchor="ctr"/>
+          <a:lstStyle/>
+          <a:p>
+            <a:pPr marL="0" indent="0">
+              <a:buNone/>
+            </a:pPr>
+            <a:r>
+              <a:rPr lang="en-US" sz="1000" b="1" kern="0" spc="100" dirty="0">
+                <a:solidFill>
+                  <a:srgbClr val="5B6B73"/>
+                </a:solidFill>
+                <a:latin typeface="Calibri" pitchFamily="34" charset="0"/>
+                <a:ea typeface="Calibri" pitchFamily="34" charset="-122"/>
+                <a:cs typeface="Calibri" pitchFamily="34" charset="-120"/>
+              </a:rPr>
+              <a:t>HOUSEHOLD</a:t>
+            </a:r>
+            <a:endParaRPr lang="en-US" sz="1000" dirty="0"/>
+          </a:p>
+        </p:txBody>
+      </p:sp>
+      <p:sp>
+        <p:nvSpPr>
+          <p:cNvPr id="9" name="Text 6"/>
+          <p:cNvSpPr/>
+          <p:nvPr/>
+        </p:nvSpPr>
+        <p:spPr>
+          <a:xfrm>
+            <a:off x="822960" y="4462272"/>
+            <a:ext cx="2990088" cy="658368"/>
+          </a:xfrm>
+          <a:prstGeom prst="rect">
+            <a:avLst/>
+          </a:prstGeom>
+          <a:noFill/>
+          <a:ln/>
+        </p:spPr>
+        <p:txBody>
+          <a:bodyPr wrap="square" lIns="0" tIns="0" rIns="0" bIns="0" rtlCol="0" anchor="ctr"/>
+          <a:lstStyle/>
+          <a:p>
+            <a:pPr marL="0" indent="0">
+              <a:buNone/>
+            </a:pPr>
+            <a:r>
+              <a:rPr lang="en-US" sz="1350" b="1" dirty="0">
                 <a:solidFill>
                   <a:srgbClr val="1B2A33"/>
                 </a:solidFill>
@@ -5566,65 +5771,172 @@
                 <a:ea typeface="Cambria" pitchFamily="34" charset="-122"/>
                 <a:cs typeface="Cambria" pitchFamily="34" charset="-120"/>
               </a:rPr>
-              <a:t>Look-alike packaging</a:t>
-            </a:r>
-            <a:endParaRPr lang="en-US" sz="1500" dirty="0"/>
-          </a:p>
-        </p:txBody>
-      </p:sp>
-      <p:sp>
-        <p:nvSpPr>
-          <p:cNvPr id="7" name="Text 5"/>
-          <p:cNvSpPr/>
-          <p:nvPr/>
-        </p:nvSpPr>
-        <p:spPr>
-          <a:xfrm>
-            <a:off x="822960" y="2441448"/>
-            <a:ext cx="3063240" cy="640080"/>
-          </a:xfrm>
-          <a:prstGeom prst="rect">
-            <a:avLst/>
-          </a:prstGeom>
-          <a:noFill/>
-          <a:ln/>
-        </p:spPr>
-        <p:txBody>
-          <a:bodyPr wrap="square" lIns="0" tIns="0" rIns="0" bIns="0" rtlCol="0" anchor="ctr"/>
-          <a:lstStyle/>
-          <a:p>
-            <a:pPr indent="0" marL="0">
-              <a:buNone/>
-            </a:pPr>
-            <a:r>
-              <a:rPr lang="en-US" sz="1150" dirty="0">
-                <a:solidFill>
-                  <a:srgbClr val="5B6B73"/>
-                </a:solidFill>
-                <a:latin typeface="Calibri" pitchFamily="34" charset="0"/>
-                <a:ea typeface="Calibri" pitchFamily="34" charset="-122"/>
-                <a:cs typeface="Calibri" pitchFamily="34" charset="-120"/>
-              </a:rPr>
-              <a:t>Same brand family, different variant — the hardest identity call.</a:t>
-            </a:r>
-            <a:endParaRPr lang="en-US" sz="1150" dirty="0"/>
-          </a:p>
-        </p:txBody>
-      </p:sp>
-      <p:sp>
-        <p:nvSpPr>
-          <p:cNvPr id="8" name="Shape 6"/>
-          <p:cNvSpPr/>
-          <p:nvPr/>
-        </p:nvSpPr>
-        <p:spPr>
-          <a:xfrm>
-            <a:off x="4251960" y="1783080"/>
-            <a:ext cx="3566160" cy="1417320"/>
+              <a:t>CeraVe Daily Moisturizing Lotion, 562 mL</a:t>
+            </a:r>
+            <a:endParaRPr lang="en-US" sz="1350" dirty="0"/>
+          </a:p>
+        </p:txBody>
+      </p:sp>
+      <p:sp>
+        <p:nvSpPr>
+          <p:cNvPr id="10" name="Text 7"/>
+          <p:cNvSpPr/>
+          <p:nvPr/>
+        </p:nvSpPr>
+        <p:spPr>
+          <a:xfrm>
+            <a:off x="822960" y="5175504"/>
+            <a:ext cx="2990088" cy="347472"/>
+          </a:xfrm>
+          <a:prstGeom prst="rect">
+            <a:avLst/>
+          </a:prstGeom>
+          <a:noFill/>
+          <a:ln/>
+        </p:spPr>
+        <p:txBody>
+          <a:bodyPr wrap="square" lIns="0" tIns="0" rIns="0" bIns="0" rtlCol="0" anchor="ctr"/>
+          <a:lstStyle/>
+          <a:p>
+            <a:pPr marL="0" indent="0">
+              <a:buNone/>
+            </a:pPr>
+            <a:r>
+              <a:rPr lang="en-US" sz="1350" b="1" dirty="0">
+                <a:solidFill>
+                  <a:srgbClr val="0A7D3C"/>
+                </a:solidFill>
+                <a:latin typeface="Calibri" pitchFamily="34" charset="0"/>
+                <a:ea typeface="Calibri" pitchFamily="34" charset="-122"/>
+                <a:cs typeface="Calibri" pitchFamily="34" charset="-120"/>
+              </a:rPr>
+              <a:t>CAD 43.72</a:t>
+            </a:r>
+            <a:endParaRPr lang="en-US" sz="1350" dirty="0"/>
+          </a:p>
+        </p:txBody>
+      </p:sp>
+      <p:sp>
+        <p:nvSpPr>
+          <p:cNvPr id="11" name="Shape 8"/>
+          <p:cNvSpPr/>
+          <p:nvPr/>
+        </p:nvSpPr>
+        <p:spPr>
+          <a:xfrm>
+            <a:off x="822960" y="5650992"/>
+            <a:ext cx="1313078" cy="310896"/>
           </a:xfrm>
           <a:prstGeom prst="roundRect">
             <a:avLst>
-              <a:gd name="adj" fmla="val 5806"/>
+              <a:gd name="adj" fmla="val 50000"/>
+            </a:avLst>
+          </a:prstGeom>
+          <a:solidFill>
+            <a:srgbClr val="E6F7EE"/>
+          </a:solidFill>
+          <a:ln/>
+        </p:spPr>
+        <p:txBody>
+          <a:bodyPr/>
+          <a:lstStyle/>
+          <a:p>
+            <a:endParaRPr lang="en-US"/>
+          </a:p>
+        </p:txBody>
+      </p:sp>
+      <p:sp>
+        <p:nvSpPr>
+          <p:cNvPr id="12" name="Text 9"/>
+          <p:cNvSpPr/>
+          <p:nvPr/>
+        </p:nvSpPr>
+        <p:spPr>
+          <a:xfrm>
+            <a:off x="822960" y="5650992"/>
+            <a:ext cx="1313078" cy="310896"/>
+          </a:xfrm>
+          <a:prstGeom prst="rect">
+            <a:avLst/>
+          </a:prstGeom>
+          <a:noFill/>
+          <a:ln/>
+        </p:spPr>
+        <p:txBody>
+          <a:bodyPr wrap="square" lIns="0" tIns="0" rIns="0" bIns="0" rtlCol="0" anchor="ctr"/>
+          <a:lstStyle/>
+          <a:p>
+            <a:pPr marL="0" indent="0" algn="ctr">
+              <a:buNone/>
+            </a:pPr>
+            <a:r>
+              <a:rPr lang="en-US" sz="950" b="1" dirty="0">
+                <a:solidFill>
+                  <a:srgbClr val="0A7D3C"/>
+                </a:solidFill>
+                <a:latin typeface="Calibri" pitchFamily="34" charset="0"/>
+                <a:ea typeface="Calibri" pitchFamily="34" charset="-122"/>
+                <a:cs typeface="Calibri" pitchFamily="34" charset="-120"/>
+              </a:rPr>
+              <a:t>ready to publish</a:t>
+            </a:r>
+            <a:endParaRPr lang="en-US" sz="950" dirty="0"/>
+          </a:p>
+        </p:txBody>
+      </p:sp>
+      <p:sp>
+        <p:nvSpPr>
+          <p:cNvPr id="13" name="Text 10"/>
+          <p:cNvSpPr/>
+          <p:nvPr/>
+        </p:nvSpPr>
+        <p:spPr>
+          <a:xfrm>
+            <a:off x="4270248" y="1572768"/>
+            <a:ext cx="3538728" cy="292608"/>
+          </a:xfrm>
+          <a:prstGeom prst="rect">
+            <a:avLst/>
+          </a:prstGeom>
+          <a:noFill/>
+          <a:ln/>
+        </p:spPr>
+        <p:txBody>
+          <a:bodyPr wrap="square" lIns="0" tIns="0" rIns="0" bIns="0" rtlCol="0" anchor="ctr"/>
+          <a:lstStyle/>
+          <a:p>
+            <a:pPr marL="0" indent="0" algn="ctr">
+              <a:buNone/>
+            </a:pPr>
+            <a:r>
+              <a:rPr lang="en-US" sz="1150" b="1" dirty="0">
+                <a:solidFill>
+                  <a:srgbClr val="F96167"/>
+                </a:solidFill>
+                <a:latin typeface="Calibri" pitchFamily="34" charset="0"/>
+                <a:ea typeface="Calibri" pitchFamily="34" charset="-122"/>
+                <a:cs typeface="Calibri" pitchFamily="34" charset="-120"/>
+              </a:rPr>
+              <a:t>Age-restricted → flagged + image upgraded</a:t>
+            </a:r>
+            <a:endParaRPr lang="en-US" sz="1150" dirty="0"/>
+          </a:p>
+        </p:txBody>
+      </p:sp>
+      <p:sp>
+        <p:nvSpPr>
+          <p:cNvPr id="14" name="Shape 11"/>
+          <p:cNvSpPr/>
+          <p:nvPr/>
+        </p:nvSpPr>
+        <p:spPr>
+          <a:xfrm>
+            <a:off x="4270248" y="1920240"/>
+            <a:ext cx="3538728" cy="4526280"/>
+          </a:xfrm>
+          <a:prstGeom prst="roundRect">
+            <a:avLst>
+              <a:gd name="adj" fmla="val 2584"/>
             </a:avLst>
           </a:prstGeom>
           <a:solidFill>
@@ -5637,53 +5949,131 @@
             <a:prstDash val="solid"/>
           </a:ln>
         </p:spPr>
-      </p:sp>
-      <p:sp>
-        <p:nvSpPr>
-          <p:cNvPr id="9" name="Shape 7"/>
-          <p:cNvSpPr/>
-          <p:nvPr/>
-        </p:nvSpPr>
-        <p:spPr>
-          <a:xfrm>
-            <a:off x="4507992" y="2057400"/>
-            <a:ext cx="146304" cy="146304"/>
-          </a:xfrm>
-          <a:prstGeom prst="ellipse">
-            <a:avLst/>
+        <p:txBody>
+          <a:bodyPr/>
+          <a:lstStyle/>
+          <a:p>
+            <a:endParaRPr lang="en-US"/>
+          </a:p>
+        </p:txBody>
+      </p:sp>
+      <p:sp>
+        <p:nvSpPr>
+          <p:cNvPr id="15" name="Shape 12"/>
+          <p:cNvSpPr/>
+          <p:nvPr/>
+        </p:nvSpPr>
+        <p:spPr>
+          <a:xfrm>
+            <a:off x="4498848" y="2148840"/>
+            <a:ext cx="3081528" cy="1920240"/>
+          </a:xfrm>
+          <a:prstGeom prst="roundRect">
+            <a:avLst>
+              <a:gd name="adj" fmla="val 2857"/>
+            </a:avLst>
           </a:prstGeom>
           <a:solidFill>
-            <a:srgbClr val="F96167"/>
+            <a:srgbClr val="F6F6F8"/>
           </a:solidFill>
           <a:ln/>
         </p:spPr>
-      </p:sp>
-      <p:sp>
-        <p:nvSpPr>
-          <p:cNvPr id="10" name="Text 8"/>
-          <p:cNvSpPr/>
-          <p:nvPr/>
-        </p:nvSpPr>
-        <p:spPr>
-          <a:xfrm>
-            <a:off x="4754880" y="1947672"/>
-            <a:ext cx="2926080" cy="457200"/>
-          </a:xfrm>
-          <a:prstGeom prst="rect">
-            <a:avLst/>
-          </a:prstGeom>
-          <a:noFill/>
-          <a:ln/>
-        </p:spPr>
-        <p:txBody>
-          <a:bodyPr wrap="square" lIns="0" tIns="0" rIns="0" bIns="0" rtlCol="0" anchor="ctr"/>
-          <a:lstStyle/>
-          <a:p>
-            <a:pPr indent="0" marL="0">
-              <a:buNone/>
-            </a:pPr>
-            <a:r>
-              <a:rPr lang="en-US" sz="1500" b="1" dirty="0">
+        <p:txBody>
+          <a:bodyPr/>
+          <a:lstStyle/>
+          <a:p>
+            <a:endParaRPr lang="en-US"/>
+          </a:p>
+        </p:txBody>
+      </p:sp>
+      <p:pic>
+        <p:nvPicPr>
+          <p:cNvPr id="16" name="Image 1" descr="ex_amarula.jpg"/>
+          <p:cNvPicPr>
+            <a:picLocks noChangeAspect="1"/>
+          </p:cNvPicPr>
+          <p:nvPr/>
+        </p:nvPicPr>
+        <p:blipFill>
+          <a:blip r:embed="rId4"/>
+          <a:srcRect/>
+          <a:stretch/>
+        </p:blipFill>
+        <p:spPr>
+          <a:xfrm>
+            <a:off x="5221857" y="2240280"/>
+            <a:ext cx="1581510" cy="1737360"/>
+          </a:xfrm>
+          <a:prstGeom prst="rect">
+            <a:avLst/>
+          </a:prstGeom>
+        </p:spPr>
+      </p:pic>
+      <p:sp>
+        <p:nvSpPr>
+          <p:cNvPr id="17" name="Text 13"/>
+          <p:cNvSpPr/>
+          <p:nvPr/>
+        </p:nvSpPr>
+        <p:spPr>
+          <a:xfrm>
+            <a:off x="4544568" y="4187952"/>
+            <a:ext cx="2990088" cy="256032"/>
+          </a:xfrm>
+          <a:prstGeom prst="rect">
+            <a:avLst/>
+          </a:prstGeom>
+          <a:noFill/>
+          <a:ln/>
+        </p:spPr>
+        <p:txBody>
+          <a:bodyPr wrap="square" lIns="0" tIns="0" rIns="0" bIns="0" rtlCol="0" anchor="ctr"/>
+          <a:lstStyle/>
+          <a:p>
+            <a:pPr marL="0" indent="0">
+              <a:buNone/>
+            </a:pPr>
+            <a:r>
+              <a:rPr lang="en-US" sz="1000" b="1" kern="0" spc="100" dirty="0">
+                <a:solidFill>
+                  <a:srgbClr val="5B6B73"/>
+                </a:solidFill>
+                <a:latin typeface="Calibri" pitchFamily="34" charset="0"/>
+                <a:ea typeface="Calibri" pitchFamily="34" charset="-122"/>
+                <a:cs typeface="Calibri" pitchFamily="34" charset="-120"/>
+              </a:rPr>
+              <a:t>ALCOHOL</a:t>
+            </a:r>
+            <a:endParaRPr lang="en-US" sz="1000" dirty="0"/>
+          </a:p>
+        </p:txBody>
+      </p:sp>
+      <p:sp>
+        <p:nvSpPr>
+          <p:cNvPr id="18" name="Text 14"/>
+          <p:cNvSpPr/>
+          <p:nvPr/>
+        </p:nvSpPr>
+        <p:spPr>
+          <a:xfrm>
+            <a:off x="4544568" y="4462272"/>
+            <a:ext cx="2990088" cy="658368"/>
+          </a:xfrm>
+          <a:prstGeom prst="rect">
+            <a:avLst/>
+          </a:prstGeom>
+          <a:noFill/>
+          <a:ln/>
+        </p:spPr>
+        <p:txBody>
+          <a:bodyPr wrap="square" lIns="0" tIns="0" rIns="0" bIns="0" rtlCol="0" anchor="ctr"/>
+          <a:lstStyle/>
+          <a:p>
+            <a:pPr marL="0" indent="0">
+              <a:buNone/>
+            </a:pPr>
+            <a:r>
+              <a:rPr lang="en-US" sz="1350" b="1" dirty="0">
                 <a:solidFill>
                   <a:srgbClr val="1B2A33"/>
                 </a:solidFill>
@@ -5691,65 +6081,240 @@
                 <a:ea typeface="Cambria" pitchFamily="34" charset="-122"/>
                 <a:cs typeface="Cambria" pitchFamily="34" charset="-120"/>
               </a:rPr>
-              <a:t>Multipack ambiguity</a:t>
-            </a:r>
-            <a:endParaRPr lang="en-US" sz="1500" dirty="0"/>
-          </a:p>
-        </p:txBody>
-      </p:sp>
-      <p:sp>
-        <p:nvSpPr>
-          <p:cNvPr id="11" name="Text 9"/>
-          <p:cNvSpPr/>
-          <p:nvPr/>
-        </p:nvSpPr>
-        <p:spPr>
-          <a:xfrm>
-            <a:off x="4526280" y="2441448"/>
-            <a:ext cx="3063240" cy="640080"/>
-          </a:xfrm>
-          <a:prstGeom prst="rect">
-            <a:avLst/>
-          </a:prstGeom>
-          <a:noFill/>
-          <a:ln/>
-        </p:spPr>
-        <p:txBody>
-          <a:bodyPr wrap="square" lIns="0" tIns="0" rIns="0" bIns="0" rtlCol="0" anchor="ctr"/>
-          <a:lstStyle/>
-          <a:p>
-            <a:pPr indent="0" marL="0">
-              <a:buNone/>
-            </a:pPr>
-            <a:r>
-              <a:rPr lang="en-US" sz="1150" dirty="0">
-                <a:solidFill>
-                  <a:srgbClr val="5B6B73"/>
-                </a:solidFill>
-                <a:latin typeface="Calibri" pitchFamily="34" charset="0"/>
-                <a:ea typeface="Calibri" pitchFamily="34" charset="-122"/>
-                <a:cs typeface="Calibri" pitchFamily="34" charset="-120"/>
-              </a:rPr>
-              <a:t>Single unit vs 6-pack vs 24-pack changes both SKU and price.</a:t>
-            </a:r>
-            <a:endParaRPr lang="en-US" sz="1150" dirty="0"/>
-          </a:p>
-        </p:txBody>
-      </p:sp>
-      <p:sp>
-        <p:nvSpPr>
-          <p:cNvPr id="12" name="Shape 10"/>
-          <p:cNvSpPr/>
-          <p:nvPr/>
-        </p:nvSpPr>
-        <p:spPr>
-          <a:xfrm>
-            <a:off x="7955280" y="1783080"/>
-            <a:ext cx="3566160" cy="1417320"/>
+              <a:t>Amarula Cream Liqueur, 1 L</a:t>
+            </a:r>
+            <a:endParaRPr lang="en-US" sz="1350" dirty="0"/>
+          </a:p>
+        </p:txBody>
+      </p:sp>
+      <p:sp>
+        <p:nvSpPr>
+          <p:cNvPr id="19" name="Text 15"/>
+          <p:cNvSpPr/>
+          <p:nvPr/>
+        </p:nvSpPr>
+        <p:spPr>
+          <a:xfrm>
+            <a:off x="4544568" y="5175504"/>
+            <a:ext cx="2990088" cy="347472"/>
+          </a:xfrm>
+          <a:prstGeom prst="rect">
+            <a:avLst/>
+          </a:prstGeom>
+          <a:noFill/>
+          <a:ln/>
+        </p:spPr>
+        <p:txBody>
+          <a:bodyPr wrap="square" lIns="0" tIns="0" rIns="0" bIns="0" rtlCol="0" anchor="ctr"/>
+          <a:lstStyle/>
+          <a:p>
+            <a:pPr marL="0" indent="0">
+              <a:buNone/>
+            </a:pPr>
+            <a:r>
+              <a:rPr lang="en-US" sz="1350" b="1" dirty="0">
+                <a:solidFill>
+                  <a:srgbClr val="0A7D3C"/>
+                </a:solidFill>
+                <a:latin typeface="Calibri" pitchFamily="34" charset="0"/>
+                <a:ea typeface="Calibri" pitchFamily="34" charset="-122"/>
+                <a:cs typeface="Calibri" pitchFamily="34" charset="-120"/>
+              </a:rPr>
+              <a:t>CAD 37.15</a:t>
+            </a:r>
+            <a:endParaRPr lang="en-US" sz="1350" dirty="0"/>
+          </a:p>
+        </p:txBody>
+      </p:sp>
+      <p:sp>
+        <p:nvSpPr>
+          <p:cNvPr id="20" name="Shape 16"/>
+          <p:cNvSpPr/>
+          <p:nvPr/>
+        </p:nvSpPr>
+        <p:spPr>
+          <a:xfrm>
+            <a:off x="4544568" y="5650992"/>
+            <a:ext cx="1174090" cy="310896"/>
           </a:xfrm>
           <a:prstGeom prst="roundRect">
             <a:avLst>
-              <a:gd name="adj" fmla="val 5806"/>
+              <a:gd name="adj" fmla="val 50000"/>
+            </a:avLst>
+          </a:prstGeom>
+          <a:solidFill>
+            <a:srgbClr val="FDECEA"/>
+          </a:solidFill>
+          <a:ln/>
+        </p:spPr>
+        <p:txBody>
+          <a:bodyPr/>
+          <a:lstStyle/>
+          <a:p>
+            <a:endParaRPr lang="en-US"/>
+          </a:p>
+        </p:txBody>
+      </p:sp>
+      <p:sp>
+        <p:nvSpPr>
+          <p:cNvPr id="21" name="Text 17"/>
+          <p:cNvSpPr/>
+          <p:nvPr/>
+        </p:nvSpPr>
+        <p:spPr>
+          <a:xfrm>
+            <a:off x="4544568" y="5650992"/>
+            <a:ext cx="1174090" cy="310896"/>
+          </a:xfrm>
+          <a:prstGeom prst="rect">
+            <a:avLst/>
+          </a:prstGeom>
+          <a:noFill/>
+          <a:ln/>
+        </p:spPr>
+        <p:txBody>
+          <a:bodyPr wrap="square" lIns="0" tIns="0" rIns="0" bIns="0" rtlCol="0" anchor="ctr"/>
+          <a:lstStyle/>
+          <a:p>
+            <a:pPr marL="0" indent="0" algn="ctr">
+              <a:buNone/>
+            </a:pPr>
+            <a:r>
+              <a:rPr lang="en-US" sz="950" b="1" dirty="0">
+                <a:solidFill>
+                  <a:srgbClr val="C0392B"/>
+                </a:solidFill>
+                <a:latin typeface="Calibri" pitchFamily="34" charset="0"/>
+                <a:ea typeface="Calibri" pitchFamily="34" charset="-122"/>
+                <a:cs typeface="Calibri" pitchFamily="34" charset="-120"/>
+              </a:rPr>
+              <a:t>18+ restricted</a:t>
+            </a:r>
+            <a:endParaRPr lang="en-US" sz="950" dirty="0"/>
+          </a:p>
+        </p:txBody>
+      </p:sp>
+      <p:sp>
+        <p:nvSpPr>
+          <p:cNvPr id="22" name="Shape 18"/>
+          <p:cNvSpPr/>
+          <p:nvPr/>
+        </p:nvSpPr>
+        <p:spPr>
+          <a:xfrm>
+            <a:off x="5810098" y="5650992"/>
+            <a:ext cx="1243584" cy="310896"/>
+          </a:xfrm>
+          <a:prstGeom prst="roundRect">
+            <a:avLst>
+              <a:gd name="adj" fmla="val 50000"/>
+            </a:avLst>
+          </a:prstGeom>
+          <a:solidFill>
+            <a:srgbClr val="E9ECF7"/>
+          </a:solidFill>
+          <a:ln/>
+        </p:spPr>
+        <p:txBody>
+          <a:bodyPr/>
+          <a:lstStyle/>
+          <a:p>
+            <a:endParaRPr lang="en-US"/>
+          </a:p>
+        </p:txBody>
+      </p:sp>
+      <p:sp>
+        <p:nvSpPr>
+          <p:cNvPr id="23" name="Text 19"/>
+          <p:cNvSpPr/>
+          <p:nvPr/>
+        </p:nvSpPr>
+        <p:spPr>
+          <a:xfrm>
+            <a:off x="5810098" y="5650992"/>
+            <a:ext cx="1243584" cy="310896"/>
+          </a:xfrm>
+          <a:prstGeom prst="rect">
+            <a:avLst/>
+          </a:prstGeom>
+          <a:noFill/>
+          <a:ln/>
+        </p:spPr>
+        <p:txBody>
+          <a:bodyPr wrap="square" lIns="0" tIns="0" rIns="0" bIns="0" rtlCol="0" anchor="ctr"/>
+          <a:lstStyle/>
+          <a:p>
+            <a:pPr marL="0" indent="0" algn="ctr">
+              <a:buNone/>
+            </a:pPr>
+            <a:r>
+              <a:rPr lang="en-US" sz="950" b="1" dirty="0">
+                <a:solidFill>
+                  <a:srgbClr val="3A3A8C"/>
+                </a:solidFill>
+                <a:latin typeface="Calibri" pitchFamily="34" charset="0"/>
+                <a:ea typeface="Calibri" pitchFamily="34" charset="-122"/>
+                <a:cs typeface="Calibri" pitchFamily="34" charset="-120"/>
+              </a:rPr>
+              <a:t>catalogue image</a:t>
+            </a:r>
+            <a:endParaRPr lang="en-US" sz="950" dirty="0"/>
+          </a:p>
+        </p:txBody>
+      </p:sp>
+      <p:sp>
+        <p:nvSpPr>
+          <p:cNvPr id="24" name="Text 20"/>
+          <p:cNvSpPr/>
+          <p:nvPr/>
+        </p:nvSpPr>
+        <p:spPr>
+          <a:xfrm>
+            <a:off x="7991856" y="1572768"/>
+            <a:ext cx="3538728" cy="292608"/>
+          </a:xfrm>
+          <a:prstGeom prst="rect">
+            <a:avLst/>
+          </a:prstGeom>
+          <a:noFill/>
+          <a:ln/>
+        </p:spPr>
+        <p:txBody>
+          <a:bodyPr wrap="square" lIns="0" tIns="0" rIns="0" bIns="0" rtlCol="0" anchor="ctr"/>
+          <a:lstStyle/>
+          <a:p>
+            <a:pPr marL="0" indent="0" algn="ctr">
+              <a:buNone/>
+            </a:pPr>
+            <a:r>
+              <a:rPr lang="en-US" sz="1150" b="1" dirty="0">
+                <a:solidFill>
+                  <a:srgbClr val="B9770A"/>
+                </a:solidFill>
+                <a:latin typeface="Calibri" pitchFamily="34" charset="0"/>
+                <a:ea typeface="Calibri" pitchFamily="34" charset="-122"/>
+                <a:cs typeface="Calibri" pitchFamily="34" charset="-120"/>
+              </a:rPr>
+              <a:t>Low confidence → routed to review</a:t>
+            </a:r>
+            <a:endParaRPr lang="en-US" sz="1150" dirty="0"/>
+          </a:p>
+        </p:txBody>
+      </p:sp>
+      <p:sp>
+        <p:nvSpPr>
+          <p:cNvPr id="25" name="Shape 21"/>
+          <p:cNvSpPr/>
+          <p:nvPr/>
+        </p:nvSpPr>
+        <p:spPr>
+          <a:xfrm>
+            <a:off x="7991856" y="1920240"/>
+            <a:ext cx="3538728" cy="4526280"/>
+          </a:xfrm>
+          <a:prstGeom prst="roundRect">
+            <a:avLst>
+              <a:gd name="adj" fmla="val 2584"/>
             </a:avLst>
           </a:prstGeom>
           <a:solidFill>
@@ -5762,53 +6327,131 @@
             <a:prstDash val="solid"/>
           </a:ln>
         </p:spPr>
-      </p:sp>
-      <p:sp>
-        <p:nvSpPr>
-          <p:cNvPr id="13" name="Shape 11"/>
-          <p:cNvSpPr/>
-          <p:nvPr/>
-        </p:nvSpPr>
-        <p:spPr>
-          <a:xfrm>
-            <a:off x="8211312" y="2057400"/>
-            <a:ext cx="146304" cy="146304"/>
-          </a:xfrm>
-          <a:prstGeom prst="ellipse">
-            <a:avLst/>
+        <p:txBody>
+          <a:bodyPr/>
+          <a:lstStyle/>
+          <a:p>
+            <a:endParaRPr lang="en-US"/>
+          </a:p>
+        </p:txBody>
+      </p:sp>
+      <p:sp>
+        <p:nvSpPr>
+          <p:cNvPr id="26" name="Shape 22"/>
+          <p:cNvSpPr/>
+          <p:nvPr/>
+        </p:nvSpPr>
+        <p:spPr>
+          <a:xfrm>
+            <a:off x="8220456" y="2148840"/>
+            <a:ext cx="3081528" cy="1920240"/>
+          </a:xfrm>
+          <a:prstGeom prst="roundRect">
+            <a:avLst>
+              <a:gd name="adj" fmla="val 2857"/>
+            </a:avLst>
           </a:prstGeom>
           <a:solidFill>
-            <a:srgbClr val="F96167"/>
+            <a:srgbClr val="F6F6F8"/>
           </a:solidFill>
           <a:ln/>
         </p:spPr>
-      </p:sp>
-      <p:sp>
-        <p:nvSpPr>
-          <p:cNvPr id="14" name="Text 12"/>
-          <p:cNvSpPr/>
-          <p:nvPr/>
-        </p:nvSpPr>
-        <p:spPr>
-          <a:xfrm>
-            <a:off x="8458200" y="1947672"/>
-            <a:ext cx="2926080" cy="457200"/>
-          </a:xfrm>
-          <a:prstGeom prst="rect">
-            <a:avLst/>
-          </a:prstGeom>
-          <a:noFill/>
-          <a:ln/>
-        </p:spPr>
-        <p:txBody>
-          <a:bodyPr wrap="square" lIns="0" tIns="0" rIns="0" bIns="0" rtlCol="0" anchor="ctr"/>
-          <a:lstStyle/>
-          <a:p>
-            <a:pPr indent="0" marL="0">
-              <a:buNone/>
-            </a:pPr>
-            <a:r>
-              <a:rPr lang="en-US" sz="1500" b="1" dirty="0">
+        <p:txBody>
+          <a:bodyPr/>
+          <a:lstStyle/>
+          <a:p>
+            <a:endParaRPr lang="en-US"/>
+          </a:p>
+        </p:txBody>
+      </p:sp>
+      <p:pic>
+        <p:nvPicPr>
+          <p:cNvPr id="27" name="Image 2" descr="ex_crackers.jpg"/>
+          <p:cNvPicPr>
+            <a:picLocks noChangeAspect="1"/>
+          </p:cNvPicPr>
+          <p:nvPr/>
+        </p:nvPicPr>
+        <p:blipFill>
+          <a:blip r:embed="rId5"/>
+          <a:srcRect/>
+          <a:stretch/>
+        </p:blipFill>
+        <p:spPr>
+          <a:xfrm>
+            <a:off x="8833448" y="2240280"/>
+            <a:ext cx="1656273" cy="1737360"/>
+          </a:xfrm>
+          <a:prstGeom prst="rect">
+            <a:avLst/>
+          </a:prstGeom>
+        </p:spPr>
+      </p:pic>
+      <p:sp>
+        <p:nvSpPr>
+          <p:cNvPr id="28" name="Text 23"/>
+          <p:cNvSpPr/>
+          <p:nvPr/>
+        </p:nvSpPr>
+        <p:spPr>
+          <a:xfrm>
+            <a:off x="8266176" y="4187952"/>
+            <a:ext cx="2990088" cy="256032"/>
+          </a:xfrm>
+          <a:prstGeom prst="rect">
+            <a:avLst/>
+          </a:prstGeom>
+          <a:noFill/>
+          <a:ln/>
+        </p:spPr>
+        <p:txBody>
+          <a:bodyPr wrap="square" lIns="0" tIns="0" rIns="0" bIns="0" rtlCol="0" anchor="ctr"/>
+          <a:lstStyle/>
+          <a:p>
+            <a:pPr marL="0" indent="0">
+              <a:buNone/>
+            </a:pPr>
+            <a:r>
+              <a:rPr lang="en-US" sz="1000" b="1" kern="0" spc="100" dirty="0">
+                <a:solidFill>
+                  <a:srgbClr val="5B6B73"/>
+                </a:solidFill>
+                <a:latin typeface="Calibri" pitchFamily="34" charset="0"/>
+                <a:ea typeface="Calibri" pitchFamily="34" charset="-122"/>
+                <a:cs typeface="Calibri" pitchFamily="34" charset="-120"/>
+              </a:rPr>
+              <a:t>SNACKS</a:t>
+            </a:r>
+            <a:endParaRPr lang="en-US" sz="1000" dirty="0"/>
+          </a:p>
+        </p:txBody>
+      </p:sp>
+      <p:sp>
+        <p:nvSpPr>
+          <p:cNvPr id="29" name="Text 24"/>
+          <p:cNvSpPr/>
+          <p:nvPr/>
+        </p:nvSpPr>
+        <p:spPr>
+          <a:xfrm>
+            <a:off x="8266176" y="4462272"/>
+            <a:ext cx="2990088" cy="658368"/>
+          </a:xfrm>
+          <a:prstGeom prst="rect">
+            <a:avLst/>
+          </a:prstGeom>
+          <a:noFill/>
+          <a:ln/>
+        </p:spPr>
+        <p:txBody>
+          <a:bodyPr wrap="square" lIns="0" tIns="0" rIns="0" bIns="0" rtlCol="0" anchor="ctr"/>
+          <a:lstStyle/>
+          <a:p>
+            <a:pPr marL="0" indent="0">
+              <a:buNone/>
+            </a:pPr>
+            <a:r>
+              <a:rPr lang="en-US" sz="1350" b="1" dirty="0">
                 <a:solidFill>
                   <a:srgbClr val="1B2A33"/>
                 </a:solidFill>
@@ -5816,163 +6459,145 @@
                 <a:ea typeface="Cambria" pitchFamily="34" charset="-122"/>
                 <a:cs typeface="Cambria" pitchFamily="34" charset="-120"/>
               </a:rPr>
-              <a:t>Glare &amp; occlusion</a:t>
-            </a:r>
-            <a:endParaRPr lang="en-US" sz="1500" dirty="0"/>
-          </a:p>
-        </p:txBody>
-      </p:sp>
-      <p:sp>
-        <p:nvSpPr>
-          <p:cNvPr id="15" name="Text 13"/>
-          <p:cNvSpPr/>
-          <p:nvPr/>
-        </p:nvSpPr>
-        <p:spPr>
-          <a:xfrm>
-            <a:off x="8229600" y="2441448"/>
-            <a:ext cx="3063240" cy="640080"/>
-          </a:xfrm>
-          <a:prstGeom prst="rect">
-            <a:avLst/>
-          </a:prstGeom>
-          <a:noFill/>
-          <a:ln/>
-        </p:spPr>
-        <p:txBody>
-          <a:bodyPr wrap="square" lIns="0" tIns="0" rIns="0" bIns="0" rtlCol="0" anchor="ctr"/>
-          <a:lstStyle/>
-          <a:p>
-            <a:pPr indent="0" marL="0">
-              <a:buNone/>
-            </a:pPr>
-            <a:r>
-              <a:rPr lang="en-US" sz="1150" dirty="0">
-                <a:solidFill>
-                  <a:srgbClr val="5B6B73"/>
-                </a:solidFill>
-                <a:latin typeface="Calibri" pitchFamily="34" charset="0"/>
-                <a:ea typeface="Calibri" pitchFamily="34" charset="-122"/>
-                <a:cs typeface="Calibri" pitchFamily="34" charset="-120"/>
-              </a:rPr>
-              <a:t>Reflections and partial views degrade OCR and the VLM read.</a:t>
-            </a:r>
-            <a:endParaRPr lang="en-US" sz="1150" dirty="0"/>
-          </a:p>
-        </p:txBody>
-      </p:sp>
-      <p:sp>
-        <p:nvSpPr>
-          <p:cNvPr id="16" name="Shape 14"/>
-          <p:cNvSpPr/>
-          <p:nvPr/>
-        </p:nvSpPr>
-        <p:spPr>
-          <a:xfrm>
-            <a:off x="548640" y="3383280"/>
-            <a:ext cx="3566160" cy="1417320"/>
+              <a:t>Cream Crackers, 200 g (brand unconfirmed)</a:t>
+            </a:r>
+            <a:endParaRPr lang="en-US" sz="1350" dirty="0"/>
+          </a:p>
+        </p:txBody>
+      </p:sp>
+      <p:sp>
+        <p:nvSpPr>
+          <p:cNvPr id="30" name="Text 25"/>
+          <p:cNvSpPr/>
+          <p:nvPr/>
+        </p:nvSpPr>
+        <p:spPr>
+          <a:xfrm>
+            <a:off x="8266176" y="5175504"/>
+            <a:ext cx="2990088" cy="347472"/>
+          </a:xfrm>
+          <a:prstGeom prst="rect">
+            <a:avLst/>
+          </a:prstGeom>
+          <a:noFill/>
+          <a:ln/>
+        </p:spPr>
+        <p:txBody>
+          <a:bodyPr wrap="square" lIns="0" tIns="0" rIns="0" bIns="0" rtlCol="0" anchor="ctr"/>
+          <a:lstStyle/>
+          <a:p>
+            <a:pPr marL="0" indent="0">
+              <a:buNone/>
+            </a:pPr>
+            <a:r>
+              <a:rPr lang="en-US" sz="1350" b="1" dirty="0">
+                <a:solidFill>
+                  <a:srgbClr val="B9770A"/>
+                </a:solidFill>
+                <a:latin typeface="Calibri" pitchFamily="34" charset="0"/>
+                <a:ea typeface="Calibri" pitchFamily="34" charset="-122"/>
+                <a:cs typeface="Calibri" pitchFamily="34" charset="-120"/>
+              </a:rPr>
+              <a:t>—  routed to review</a:t>
+            </a:r>
+            <a:endParaRPr lang="en-US" sz="1350" dirty="0"/>
+          </a:p>
+        </p:txBody>
+      </p:sp>
+      <p:sp>
+        <p:nvSpPr>
+          <p:cNvPr id="31" name="Shape 26"/>
+          <p:cNvSpPr/>
+          <p:nvPr/>
+        </p:nvSpPr>
+        <p:spPr>
+          <a:xfrm>
+            <a:off x="8266176" y="5650992"/>
+            <a:ext cx="1035101" cy="310896"/>
           </a:xfrm>
           <a:prstGeom prst="roundRect">
             <a:avLst>
-              <a:gd name="adj" fmla="val 5806"/>
+              <a:gd name="adj" fmla="val 50000"/>
             </a:avLst>
           </a:prstGeom>
           <a:solidFill>
-            <a:srgbClr val="FFFFFF"/>
+            <a:srgbClr val="FFF4E0"/>
           </a:solidFill>
-          <a:ln w="12700">
-            <a:solidFill>
-              <a:srgbClr val="DCE6E6"/>
-            </a:solidFill>
-            <a:prstDash val="solid"/>
-          </a:ln>
-        </p:spPr>
-      </p:sp>
-      <p:sp>
-        <p:nvSpPr>
-          <p:cNvPr id="17" name="Shape 15"/>
-          <p:cNvSpPr/>
-          <p:nvPr/>
-        </p:nvSpPr>
-        <p:spPr>
-          <a:xfrm>
-            <a:off x="804672" y="3657600"/>
-            <a:ext cx="146304" cy="146304"/>
-          </a:xfrm>
-          <a:prstGeom prst="ellipse">
-            <a:avLst/>
-          </a:prstGeom>
-          <a:solidFill>
-            <a:srgbClr val="F96167"/>
-          </a:solidFill>
-          <a:ln/>
-        </p:spPr>
-      </p:sp>
-      <p:sp>
-        <p:nvSpPr>
-          <p:cNvPr id="18" name="Text 16"/>
-          <p:cNvSpPr/>
-          <p:nvPr/>
-        </p:nvSpPr>
-        <p:spPr>
-          <a:xfrm>
-            <a:off x="1051560" y="3547872"/>
-            <a:ext cx="2926080" cy="457200"/>
-          </a:xfrm>
-          <a:prstGeom prst="rect">
-            <a:avLst/>
-          </a:prstGeom>
-          <a:noFill/>
-          <a:ln/>
-        </p:spPr>
-        <p:txBody>
-          <a:bodyPr wrap="square" lIns="0" tIns="0" rIns="0" bIns="0" rtlCol="0" anchor="ctr"/>
-          <a:lstStyle/>
-          <a:p>
-            <a:pPr indent="0" marL="0">
-              <a:buNone/>
-            </a:pPr>
-            <a:r>
-              <a:rPr lang="en-US" sz="1500" b="1" dirty="0">
-                <a:solidFill>
-                  <a:srgbClr val="1B2A33"/>
-                </a:solidFill>
-                <a:latin typeface="Cambria" pitchFamily="34" charset="0"/>
-                <a:ea typeface="Cambria" pitchFamily="34" charset="-122"/>
-                <a:cs typeface="Cambria" pitchFamily="34" charset="-120"/>
-              </a:rPr>
-              <a:t>Own-brand / regional</a:t>
-            </a:r>
-            <a:endParaRPr lang="en-US" sz="1500" dirty="0"/>
-          </a:p>
-        </p:txBody>
-      </p:sp>
-      <p:sp>
-        <p:nvSpPr>
-          <p:cNvPr id="19" name="Text 17"/>
-          <p:cNvSpPr/>
-          <p:nvPr/>
-        </p:nvSpPr>
-        <p:spPr>
-          <a:xfrm>
-            <a:off x="822960" y="4041648"/>
-            <a:ext cx="3063240" cy="640080"/>
-          </a:xfrm>
-          <a:prstGeom prst="rect">
-            <a:avLst/>
-          </a:prstGeom>
-          <a:noFill/>
-          <a:ln/>
-        </p:spPr>
-        <p:txBody>
-          <a:bodyPr wrap="square" lIns="0" tIns="0" rIns="0" bIns="0" rtlCol="0" anchor="ctr"/>
-          <a:lstStyle/>
-          <a:p>
-            <a:pPr indent="0" marL="0">
-              <a:buNone/>
-            </a:pPr>
-            <a:r>
-              <a:rPr lang="en-US" sz="1150" dirty="0">
+          <a:ln/>
+        </p:spPr>
+        <p:txBody>
+          <a:bodyPr/>
+          <a:lstStyle/>
+          <a:p>
+            <a:endParaRPr lang="en-US"/>
+          </a:p>
+        </p:txBody>
+      </p:sp>
+      <p:sp>
+        <p:nvSpPr>
+          <p:cNvPr id="32" name="Text 27"/>
+          <p:cNvSpPr/>
+          <p:nvPr/>
+        </p:nvSpPr>
+        <p:spPr>
+          <a:xfrm>
+            <a:off x="8266176" y="5650992"/>
+            <a:ext cx="1035101" cy="310896"/>
+          </a:xfrm>
+          <a:prstGeom prst="rect">
+            <a:avLst/>
+          </a:prstGeom>
+          <a:noFill/>
+          <a:ln/>
+        </p:spPr>
+        <p:txBody>
+          <a:bodyPr wrap="square" lIns="0" tIns="0" rIns="0" bIns="0" rtlCol="0" anchor="ctr"/>
+          <a:lstStyle/>
+          <a:p>
+            <a:pPr marL="0" indent="0" algn="ctr">
+              <a:buNone/>
+            </a:pPr>
+            <a:r>
+              <a:rPr lang="en-US" sz="950" b="1" dirty="0">
+                <a:solidFill>
+                  <a:srgbClr val="B9770A"/>
+                </a:solidFill>
+                <a:latin typeface="Calibri" pitchFamily="34" charset="0"/>
+                <a:ea typeface="Calibri" pitchFamily="34" charset="-122"/>
+                <a:cs typeface="Calibri" pitchFamily="34" charset="-120"/>
+              </a:rPr>
+              <a:t>needs review</a:t>
+            </a:r>
+            <a:endParaRPr lang="en-US" sz="950" dirty="0"/>
+          </a:p>
+        </p:txBody>
+      </p:sp>
+      <p:sp>
+        <p:nvSpPr>
+          <p:cNvPr id="33" name="Text 28"/>
+          <p:cNvSpPr/>
+          <p:nvPr/>
+        </p:nvSpPr>
+        <p:spPr>
+          <a:xfrm>
+            <a:off x="548640" y="6537960"/>
+            <a:ext cx="11064240" cy="274320"/>
+          </a:xfrm>
+          <a:prstGeom prst="rect">
+            <a:avLst/>
+          </a:prstGeom>
+          <a:noFill/>
+          <a:ln/>
+        </p:spPr>
+        <p:txBody>
+          <a:bodyPr wrap="square" lIns="0" tIns="0" rIns="0" bIns="0" rtlCol="0" anchor="ctr"/>
+          <a:lstStyle/>
+          <a:p>
+            <a:pPr marL="0" indent="0">
+              <a:buNone/>
+            </a:pPr>
+            <a:r>
+              <a:rPr lang="en-US" sz="1050" i="1" dirty="0">
                 <a:solidFill>
                   <a:srgbClr val="5B6B73"/>
                 </a:solidFill>
@@ -5980,304 +6605,15 @@
                 <a:ea typeface="Calibri" pitchFamily="34" charset="-122"/>
                 <a:cs typeface="Calibri" pitchFamily="34" charset="-120"/>
               </a:rPr>
-              <a:t>Thin coverage in open catalogues → weak retrieval grounding.</a:t>
-            </a:r>
-            <a:endParaRPr lang="en-US" sz="1150" dirty="0"/>
-          </a:p>
-        </p:txBody>
-      </p:sp>
-      <p:sp>
-        <p:nvSpPr>
-          <p:cNvPr id="20" name="Shape 18"/>
-          <p:cNvSpPr/>
-          <p:nvPr/>
-        </p:nvSpPr>
-        <p:spPr>
-          <a:xfrm>
-            <a:off x="4251960" y="3383280"/>
-            <a:ext cx="3566160" cy="1417320"/>
-          </a:xfrm>
-          <a:prstGeom prst="roundRect">
-            <a:avLst>
-              <a:gd name="adj" fmla="val 5806"/>
-            </a:avLst>
-          </a:prstGeom>
-          <a:solidFill>
-            <a:srgbClr val="FFFFFF"/>
-          </a:solidFill>
-          <a:ln w="12700">
-            <a:solidFill>
-              <a:srgbClr val="DCE6E6"/>
-            </a:solidFill>
-            <a:prstDash val="solid"/>
-          </a:ln>
-        </p:spPr>
-      </p:sp>
-      <p:sp>
-        <p:nvSpPr>
-          <p:cNvPr id="21" name="Shape 19"/>
-          <p:cNvSpPr/>
-          <p:nvPr/>
-        </p:nvSpPr>
-        <p:spPr>
-          <a:xfrm>
-            <a:off x="4507992" y="3657600"/>
-            <a:ext cx="146304" cy="146304"/>
-          </a:xfrm>
-          <a:prstGeom prst="ellipse">
-            <a:avLst/>
-          </a:prstGeom>
-          <a:solidFill>
-            <a:srgbClr val="F96167"/>
-          </a:solidFill>
-          <a:ln/>
-        </p:spPr>
-      </p:sp>
-      <p:sp>
-        <p:nvSpPr>
-          <p:cNvPr id="22" name="Text 20"/>
-          <p:cNvSpPr/>
-          <p:nvPr/>
-        </p:nvSpPr>
-        <p:spPr>
-          <a:xfrm>
-            <a:off x="4754880" y="3547872"/>
-            <a:ext cx="2926080" cy="457200"/>
-          </a:xfrm>
-          <a:prstGeom prst="rect">
-            <a:avLst/>
-          </a:prstGeom>
-          <a:noFill/>
-          <a:ln/>
-        </p:spPr>
-        <p:txBody>
-          <a:bodyPr wrap="square" lIns="0" tIns="0" rIns="0" bIns="0" rtlCol="0" anchor="ctr"/>
-          <a:lstStyle/>
-          <a:p>
-            <a:pPr indent="0" marL="0">
-              <a:buNone/>
-            </a:pPr>
-            <a:r>
-              <a:rPr lang="en-US" sz="1500" b="1" dirty="0">
-                <a:solidFill>
-                  <a:srgbClr val="1B2A33"/>
-                </a:solidFill>
-                <a:latin typeface="Cambria" pitchFamily="34" charset="0"/>
-                <a:ea typeface="Cambria" pitchFamily="34" charset="-122"/>
-                <a:cs typeface="Cambria" pitchFamily="34" charset="-120"/>
-              </a:rPr>
-              <a:t>Catalogue gaps</a:t>
-            </a:r>
-            <a:endParaRPr lang="en-US" sz="1500" dirty="0"/>
-          </a:p>
-        </p:txBody>
-      </p:sp>
-      <p:sp>
-        <p:nvSpPr>
-          <p:cNvPr id="23" name="Text 21"/>
-          <p:cNvSpPr/>
-          <p:nvPr/>
-        </p:nvSpPr>
-        <p:spPr>
-          <a:xfrm>
-            <a:off x="4526280" y="4041648"/>
-            <a:ext cx="3063240" cy="640080"/>
-          </a:xfrm>
-          <a:prstGeom prst="rect">
-            <a:avLst/>
-          </a:prstGeom>
-          <a:noFill/>
-          <a:ln/>
-        </p:spPr>
-        <p:txBody>
-          <a:bodyPr wrap="square" lIns="0" tIns="0" rIns="0" bIns="0" rtlCol="0" anchor="ctr"/>
-          <a:lstStyle/>
-          <a:p>
-            <a:pPr indent="0" marL="0">
-              <a:buNone/>
-            </a:pPr>
-            <a:r>
-              <a:rPr lang="en-US" sz="1150" dirty="0">
-                <a:solidFill>
-                  <a:srgbClr val="5B6B73"/>
-                </a:solidFill>
-                <a:latin typeface="Calibri" pitchFamily="34" charset="0"/>
-                <a:ea typeface="Calibri" pitchFamily="34" charset="-122"/>
-                <a:cs typeface="Calibri" pitchFamily="34" charset="-120"/>
-              </a:rPr>
-              <a:t>No comparable found → price and image fall back to lower confidence.</a:t>
-            </a:r>
-            <a:endParaRPr lang="en-US" sz="1150" dirty="0"/>
-          </a:p>
-        </p:txBody>
-      </p:sp>
-      <p:sp>
-        <p:nvSpPr>
-          <p:cNvPr id="24" name="Shape 22"/>
-          <p:cNvSpPr/>
-          <p:nvPr/>
-        </p:nvSpPr>
-        <p:spPr>
-          <a:xfrm>
-            <a:off x="7955280" y="3383280"/>
-            <a:ext cx="3566160" cy="1417320"/>
-          </a:xfrm>
-          <a:prstGeom prst="roundRect">
-            <a:avLst>
-              <a:gd name="adj" fmla="val 5806"/>
-            </a:avLst>
-          </a:prstGeom>
-          <a:solidFill>
-            <a:srgbClr val="FFFFFF"/>
-          </a:solidFill>
-          <a:ln w="12700">
-            <a:solidFill>
-              <a:srgbClr val="DCE6E6"/>
-            </a:solidFill>
-            <a:prstDash val="solid"/>
-          </a:ln>
-        </p:spPr>
-      </p:sp>
-      <p:sp>
-        <p:nvSpPr>
-          <p:cNvPr id="25" name="Shape 23"/>
-          <p:cNvSpPr/>
-          <p:nvPr/>
-        </p:nvSpPr>
-        <p:spPr>
-          <a:xfrm>
-            <a:off x="8211312" y="3657600"/>
-            <a:ext cx="146304" cy="146304"/>
-          </a:xfrm>
-          <a:prstGeom prst="ellipse">
-            <a:avLst/>
-          </a:prstGeom>
-          <a:solidFill>
-            <a:srgbClr val="F96167"/>
-          </a:solidFill>
-          <a:ln/>
-        </p:spPr>
-      </p:sp>
-      <p:sp>
-        <p:nvSpPr>
-          <p:cNvPr id="26" name="Text 24"/>
-          <p:cNvSpPr/>
-          <p:nvPr/>
-        </p:nvSpPr>
-        <p:spPr>
-          <a:xfrm>
-            <a:off x="8458200" y="3547872"/>
-            <a:ext cx="2926080" cy="457200"/>
-          </a:xfrm>
-          <a:prstGeom prst="rect">
-            <a:avLst/>
-          </a:prstGeom>
-          <a:noFill/>
-          <a:ln/>
-        </p:spPr>
-        <p:txBody>
-          <a:bodyPr wrap="square" lIns="0" tIns="0" rIns="0" bIns="0" rtlCol="0" anchor="ctr"/>
-          <a:lstStyle/>
-          <a:p>
-            <a:pPr indent="0" marL="0">
-              <a:buNone/>
-            </a:pPr>
-            <a:r>
-              <a:rPr lang="en-US" sz="1500" b="1" dirty="0">
-                <a:solidFill>
-                  <a:srgbClr val="1B2A33"/>
-                </a:solidFill>
-                <a:latin typeface="Cambria" pitchFamily="34" charset="0"/>
-                <a:ea typeface="Cambria" pitchFamily="34" charset="-122"/>
-                <a:cs typeface="Cambria" pitchFamily="34" charset="-120"/>
-              </a:rPr>
-              <a:t>Attractive-but-wrong image</a:t>
-            </a:r>
-            <a:endParaRPr lang="en-US" sz="1500" dirty="0"/>
-          </a:p>
-        </p:txBody>
-      </p:sp>
-      <p:sp>
-        <p:nvSpPr>
-          <p:cNvPr id="27" name="Text 25"/>
-          <p:cNvSpPr/>
-          <p:nvPr/>
-        </p:nvSpPr>
-        <p:spPr>
-          <a:xfrm>
-            <a:off x="8229600" y="4041648"/>
-            <a:ext cx="3063240" cy="640080"/>
-          </a:xfrm>
-          <a:prstGeom prst="rect">
-            <a:avLst/>
-          </a:prstGeom>
-          <a:noFill/>
-          <a:ln/>
-        </p:spPr>
-        <p:txBody>
-          <a:bodyPr wrap="square" lIns="0" tIns="0" rIns="0" bIns="0" rtlCol="0" anchor="ctr"/>
-          <a:lstStyle/>
-          <a:p>
-            <a:pPr indent="0" marL="0">
-              <a:buNone/>
-            </a:pPr>
-            <a:r>
-              <a:rPr lang="en-US" sz="1150" dirty="0">
-                <a:solidFill>
-                  <a:srgbClr val="5B6B73"/>
-                </a:solidFill>
-                <a:latin typeface="Calibri" pitchFamily="34" charset="0"/>
-                <a:ea typeface="Calibri" pitchFamily="34" charset="-122"/>
-                <a:cs typeface="Calibri" pitchFamily="34" charset="-120"/>
-              </a:rPr>
-              <a:t>A prettier image of the wrong SKU is worse than the shelf photo.</a:t>
-            </a:r>
-            <a:endParaRPr lang="en-US" sz="1150" dirty="0"/>
-          </a:p>
-        </p:txBody>
-      </p:sp>
-      <p:sp>
-        <p:nvSpPr>
-          <p:cNvPr id="28" name="Text 26"/>
-          <p:cNvSpPr/>
-          <p:nvPr/>
-        </p:nvSpPr>
-        <p:spPr>
-          <a:xfrm>
-            <a:off x="548640" y="5440680"/>
-            <a:ext cx="11064240" cy="640080"/>
-          </a:xfrm>
-          <a:prstGeom prst="rect">
-            <a:avLst/>
-          </a:prstGeom>
-          <a:noFill/>
-          <a:ln/>
-        </p:spPr>
-        <p:txBody>
-          <a:bodyPr wrap="square" lIns="0" tIns="0" rIns="0" bIns="0" rtlCol="0" anchor="ctr"/>
-          <a:lstStyle/>
-          <a:p>
-            <a:pPr indent="0" marL="0">
-              <a:buNone/>
-            </a:pPr>
-            <a:r>
-              <a:rPr lang="en-US" sz="1350" i="1" dirty="0">
-                <a:solidFill>
-                  <a:srgbClr val="028090"/>
-                </a:solidFill>
-                <a:latin typeface="Calibri" pitchFamily="34" charset="0"/>
-                <a:ea typeface="Calibri" pitchFamily="34" charset="-122"/>
-                <a:cs typeface="Calibri" pitchFamily="34" charset="-120"/>
-              </a:rPr>
-              <a:t>Mitigations: confidence-gated routing to human review, same-SKU verification, and honest per-mode reporting rather than a single average.</a:t>
-            </a:r>
-            <a:endParaRPr lang="en-US" sz="1350" dirty="0"/>
-          </a:p>
-        </p:txBody>
-      </p:sp>
-      <p:sp>
-        <p:nvSpPr>
-          <p:cNvPr id="29" name="Text 27"/>
+              <a:t>Every output carries its evidence — recognised identity + OCR, ranked candidates, price basis, image-match reason, and guardrail flags — logged per item and rendered in an HTML run report.</a:t>
+            </a:r>
+            <a:endParaRPr lang="en-US" sz="1050" dirty="0"/>
+          </a:p>
+        </p:txBody>
+      </p:sp>
+      <p:sp>
+        <p:nvSpPr>
+          <p:cNvPr id="34" name="Text 29"/>
           <p:cNvSpPr/>
           <p:nvPr/>
         </p:nvSpPr>
@@ -6296,7 +6632,7 @@
           <a:bodyPr wrap="square" rtlCol="0" anchor="ctr"/>
           <a:lstStyle/>
           <a:p>
-            <a:pPr algn="r" indent="0" marL="0">
+            <a:pPr marL="0" indent="0" algn="r">
               <a:buNone/>
             </a:pPr>
             <a:r>
@@ -6328,8 +6664,9 @@
     <p:bg>
       <p:bgPr>
         <a:solidFill>
-          <a:srgbClr val="0B2A3B"/>
+          <a:srgbClr val="F4F7F7"/>
         </a:solidFill>
+        <a:effectLst/>
       </p:bgPr>
     </p:bg>
     <p:spTree>
@@ -6348,29 +6685,7 @@
       </p:grpSpPr>
       <p:sp>
         <p:nvSpPr>
-          <p:cNvPr id="2" name="Shape 0"/>
-          <p:cNvSpPr/>
-          <p:nvPr/>
-        </p:nvSpPr>
-        <p:spPr>
-          <a:xfrm>
-            <a:off x="-1645920" y="-1645920"/>
-            <a:ext cx="4572000" cy="4572000"/>
-          </a:xfrm>
-          <a:prstGeom prst="ellipse">
-            <a:avLst/>
-          </a:prstGeom>
-          <a:solidFill>
-            <a:srgbClr val="028090">
-              <a:alpha val="25000"/>
-            </a:srgbClr>
-          </a:solidFill>
-          <a:ln/>
-        </p:spPr>
-      </p:sp>
-      <p:sp>
-        <p:nvSpPr>
-          <p:cNvPr id="3" name="Text 1"/>
+          <p:cNvPr id="2" name="Text 0"/>
           <p:cNvSpPr/>
           <p:nvPr/>
         </p:nvSpPr>
@@ -6389,19 +6704,19 @@
           <a:bodyPr wrap="square" lIns="0" tIns="0" rIns="0" bIns="0" rtlCol="0" anchor="ctr"/>
           <a:lstStyle/>
           <a:p>
-            <a:pPr indent="0" marL="0">
-              <a:buNone/>
-            </a:pPr>
-            <a:r>
-              <a:rPr lang="en-US" sz="1200" b="1" spc="200" kern="0" dirty="0">
-                <a:solidFill>
-                  <a:srgbClr val="02C39A"/>
-                </a:solidFill>
-                <a:latin typeface="Calibri" pitchFamily="34" charset="0"/>
-                <a:ea typeface="Calibri" pitchFamily="34" charset="-122"/>
-                <a:cs typeface="Calibri" pitchFamily="34" charset="-120"/>
-              </a:rPr>
-              <a:t>SUMMARY &amp; CONCLUSION</a:t>
+            <a:pPr marL="0" indent="0">
+              <a:buNone/>
+            </a:pPr>
+            <a:r>
+              <a:rPr lang="en-US" sz="1200" b="1" kern="0" spc="200" dirty="0">
+                <a:solidFill>
+                  <a:srgbClr val="028090"/>
+                </a:solidFill>
+                <a:latin typeface="Calibri" pitchFamily="34" charset="0"/>
+                <a:ea typeface="Calibri" pitchFamily="34" charset="-122"/>
+                <a:cs typeface="Calibri" pitchFamily="34" charset="-120"/>
+              </a:rPr>
+              <a:t>DISCUSSION</a:t>
             </a:r>
             <a:endParaRPr lang="en-US" sz="1200" dirty="0"/>
           </a:p>
@@ -6409,7 +6724,7 @@
       </p:sp>
       <p:sp>
         <p:nvSpPr>
-          <p:cNvPr id="4" name="Text 2"/>
+          <p:cNvPr id="3" name="Text 1"/>
           <p:cNvSpPr/>
           <p:nvPr/>
         </p:nvSpPr>
@@ -6428,19 +6743,19 @@
           <a:bodyPr wrap="square" lIns="0" tIns="0" rIns="0" bIns="0" rtlCol="0" anchor="ctr"/>
           <a:lstStyle/>
           <a:p>
-            <a:pPr indent="0" marL="0">
+            <a:pPr marL="0" indent="0">
               <a:buNone/>
             </a:pPr>
             <a:r>
               <a:rPr lang="en-US" sz="3200" b="1" dirty="0">
                 <a:solidFill>
-                  <a:srgbClr val="FFFFFF"/>
+                  <a:srgbClr val="1B2A33"/>
                 </a:solidFill>
                 <a:latin typeface="Cambria" pitchFamily="34" charset="0"/>
                 <a:ea typeface="Cambria" pitchFamily="34" charset="-122"/>
                 <a:cs typeface="Cambria" pitchFamily="34" charset="-120"/>
               </a:rPr>
-              <a:t>One photo → a defensible, safe listing</a:t>
+              <a:t>What actually broke — and what held</a:t>
             </a:r>
             <a:endParaRPr lang="en-US" sz="3200" dirty="0"/>
           </a:p>
@@ -6448,533 +6763,959 @@
       </p:sp>
       <p:sp>
         <p:nvSpPr>
-          <p:cNvPr id="5" name="Shape 3"/>
-          <p:cNvSpPr/>
-          <p:nvPr/>
-        </p:nvSpPr>
-        <p:spPr>
-          <a:xfrm>
-            <a:off x="548640" y="2057400"/>
-            <a:ext cx="365760" cy="365760"/>
-          </a:xfrm>
-          <a:prstGeom prst="ellipse">
-            <a:avLst/>
-          </a:prstGeom>
-          <a:solidFill>
-            <a:srgbClr val="028090"/>
-          </a:solidFill>
-          <a:ln/>
-        </p:spPr>
-      </p:sp>
-      <p:sp>
-        <p:nvSpPr>
-          <p:cNvPr id="6" name="Text 4"/>
-          <p:cNvSpPr/>
-          <p:nvPr/>
-        </p:nvSpPr>
-        <p:spPr>
-          <a:xfrm>
-            <a:off x="548640" y="2057400"/>
-            <a:ext cx="365760" cy="365760"/>
-          </a:xfrm>
-          <a:prstGeom prst="rect">
-            <a:avLst/>
-          </a:prstGeom>
-          <a:noFill/>
-          <a:ln/>
-        </p:spPr>
-        <p:txBody>
-          <a:bodyPr wrap="square" lIns="0" tIns="0" rIns="0" bIns="0" rtlCol="0" anchor="ctr"/>
-          <a:lstStyle/>
-          <a:p>
-            <a:pPr algn="ctr" indent="0" marL="0">
-              <a:buNone/>
-            </a:pPr>
-            <a:r>
-              <a:rPr lang="en-US" sz="1600" b="1" dirty="0">
-                <a:solidFill>
-                  <a:srgbClr val="FFFFFF"/>
-                </a:solidFill>
-                <a:latin typeface="Calibri" pitchFamily="34" charset="0"/>
-                <a:ea typeface="Calibri" pitchFamily="34" charset="-122"/>
-                <a:cs typeface="Calibri" pitchFamily="34" charset="-120"/>
-              </a:rPr>
-              <a:t>✓</a:t>
-            </a:r>
-            <a:endParaRPr lang="en-US" sz="1600" dirty="0"/>
-          </a:p>
-        </p:txBody>
-      </p:sp>
-      <p:sp>
-        <p:nvSpPr>
-          <p:cNvPr id="7" name="Text 5"/>
-          <p:cNvSpPr/>
-          <p:nvPr/>
-        </p:nvSpPr>
-        <p:spPr>
-          <a:xfrm>
-            <a:off x="1143000" y="2011680"/>
-            <a:ext cx="7269480" cy="914400"/>
-          </a:xfrm>
-          <a:prstGeom prst="rect">
-            <a:avLst/>
-          </a:prstGeom>
-          <a:noFill/>
-          <a:ln/>
-        </p:spPr>
-        <p:txBody>
-          <a:bodyPr wrap="square" lIns="0" tIns="0" rIns="0" bIns="0" rtlCol="0" anchor="ctr"/>
-          <a:lstStyle/>
-          <a:p>
-            <a:pPr indent="0" marL="0">
-              <a:buNone/>
-            </a:pPr>
-            <a:r>
-              <a:rPr lang="en-US" sz="1500" dirty="0">
-                <a:solidFill>
-                  <a:srgbClr val="E4F1F1"/>
-                </a:solidFill>
-                <a:latin typeface="Calibri" pitchFamily="34" charset="0"/>
-                <a:ea typeface="Calibri" pitchFamily="34" charset="-122"/>
-                <a:cs typeface="Calibri" pitchFamily="34" charset="-120"/>
-              </a:rPr>
-              <a:t>An integrated, evaluated pipeline for corner-store FMCG: recognition, comparable pricing, verified image upgrade, and grounded generation in one system.</a:t>
-            </a:r>
-            <a:endParaRPr lang="en-US" sz="1500" dirty="0"/>
-          </a:p>
-        </p:txBody>
-      </p:sp>
-      <p:sp>
-        <p:nvSpPr>
-          <p:cNvPr id="8" name="Shape 6"/>
-          <p:cNvSpPr/>
-          <p:nvPr/>
-        </p:nvSpPr>
-        <p:spPr>
-          <a:xfrm>
-            <a:off x="548640" y="3108960"/>
-            <a:ext cx="365760" cy="365760"/>
-          </a:xfrm>
-          <a:prstGeom prst="ellipse">
-            <a:avLst/>
-          </a:prstGeom>
-          <a:solidFill>
-            <a:srgbClr val="00A896"/>
-          </a:solidFill>
-          <a:ln/>
-        </p:spPr>
-      </p:sp>
-      <p:sp>
-        <p:nvSpPr>
-          <p:cNvPr id="9" name="Text 7"/>
-          <p:cNvSpPr/>
-          <p:nvPr/>
-        </p:nvSpPr>
-        <p:spPr>
-          <a:xfrm>
-            <a:off x="548640" y="3108960"/>
-            <a:ext cx="365760" cy="365760"/>
-          </a:xfrm>
-          <a:prstGeom prst="rect">
-            <a:avLst/>
-          </a:prstGeom>
-          <a:noFill/>
-          <a:ln/>
-        </p:spPr>
-        <p:txBody>
-          <a:bodyPr wrap="square" lIns="0" tIns="0" rIns="0" bIns="0" rtlCol="0" anchor="ctr"/>
-          <a:lstStyle/>
-          <a:p>
-            <a:pPr algn="ctr" indent="0" marL="0">
-              <a:buNone/>
-            </a:pPr>
-            <a:r>
-              <a:rPr lang="en-US" sz="1600" b="1" dirty="0">
-                <a:solidFill>
-                  <a:srgbClr val="FFFFFF"/>
-                </a:solidFill>
-                <a:latin typeface="Calibri" pitchFamily="34" charset="0"/>
-                <a:ea typeface="Calibri" pitchFamily="34" charset="-122"/>
-                <a:cs typeface="Calibri" pitchFamily="34" charset="-120"/>
-              </a:rPr>
-              <a:t>✓</a:t>
-            </a:r>
-            <a:endParaRPr lang="en-US" sz="1600" dirty="0"/>
-          </a:p>
-        </p:txBody>
-      </p:sp>
-      <p:sp>
-        <p:nvSpPr>
-          <p:cNvPr id="10" name="Text 8"/>
-          <p:cNvSpPr/>
-          <p:nvPr/>
-        </p:nvSpPr>
-        <p:spPr>
-          <a:xfrm>
-            <a:off x="1143000" y="3063240"/>
-            <a:ext cx="7269480" cy="914400"/>
-          </a:xfrm>
-          <a:prstGeom prst="rect">
-            <a:avLst/>
-          </a:prstGeom>
-          <a:noFill/>
-          <a:ln/>
-        </p:spPr>
-        <p:txBody>
-          <a:bodyPr wrap="square" lIns="0" tIns="0" rIns="0" bIns="0" rtlCol="0" anchor="ctr"/>
-          <a:lstStyle/>
-          <a:p>
-            <a:pPr indent="0" marL="0">
-              <a:buNone/>
-            </a:pPr>
-            <a:r>
-              <a:rPr lang="en-US" sz="1500" dirty="0">
-                <a:solidFill>
-                  <a:srgbClr val="E4F1F1"/>
-                </a:solidFill>
-                <a:latin typeface="Calibri" pitchFamily="34" charset="0"/>
-                <a:ea typeface="Calibri" pitchFamily="34" charset="-122"/>
-                <a:cs typeface="Calibri" pitchFamily="34" charset="-120"/>
-              </a:rPr>
-              <a:t>Same-SKU image verification and selling-context responsible-AI are first-class, measurable outcomes.</a:t>
-            </a:r>
-            <a:endParaRPr lang="en-US" sz="1500" dirty="0"/>
-          </a:p>
-        </p:txBody>
-      </p:sp>
-      <p:sp>
-        <p:nvSpPr>
-          <p:cNvPr id="11" name="Shape 9"/>
-          <p:cNvSpPr/>
-          <p:nvPr/>
-        </p:nvSpPr>
-        <p:spPr>
-          <a:xfrm>
-            <a:off x="548640" y="4160520"/>
-            <a:ext cx="365760" cy="365760"/>
-          </a:xfrm>
-          <a:prstGeom prst="ellipse">
-            <a:avLst/>
-          </a:prstGeom>
-          <a:solidFill>
-            <a:srgbClr val="02C39A"/>
-          </a:solidFill>
-          <a:ln/>
-        </p:spPr>
-      </p:sp>
-      <p:sp>
-        <p:nvSpPr>
-          <p:cNvPr id="12" name="Text 10"/>
-          <p:cNvSpPr/>
-          <p:nvPr/>
-        </p:nvSpPr>
-        <p:spPr>
-          <a:xfrm>
-            <a:off x="548640" y="4160520"/>
-            <a:ext cx="365760" cy="365760"/>
-          </a:xfrm>
-          <a:prstGeom prst="rect">
-            <a:avLst/>
-          </a:prstGeom>
-          <a:noFill/>
-          <a:ln/>
-        </p:spPr>
-        <p:txBody>
-          <a:bodyPr wrap="square" lIns="0" tIns="0" rIns="0" bIns="0" rtlCol="0" anchor="ctr"/>
-          <a:lstStyle/>
-          <a:p>
-            <a:pPr algn="ctr" indent="0" marL="0">
-              <a:buNone/>
-            </a:pPr>
-            <a:r>
-              <a:rPr lang="en-US" sz="1600" b="1" dirty="0">
-                <a:solidFill>
-                  <a:srgbClr val="FFFFFF"/>
-                </a:solidFill>
-                <a:latin typeface="Calibri" pitchFamily="34" charset="0"/>
-                <a:ea typeface="Calibri" pitchFamily="34" charset="-122"/>
-                <a:cs typeface="Calibri" pitchFamily="34" charset="-120"/>
-              </a:rPr>
-              <a:t>✓</a:t>
-            </a:r>
-            <a:endParaRPr lang="en-US" sz="1600" dirty="0"/>
-          </a:p>
-        </p:txBody>
-      </p:sp>
-      <p:sp>
-        <p:nvSpPr>
-          <p:cNvPr id="13" name="Text 11"/>
-          <p:cNvSpPr/>
-          <p:nvPr/>
-        </p:nvSpPr>
-        <p:spPr>
-          <a:xfrm>
-            <a:off x="1143000" y="4114800"/>
-            <a:ext cx="7269480" cy="914400"/>
-          </a:xfrm>
-          <a:prstGeom prst="rect">
-            <a:avLst/>
-          </a:prstGeom>
-          <a:noFill/>
-          <a:ln/>
-        </p:spPr>
-        <p:txBody>
-          <a:bodyPr wrap="square" lIns="0" tIns="0" rIns="0" bIns="0" rtlCol="0" anchor="ctr"/>
-          <a:lstStyle/>
-          <a:p>
-            <a:pPr indent="0" marL="0">
-              <a:buNone/>
-            </a:pPr>
-            <a:r>
-              <a:rPr lang="en-US" sz="1500" dirty="0">
-                <a:solidFill>
-                  <a:srgbClr val="E4F1F1"/>
-                </a:solidFill>
-                <a:latin typeface="Calibri" pitchFamily="34" charset="0"/>
-                <a:ea typeface="Calibri" pitchFamily="34" charset="-122"/>
-                <a:cs typeface="Calibri" pitchFamily="34" charset="-120"/>
-              </a:rPr>
-              <a:t>Reproducible, honestly evaluated: per-axis metrics, a naive baseline, and explicit failure analysis.</a:t>
-            </a:r>
-            <a:endParaRPr lang="en-US" sz="1500" dirty="0"/>
-          </a:p>
-        </p:txBody>
-      </p:sp>
-      <p:sp>
-        <p:nvSpPr>
-          <p:cNvPr id="14" name="Shape 12"/>
-          <p:cNvSpPr/>
-          <p:nvPr/>
-        </p:nvSpPr>
-        <p:spPr>
-          <a:xfrm>
-            <a:off x="8686800" y="2011680"/>
-            <a:ext cx="2971800" cy="3063240"/>
+          <p:cNvPr id="4" name="Shape 2"/>
+          <p:cNvSpPr/>
+          <p:nvPr/>
+        </p:nvSpPr>
+        <p:spPr>
+          <a:xfrm>
+            <a:off x="548640" y="1783080"/>
+            <a:ext cx="3566160" cy="1417320"/>
           </a:xfrm>
           <a:prstGeom prst="roundRect">
             <a:avLst>
-              <a:gd name="adj" fmla="val 3077"/>
+              <a:gd name="adj" fmla="val 5806"/>
             </a:avLst>
           </a:prstGeom>
           <a:solidFill>
-            <a:srgbClr val="11384B"/>
+            <a:srgbClr val="FFFFFF"/>
           </a:solidFill>
           <a:ln w="12700">
             <a:solidFill>
-              <a:srgbClr val="028090"/>
+              <a:srgbClr val="DCE6E6"/>
             </a:solidFill>
             <a:prstDash val="solid"/>
           </a:ln>
         </p:spPr>
-      </p:sp>
-      <p:sp>
-        <p:nvSpPr>
-          <p:cNvPr id="15" name="Text 13"/>
-          <p:cNvSpPr/>
-          <p:nvPr/>
-        </p:nvSpPr>
-        <p:spPr>
-          <a:xfrm>
-            <a:off x="8915400" y="2194560"/>
-            <a:ext cx="2560320" cy="320040"/>
-          </a:xfrm>
-          <a:prstGeom prst="rect">
-            <a:avLst/>
-          </a:prstGeom>
-          <a:noFill/>
-          <a:ln/>
-        </p:spPr>
-        <p:txBody>
-          <a:bodyPr wrap="square" lIns="0" tIns="0" rIns="0" bIns="0" rtlCol="0" anchor="ctr"/>
-          <a:lstStyle/>
-          <a:p>
-            <a:pPr indent="0" marL="0">
-              <a:buNone/>
-            </a:pPr>
-            <a:r>
-              <a:rPr lang="en-US" sz="1200" b="1" spc="200" kern="0" dirty="0">
-                <a:solidFill>
-                  <a:srgbClr val="02C39A"/>
-                </a:solidFill>
-                <a:latin typeface="Calibri" pitchFamily="34" charset="0"/>
-                <a:ea typeface="Calibri" pitchFamily="34" charset="-122"/>
-                <a:cs typeface="Calibri" pitchFamily="34" charset="-120"/>
-              </a:rPr>
-              <a:t>FUTURE WORK</a:t>
-            </a:r>
-            <a:endParaRPr lang="en-US" sz="1200" dirty="0"/>
-          </a:p>
-        </p:txBody>
-      </p:sp>
-      <p:sp>
-        <p:nvSpPr>
-          <p:cNvPr id="16" name="Text 14"/>
-          <p:cNvSpPr/>
-          <p:nvPr/>
-        </p:nvSpPr>
-        <p:spPr>
-          <a:xfrm>
-            <a:off x="8915400" y="2606040"/>
-            <a:ext cx="2606040" cy="2286000"/>
-          </a:xfrm>
-          <a:prstGeom prst="rect">
-            <a:avLst/>
-          </a:prstGeom>
-          <a:noFill/>
-          <a:ln/>
-        </p:spPr>
-        <p:txBody>
-          <a:bodyPr wrap="square" lIns="0" tIns="0" rIns="0" bIns="0" rtlCol="0" anchor="ctr"/>
-          <a:lstStyle/>
-          <a:p>
-            <a:pPr marL="342900" indent="-342900">
-              <a:spcAft>
-                <a:spcPts val="900"/>
-              </a:spcAft>
-              <a:buSzPct val="100000"/>
-              <a:buChar char="•"/>
-            </a:pPr>
-            <a:r>
-              <a:rPr lang="en-US" sz="1250" dirty="0">
-                <a:solidFill>
-                  <a:srgbClr val="D8ECEC"/>
-                </a:solidFill>
-                <a:latin typeface="Calibri" pitchFamily="34" charset="0"/>
-                <a:ea typeface="Calibri" pitchFamily="34" charset="-122"/>
-                <a:cs typeface="Calibri" pitchFamily="34" charset="-120"/>
-              </a:rPr>
-              <a:t>Wider open-catalogue coverage</a:t>
-            </a:r>
-            <a:endParaRPr lang="en-US" sz="1250" dirty="0"/>
-          </a:p>
-          <a:p>
-            <a:pPr marL="342900" indent="-342900">
-              <a:spcAft>
-                <a:spcPts val="900"/>
-              </a:spcAft>
-              <a:buSzPct val="100000"/>
-              <a:buChar char="•"/>
-            </a:pPr>
-            <a:r>
-              <a:rPr lang="en-US" sz="1250" dirty="0">
-                <a:solidFill>
-                  <a:srgbClr val="D8ECEC"/>
-                </a:solidFill>
-                <a:latin typeface="Calibri" pitchFamily="34" charset="0"/>
-                <a:ea typeface="Calibri" pitchFamily="34" charset="-122"/>
-                <a:cs typeface="Calibri" pitchFamily="34" charset="-120"/>
-              </a:rPr>
-              <a:t>Larger labelled test set</a:t>
-            </a:r>
-            <a:endParaRPr lang="en-US" sz="1250" dirty="0"/>
-          </a:p>
-          <a:p>
-            <a:pPr marL="342900" indent="-342900">
-              <a:spcAft>
-                <a:spcPts val="900"/>
-              </a:spcAft>
-              <a:buSzPct val="100000"/>
-              <a:buChar char="•"/>
-            </a:pPr>
-            <a:r>
-              <a:rPr lang="en-US" sz="1250" dirty="0">
-                <a:solidFill>
-                  <a:srgbClr val="D8ECEC"/>
-                </a:solidFill>
-                <a:latin typeface="Calibri" pitchFamily="34" charset="0"/>
-                <a:ea typeface="Calibri" pitchFamily="34" charset="-122"/>
-                <a:cs typeface="Calibri" pitchFamily="34" charset="-120"/>
-              </a:rPr>
-              <a:t>Learned price adjustment</a:t>
-            </a:r>
-            <a:endParaRPr lang="en-US" sz="1250" dirty="0"/>
-          </a:p>
-          <a:p>
-            <a:pPr marL="342900" indent="-342900">
-              <a:spcAft>
-                <a:spcPts val="900"/>
-              </a:spcAft>
-              <a:buSzPct val="100000"/>
-              <a:buChar char="•"/>
-            </a:pPr>
-            <a:r>
-              <a:rPr lang="en-US" sz="1250" dirty="0">
-                <a:solidFill>
-                  <a:srgbClr val="D8ECEC"/>
-                </a:solidFill>
-                <a:latin typeface="Calibri" pitchFamily="34" charset="0"/>
-                <a:ea typeface="Calibri" pitchFamily="34" charset="-122"/>
-                <a:cs typeface="Calibri" pitchFamily="34" charset="-120"/>
-              </a:rPr>
-              <a:t>Multi-item shelf detection</a:t>
-            </a:r>
-            <a:endParaRPr lang="en-US" sz="1250" dirty="0"/>
-          </a:p>
-          <a:p>
-            <a:pPr marL="342900" indent="-342900">
-              <a:spcAft>
-                <a:spcPts val="900"/>
-              </a:spcAft>
-              <a:buSzPct val="100000"/>
-              <a:buChar char="•"/>
-            </a:pPr>
-            <a:r>
-              <a:rPr lang="en-US" sz="1250" dirty="0">
-                <a:solidFill>
-                  <a:srgbClr val="D8ECEC"/>
-                </a:solidFill>
-                <a:latin typeface="Calibri" pitchFamily="34" charset="0"/>
-                <a:ea typeface="Calibri" pitchFamily="34" charset="-122"/>
-                <a:cs typeface="Calibri" pitchFamily="34" charset="-120"/>
-              </a:rPr>
-              <a:t>Live marketplace publishing</a:t>
-            </a:r>
-            <a:endParaRPr lang="en-US" sz="1250" dirty="0"/>
-          </a:p>
-        </p:txBody>
-      </p:sp>
-      <p:sp>
-        <p:nvSpPr>
-          <p:cNvPr id="17" name="Text 15"/>
-          <p:cNvSpPr/>
-          <p:nvPr/>
-        </p:nvSpPr>
-        <p:spPr>
-          <a:xfrm>
-            <a:off x="548640" y="5852160"/>
-            <a:ext cx="10515600" cy="548640"/>
-          </a:xfrm>
-          <a:prstGeom prst="rect">
-            <a:avLst/>
-          </a:prstGeom>
-          <a:noFill/>
-          <a:ln/>
-        </p:spPr>
-        <p:txBody>
-          <a:bodyPr wrap="square" lIns="0" tIns="0" rIns="0" bIns="0" rtlCol="0" anchor="ctr"/>
-          <a:lstStyle/>
-          <a:p>
-            <a:pPr indent="0" marL="0">
-              <a:buNone/>
-            </a:pPr>
-            <a:r>
-              <a:rPr lang="en-US" sz="1600" i="1" dirty="0">
-                <a:solidFill>
-                  <a:srgbClr val="00A896"/>
+        <p:txBody>
+          <a:bodyPr/>
+          <a:lstStyle/>
+          <a:p>
+            <a:endParaRPr lang="en-US"/>
+          </a:p>
+        </p:txBody>
+      </p:sp>
+      <p:sp>
+        <p:nvSpPr>
+          <p:cNvPr id="5" name="Shape 3"/>
+          <p:cNvSpPr/>
+          <p:nvPr/>
+        </p:nvSpPr>
+        <p:spPr>
+          <a:xfrm>
+            <a:off x="804672" y="2057400"/>
+            <a:ext cx="146304" cy="146304"/>
+          </a:xfrm>
+          <a:prstGeom prst="ellipse">
+            <a:avLst/>
+          </a:prstGeom>
+          <a:solidFill>
+            <a:srgbClr val="F96167"/>
+          </a:solidFill>
+          <a:ln/>
+        </p:spPr>
+        <p:txBody>
+          <a:bodyPr/>
+          <a:lstStyle/>
+          <a:p>
+            <a:endParaRPr lang="en-US"/>
+          </a:p>
+        </p:txBody>
+      </p:sp>
+      <p:sp>
+        <p:nvSpPr>
+          <p:cNvPr id="6" name="Text 4"/>
+          <p:cNvSpPr/>
+          <p:nvPr/>
+        </p:nvSpPr>
+        <p:spPr>
+          <a:xfrm>
+            <a:off x="1051560" y="1947672"/>
+            <a:ext cx="2926080" cy="457200"/>
+          </a:xfrm>
+          <a:prstGeom prst="rect">
+            <a:avLst/>
+          </a:prstGeom>
+          <a:noFill/>
+          <a:ln/>
+        </p:spPr>
+        <p:txBody>
+          <a:bodyPr wrap="square" lIns="0" tIns="0" rIns="0" bIns="0" rtlCol="0" anchor="ctr"/>
+          <a:lstStyle/>
+          <a:p>
+            <a:pPr marL="0" indent="0">
+              <a:buNone/>
+            </a:pPr>
+            <a:r>
+              <a:rPr lang="en-US" sz="1500" b="1" dirty="0">
+                <a:solidFill>
+                  <a:srgbClr val="1B2A33"/>
                 </a:solidFill>
                 <a:latin typeface="Cambria" pitchFamily="34" charset="0"/>
                 <a:ea typeface="Cambria" pitchFamily="34" charset="-122"/>
                 <a:cs typeface="Cambria" pitchFamily="34" charset="-120"/>
               </a:rPr>
-              <a:t>Snap-to-Sell — lowering the e-commerce barrier for the retailers automation leaves behind.</a:t>
-            </a:r>
-            <a:endParaRPr lang="en-US" sz="1600" dirty="0"/>
+              <a:t>Multipack / case pricing</a:t>
+            </a:r>
+            <a:endParaRPr lang="en-US" sz="1500" dirty="0"/>
+          </a:p>
+        </p:txBody>
+      </p:sp>
+      <p:sp>
+        <p:nvSpPr>
+          <p:cNvPr id="7" name="Text 5"/>
+          <p:cNvSpPr/>
+          <p:nvPr/>
+        </p:nvSpPr>
+        <p:spPr>
+          <a:xfrm>
+            <a:off x="822960" y="2441448"/>
+            <a:ext cx="3063240" cy="640080"/>
+          </a:xfrm>
+          <a:prstGeom prst="rect">
+            <a:avLst/>
+          </a:prstGeom>
+          <a:noFill/>
+          <a:ln/>
+        </p:spPr>
+        <p:txBody>
+          <a:bodyPr wrap="square" lIns="0" tIns="0" rIns="0" bIns="0" rtlCol="0" anchor="ctr"/>
+          <a:lstStyle/>
+          <a:p>
+            <a:pPr marL="0" indent="0">
+              <a:buNone/>
+            </a:pPr>
+            <a:r>
+              <a:rPr lang="en-US" sz="1150" dirty="0">
+                <a:solidFill>
+                  <a:srgbClr val="5B6B73"/>
+                </a:solidFill>
+                <a:latin typeface="Calibri" pitchFamily="34" charset="0"/>
+                <a:ea typeface="Calibri" pitchFamily="34" charset="-122"/>
+                <a:cs typeface="Calibri" pitchFamily="34" charset="-120"/>
+              </a:rPr>
+              <a:t>Shopping returned 24-packs and cases for single units — the main price-error driver. Per-unit normalization helps; wrong comparables persist.</a:t>
+            </a:r>
+            <a:endParaRPr lang="en-US" sz="1150" dirty="0"/>
+          </a:p>
+        </p:txBody>
+      </p:sp>
+      <p:sp>
+        <p:nvSpPr>
+          <p:cNvPr id="8" name="Shape 6"/>
+          <p:cNvSpPr/>
+          <p:nvPr/>
+        </p:nvSpPr>
+        <p:spPr>
+          <a:xfrm>
+            <a:off x="4251960" y="1783080"/>
+            <a:ext cx="3566160" cy="1417320"/>
+          </a:xfrm>
+          <a:prstGeom prst="roundRect">
+            <a:avLst>
+              <a:gd name="adj" fmla="val 5806"/>
+            </a:avLst>
+          </a:prstGeom>
+          <a:solidFill>
+            <a:srgbClr val="FFFFFF"/>
+          </a:solidFill>
+          <a:ln w="12700">
+            <a:solidFill>
+              <a:srgbClr val="DCE6E6"/>
+            </a:solidFill>
+            <a:prstDash val="solid"/>
+          </a:ln>
+        </p:spPr>
+        <p:txBody>
+          <a:bodyPr/>
+          <a:lstStyle/>
+          <a:p>
+            <a:endParaRPr lang="en-US"/>
+          </a:p>
+        </p:txBody>
+      </p:sp>
+      <p:sp>
+        <p:nvSpPr>
+          <p:cNvPr id="9" name="Shape 7"/>
+          <p:cNvSpPr/>
+          <p:nvPr/>
+        </p:nvSpPr>
+        <p:spPr>
+          <a:xfrm>
+            <a:off x="4507992" y="2057400"/>
+            <a:ext cx="146304" cy="146304"/>
+          </a:xfrm>
+          <a:prstGeom prst="ellipse">
+            <a:avLst/>
+          </a:prstGeom>
+          <a:solidFill>
+            <a:srgbClr val="F96167"/>
+          </a:solidFill>
+          <a:ln/>
+        </p:spPr>
+        <p:txBody>
+          <a:bodyPr/>
+          <a:lstStyle/>
+          <a:p>
+            <a:endParaRPr lang="en-US"/>
+          </a:p>
+        </p:txBody>
+      </p:sp>
+      <p:sp>
+        <p:nvSpPr>
+          <p:cNvPr id="10" name="Text 8"/>
+          <p:cNvSpPr/>
+          <p:nvPr/>
+        </p:nvSpPr>
+        <p:spPr>
+          <a:xfrm>
+            <a:off x="4754880" y="1947672"/>
+            <a:ext cx="2926080" cy="457200"/>
+          </a:xfrm>
+          <a:prstGeom prst="rect">
+            <a:avLst/>
+          </a:prstGeom>
+          <a:noFill/>
+          <a:ln/>
+        </p:spPr>
+        <p:txBody>
+          <a:bodyPr wrap="square" lIns="0" tIns="0" rIns="0" bIns="0" rtlCol="0" anchor="ctr"/>
+          <a:lstStyle/>
+          <a:p>
+            <a:pPr marL="0" indent="0">
+              <a:buNone/>
+            </a:pPr>
+            <a:r>
+              <a:rPr lang="en-US" sz="1500" b="1" dirty="0">
+                <a:solidFill>
+                  <a:srgbClr val="1B2A33"/>
+                </a:solidFill>
+                <a:latin typeface="Cambria" pitchFamily="34" charset="0"/>
+                <a:ea typeface="Cambria" pitchFamily="34" charset="-122"/>
+                <a:cs typeface="Cambria" pitchFamily="34" charset="-120"/>
+              </a:rPr>
+              <a:t>Look-alike comparables</a:t>
+            </a:r>
+            <a:endParaRPr lang="en-US" sz="1500" dirty="0"/>
+          </a:p>
+        </p:txBody>
+      </p:sp>
+      <p:sp>
+        <p:nvSpPr>
+          <p:cNvPr id="11" name="Text 9"/>
+          <p:cNvSpPr/>
+          <p:nvPr/>
+        </p:nvSpPr>
+        <p:spPr>
+          <a:xfrm>
+            <a:off x="4526280" y="2441448"/>
+            <a:ext cx="3063240" cy="640080"/>
+          </a:xfrm>
+          <a:prstGeom prst="rect">
+            <a:avLst/>
+          </a:prstGeom>
+          <a:noFill/>
+          <a:ln/>
+        </p:spPr>
+        <p:txBody>
+          <a:bodyPr wrap="square" lIns="0" tIns="0" rIns="0" bIns="0" rtlCol="0" anchor="ctr"/>
+          <a:lstStyle/>
+          <a:p>
+            <a:pPr marL="0" indent="0">
+              <a:buNone/>
+            </a:pPr>
+            <a:r>
+              <a:rPr lang="en-US" sz="1150" dirty="0">
+                <a:solidFill>
+                  <a:srgbClr val="5B6B73"/>
+                </a:solidFill>
+                <a:latin typeface="Calibri" pitchFamily="34" charset="0"/>
+                <a:ea typeface="Calibri" pitchFamily="34" charset="-122"/>
+                <a:cs typeface="Calibri" pitchFamily="34" charset="-120"/>
+              </a:rPr>
+              <a:t>Visually similar wrong products (a kayak for an unbranded cracker) anchored bad prices; the outlier + brand gate reject the worst.</a:t>
+            </a:r>
+            <a:endParaRPr lang="en-US" sz="1150" dirty="0"/>
+          </a:p>
+        </p:txBody>
+      </p:sp>
+      <p:sp>
+        <p:nvSpPr>
+          <p:cNvPr id="12" name="Shape 10"/>
+          <p:cNvSpPr/>
+          <p:nvPr/>
+        </p:nvSpPr>
+        <p:spPr>
+          <a:xfrm>
+            <a:off x="7955280" y="1783080"/>
+            <a:ext cx="3566160" cy="1417320"/>
+          </a:xfrm>
+          <a:prstGeom prst="roundRect">
+            <a:avLst>
+              <a:gd name="adj" fmla="val 5806"/>
+            </a:avLst>
+          </a:prstGeom>
+          <a:solidFill>
+            <a:srgbClr val="FFFFFF"/>
+          </a:solidFill>
+          <a:ln w="12700">
+            <a:solidFill>
+              <a:srgbClr val="DCE6E6"/>
+            </a:solidFill>
+            <a:prstDash val="solid"/>
+          </a:ln>
+        </p:spPr>
+        <p:txBody>
+          <a:bodyPr/>
+          <a:lstStyle/>
+          <a:p>
+            <a:endParaRPr lang="en-US"/>
+          </a:p>
+        </p:txBody>
+      </p:sp>
+      <p:sp>
+        <p:nvSpPr>
+          <p:cNvPr id="13" name="Shape 11"/>
+          <p:cNvSpPr/>
+          <p:nvPr/>
+        </p:nvSpPr>
+        <p:spPr>
+          <a:xfrm>
+            <a:off x="8211312" y="2057400"/>
+            <a:ext cx="146304" cy="146304"/>
+          </a:xfrm>
+          <a:prstGeom prst="ellipse">
+            <a:avLst/>
+          </a:prstGeom>
+          <a:solidFill>
+            <a:srgbClr val="F96167"/>
+          </a:solidFill>
+          <a:ln/>
+        </p:spPr>
+        <p:txBody>
+          <a:bodyPr/>
+          <a:lstStyle/>
+          <a:p>
+            <a:endParaRPr lang="en-US"/>
+          </a:p>
+        </p:txBody>
+      </p:sp>
+      <p:sp>
+        <p:nvSpPr>
+          <p:cNvPr id="14" name="Text 12"/>
+          <p:cNvSpPr/>
+          <p:nvPr/>
+        </p:nvSpPr>
+        <p:spPr>
+          <a:xfrm>
+            <a:off x="8458200" y="1947672"/>
+            <a:ext cx="2926080" cy="457200"/>
+          </a:xfrm>
+          <a:prstGeom prst="rect">
+            <a:avLst/>
+          </a:prstGeom>
+          <a:noFill/>
+          <a:ln/>
+        </p:spPr>
+        <p:txBody>
+          <a:bodyPr wrap="square" lIns="0" tIns="0" rIns="0" bIns="0" rtlCol="0" anchor="ctr"/>
+          <a:lstStyle/>
+          <a:p>
+            <a:pPr marL="0" indent="0">
+              <a:buNone/>
+            </a:pPr>
+            <a:r>
+              <a:rPr lang="en-US" sz="1500" b="1" dirty="0">
+                <a:solidFill>
+                  <a:srgbClr val="1B2A33"/>
+                </a:solidFill>
+                <a:latin typeface="Cambria" pitchFamily="34" charset="0"/>
+                <a:ea typeface="Cambria" pitchFamily="34" charset="-122"/>
+                <a:cs typeface="Cambria" pitchFamily="34" charset="-120"/>
+              </a:rPr>
+              <a:t>Unbranded / regional items</a:t>
+            </a:r>
+            <a:endParaRPr lang="en-US" sz="1500" dirty="0"/>
+          </a:p>
+        </p:txBody>
+      </p:sp>
+      <p:sp>
+        <p:nvSpPr>
+          <p:cNvPr id="15" name="Text 13"/>
+          <p:cNvSpPr/>
+          <p:nvPr/>
+        </p:nvSpPr>
+        <p:spPr>
+          <a:xfrm>
+            <a:off x="8229600" y="2441448"/>
+            <a:ext cx="3063240" cy="640080"/>
+          </a:xfrm>
+          <a:prstGeom prst="rect">
+            <a:avLst/>
+          </a:prstGeom>
+          <a:noFill/>
+          <a:ln/>
+        </p:spPr>
+        <p:txBody>
+          <a:bodyPr wrap="square" lIns="0" tIns="0" rIns="0" bIns="0" rtlCol="0" anchor="ctr"/>
+          <a:lstStyle/>
+          <a:p>
+            <a:pPr marL="0" indent="0">
+              <a:buNone/>
+            </a:pPr>
+            <a:r>
+              <a:rPr lang="en-US" sz="1150" dirty="0">
+                <a:solidFill>
+                  <a:srgbClr val="5B6B73"/>
+                </a:solidFill>
+                <a:latin typeface="Calibri" pitchFamily="34" charset="0"/>
+                <a:ea typeface="Calibri" pitchFamily="34" charset="-122"/>
+                <a:cs typeface="Calibri" pitchFamily="34" charset="-120"/>
+              </a:rPr>
+              <a:t>No confident brand match → declined to price and routed to review (8 of 58 items).</a:t>
+            </a:r>
+            <a:endParaRPr lang="en-US" sz="1150" dirty="0"/>
+          </a:p>
+        </p:txBody>
+      </p:sp>
+      <p:sp>
+        <p:nvSpPr>
+          <p:cNvPr id="16" name="Shape 14"/>
+          <p:cNvSpPr/>
+          <p:nvPr/>
+        </p:nvSpPr>
+        <p:spPr>
+          <a:xfrm>
+            <a:off x="548640" y="3383280"/>
+            <a:ext cx="3566160" cy="1417320"/>
+          </a:xfrm>
+          <a:prstGeom prst="roundRect">
+            <a:avLst>
+              <a:gd name="adj" fmla="val 5806"/>
+            </a:avLst>
+          </a:prstGeom>
+          <a:solidFill>
+            <a:srgbClr val="FFFFFF"/>
+          </a:solidFill>
+          <a:ln w="12700">
+            <a:solidFill>
+              <a:srgbClr val="DCE6E6"/>
+            </a:solidFill>
+            <a:prstDash val="solid"/>
+          </a:ln>
+        </p:spPr>
+        <p:txBody>
+          <a:bodyPr/>
+          <a:lstStyle/>
+          <a:p>
+            <a:endParaRPr lang="en-US"/>
+          </a:p>
+        </p:txBody>
+      </p:sp>
+      <p:sp>
+        <p:nvSpPr>
+          <p:cNvPr id="17" name="Shape 15"/>
+          <p:cNvSpPr/>
+          <p:nvPr/>
+        </p:nvSpPr>
+        <p:spPr>
+          <a:xfrm>
+            <a:off x="804672" y="3657600"/>
+            <a:ext cx="146304" cy="146304"/>
+          </a:xfrm>
+          <a:prstGeom prst="ellipse">
+            <a:avLst/>
+          </a:prstGeom>
+          <a:solidFill>
+            <a:srgbClr val="F96167"/>
+          </a:solidFill>
+          <a:ln/>
+        </p:spPr>
+        <p:txBody>
+          <a:bodyPr/>
+          <a:lstStyle/>
+          <a:p>
+            <a:endParaRPr lang="en-US"/>
           </a:p>
         </p:txBody>
       </p:sp>
       <p:sp>
         <p:nvSpPr>
           <p:cNvPr id="18" name="Text 16"/>
+          <p:cNvSpPr/>
+          <p:nvPr/>
+        </p:nvSpPr>
+        <p:spPr>
+          <a:xfrm>
+            <a:off x="1051560" y="3547872"/>
+            <a:ext cx="2926080" cy="457200"/>
+          </a:xfrm>
+          <a:prstGeom prst="rect">
+            <a:avLst/>
+          </a:prstGeom>
+          <a:noFill/>
+          <a:ln/>
+        </p:spPr>
+        <p:txBody>
+          <a:bodyPr wrap="square" lIns="0" tIns="0" rIns="0" bIns="0" rtlCol="0" anchor="ctr"/>
+          <a:lstStyle/>
+          <a:p>
+            <a:pPr marL="0" indent="0">
+              <a:buNone/>
+            </a:pPr>
+            <a:r>
+              <a:rPr lang="en-US" sz="1500" b="1" dirty="0">
+                <a:solidFill>
+                  <a:srgbClr val="1B2A33"/>
+                </a:solidFill>
+                <a:latin typeface="Cambria" pitchFamily="34" charset="0"/>
+                <a:ea typeface="Cambria" pitchFamily="34" charset="-122"/>
+                <a:cs typeface="Cambria" pitchFamily="34" charset="-120"/>
+              </a:rPr>
+              <a:t>Age-restricted retrieval</a:t>
+            </a:r>
+            <a:endParaRPr lang="en-US" sz="1500" dirty="0"/>
+          </a:p>
+        </p:txBody>
+      </p:sp>
+      <p:sp>
+        <p:nvSpPr>
+          <p:cNvPr id="19" name="Text 17"/>
+          <p:cNvSpPr/>
+          <p:nvPr/>
+        </p:nvSpPr>
+        <p:spPr>
+          <a:xfrm>
+            <a:off x="822960" y="4041648"/>
+            <a:ext cx="3063240" cy="640080"/>
+          </a:xfrm>
+          <a:prstGeom prst="rect">
+            <a:avLst/>
+          </a:prstGeom>
+          <a:noFill/>
+          <a:ln/>
+        </p:spPr>
+        <p:txBody>
+          <a:bodyPr wrap="square" lIns="0" tIns="0" rIns="0" bIns="0" rtlCol="0" anchor="ctr"/>
+          <a:lstStyle/>
+          <a:p>
+            <a:pPr marL="0" indent="0">
+              <a:buNone/>
+            </a:pPr>
+            <a:r>
+              <a:rPr lang="en-US" sz="1150" dirty="0">
+                <a:solidFill>
+                  <a:srgbClr val="5B6B73"/>
+                </a:solidFill>
+                <a:latin typeface="Calibri" pitchFamily="34" charset="0"/>
+                <a:ea typeface="Calibri" pitchFamily="34" charset="-122"/>
+                <a:cs typeface="Calibri" pitchFamily="34" charset="-120"/>
+              </a:rPr>
+              <a:t>Cigarettes / alcohol aren't on shopping search → junk hits — but the guardrail still flagged 100% of them.</a:t>
+            </a:r>
+            <a:endParaRPr lang="en-US" sz="1150" dirty="0"/>
+          </a:p>
+        </p:txBody>
+      </p:sp>
+      <p:sp>
+        <p:nvSpPr>
+          <p:cNvPr id="20" name="Shape 18"/>
+          <p:cNvSpPr/>
+          <p:nvPr/>
+        </p:nvSpPr>
+        <p:spPr>
+          <a:xfrm>
+            <a:off x="4251960" y="3383280"/>
+            <a:ext cx="3566160" cy="1417320"/>
+          </a:xfrm>
+          <a:prstGeom prst="roundRect">
+            <a:avLst>
+              <a:gd name="adj" fmla="val 5806"/>
+            </a:avLst>
+          </a:prstGeom>
+          <a:solidFill>
+            <a:srgbClr val="FFFFFF"/>
+          </a:solidFill>
+          <a:ln w="12700">
+            <a:solidFill>
+              <a:srgbClr val="DCE6E6"/>
+            </a:solidFill>
+            <a:prstDash val="solid"/>
+          </a:ln>
+        </p:spPr>
+        <p:txBody>
+          <a:bodyPr/>
+          <a:lstStyle/>
+          <a:p>
+            <a:endParaRPr lang="en-US"/>
+          </a:p>
+        </p:txBody>
+      </p:sp>
+      <p:sp>
+        <p:nvSpPr>
+          <p:cNvPr id="21" name="Shape 19"/>
+          <p:cNvSpPr/>
+          <p:nvPr/>
+        </p:nvSpPr>
+        <p:spPr>
+          <a:xfrm>
+            <a:off x="4507992" y="3657600"/>
+            <a:ext cx="146304" cy="146304"/>
+          </a:xfrm>
+          <a:prstGeom prst="ellipse">
+            <a:avLst/>
+          </a:prstGeom>
+          <a:solidFill>
+            <a:srgbClr val="F96167"/>
+          </a:solidFill>
+          <a:ln/>
+        </p:spPr>
+        <p:txBody>
+          <a:bodyPr/>
+          <a:lstStyle/>
+          <a:p>
+            <a:endParaRPr lang="en-US"/>
+          </a:p>
+        </p:txBody>
+      </p:sp>
+      <p:sp>
+        <p:nvSpPr>
+          <p:cNvPr id="22" name="Text 20"/>
+          <p:cNvSpPr/>
+          <p:nvPr/>
+        </p:nvSpPr>
+        <p:spPr>
+          <a:xfrm>
+            <a:off x="4754880" y="3547872"/>
+            <a:ext cx="2926080" cy="457200"/>
+          </a:xfrm>
+          <a:prstGeom prst="rect">
+            <a:avLst/>
+          </a:prstGeom>
+          <a:noFill/>
+          <a:ln/>
+        </p:spPr>
+        <p:txBody>
+          <a:bodyPr wrap="square" lIns="0" tIns="0" rIns="0" bIns="0" rtlCol="0" anchor="ctr"/>
+          <a:lstStyle/>
+          <a:p>
+            <a:pPr marL="0" indent="0">
+              <a:buNone/>
+            </a:pPr>
+            <a:r>
+              <a:rPr lang="en-US" sz="1500" b="1" dirty="0">
+                <a:solidFill>
+                  <a:srgbClr val="1B2A33"/>
+                </a:solidFill>
+                <a:latin typeface="Cambria" pitchFamily="34" charset="0"/>
+                <a:ea typeface="Cambria" pitchFamily="34" charset="-122"/>
+                <a:cs typeface="Cambria" pitchFamily="34" charset="-120"/>
+              </a:rPr>
+              <a:t>Low-res catalogue images</a:t>
+            </a:r>
+            <a:endParaRPr lang="en-US" sz="1500" dirty="0"/>
+          </a:p>
+        </p:txBody>
+      </p:sp>
+      <p:sp>
+        <p:nvSpPr>
+          <p:cNvPr id="23" name="Text 21"/>
+          <p:cNvSpPr/>
+          <p:nvPr/>
+        </p:nvSpPr>
+        <p:spPr>
+          <a:xfrm>
+            <a:off x="4526280" y="4041648"/>
+            <a:ext cx="3063240" cy="640080"/>
+          </a:xfrm>
+          <a:prstGeom prst="rect">
+            <a:avLst/>
+          </a:prstGeom>
+          <a:noFill/>
+          <a:ln/>
+        </p:spPr>
+        <p:txBody>
+          <a:bodyPr wrap="square" lIns="0" tIns="0" rIns="0" bIns="0" rtlCol="0" anchor="ctr"/>
+          <a:lstStyle/>
+          <a:p>
+            <a:pPr marL="0" indent="0">
+              <a:buNone/>
+            </a:pPr>
+            <a:r>
+              <a:rPr lang="en-US" sz="1150" dirty="0">
+                <a:solidFill>
+                  <a:srgbClr val="5B6B73"/>
+                </a:solidFill>
+                <a:latin typeface="Calibri" pitchFamily="34" charset="0"/>
+                <a:ea typeface="Calibri" pitchFamily="34" charset="-122"/>
+                <a:cs typeface="Calibri" pitchFamily="34" charset="-120"/>
+              </a:rPr>
+              <a:t>Shopping thumbnails are small; enhance mode keeps the owner's sharper photo, so swaps happen mainly in swap mode.</a:t>
+            </a:r>
+            <a:endParaRPr lang="en-US" sz="1150" dirty="0"/>
+          </a:p>
+        </p:txBody>
+      </p:sp>
+      <p:sp>
+        <p:nvSpPr>
+          <p:cNvPr id="24" name="Shape 22"/>
+          <p:cNvSpPr/>
+          <p:nvPr/>
+        </p:nvSpPr>
+        <p:spPr>
+          <a:xfrm>
+            <a:off x="7955280" y="3383280"/>
+            <a:ext cx="3566160" cy="1417320"/>
+          </a:xfrm>
+          <a:prstGeom prst="roundRect">
+            <a:avLst>
+              <a:gd name="adj" fmla="val 5806"/>
+            </a:avLst>
+          </a:prstGeom>
+          <a:solidFill>
+            <a:srgbClr val="FFFFFF"/>
+          </a:solidFill>
+          <a:ln w="12700">
+            <a:solidFill>
+              <a:srgbClr val="DCE6E6"/>
+            </a:solidFill>
+            <a:prstDash val="solid"/>
+          </a:ln>
+        </p:spPr>
+        <p:txBody>
+          <a:bodyPr/>
+          <a:lstStyle/>
+          <a:p>
+            <a:endParaRPr lang="en-US"/>
+          </a:p>
+        </p:txBody>
+      </p:sp>
+      <p:sp>
+        <p:nvSpPr>
+          <p:cNvPr id="25" name="Shape 23"/>
+          <p:cNvSpPr/>
+          <p:nvPr/>
+        </p:nvSpPr>
+        <p:spPr>
+          <a:xfrm>
+            <a:off x="8211312" y="3657600"/>
+            <a:ext cx="146304" cy="146304"/>
+          </a:xfrm>
+          <a:prstGeom prst="ellipse">
+            <a:avLst/>
+          </a:prstGeom>
+          <a:solidFill>
+            <a:srgbClr val="0A7D3C"/>
+          </a:solidFill>
+          <a:ln/>
+        </p:spPr>
+        <p:txBody>
+          <a:bodyPr/>
+          <a:lstStyle/>
+          <a:p>
+            <a:endParaRPr lang="en-US"/>
+          </a:p>
+        </p:txBody>
+      </p:sp>
+      <p:sp>
+        <p:nvSpPr>
+          <p:cNvPr id="26" name="Text 24"/>
+          <p:cNvSpPr/>
+          <p:nvPr/>
+        </p:nvSpPr>
+        <p:spPr>
+          <a:xfrm>
+            <a:off x="8458200" y="3547872"/>
+            <a:ext cx="2926080" cy="457200"/>
+          </a:xfrm>
+          <a:prstGeom prst="rect">
+            <a:avLst/>
+          </a:prstGeom>
+          <a:noFill/>
+          <a:ln/>
+        </p:spPr>
+        <p:txBody>
+          <a:bodyPr wrap="square" lIns="0" tIns="0" rIns="0" bIns="0" rtlCol="0" anchor="ctr"/>
+          <a:lstStyle/>
+          <a:p>
+            <a:pPr marL="0" indent="0">
+              <a:buNone/>
+            </a:pPr>
+            <a:r>
+              <a:rPr lang="en-US" sz="1500" b="1" dirty="0">
+                <a:solidFill>
+                  <a:srgbClr val="1B2A33"/>
+                </a:solidFill>
+                <a:latin typeface="Cambria" pitchFamily="34" charset="0"/>
+                <a:ea typeface="Cambria" pitchFamily="34" charset="-122"/>
+                <a:cs typeface="Cambria" pitchFamily="34" charset="-120"/>
+              </a:rPr>
+              <a:t>What held</a:t>
+            </a:r>
+            <a:endParaRPr lang="en-US" sz="1500" dirty="0"/>
+          </a:p>
+        </p:txBody>
+      </p:sp>
+      <p:sp>
+        <p:nvSpPr>
+          <p:cNvPr id="27" name="Text 25"/>
+          <p:cNvSpPr/>
+          <p:nvPr/>
+        </p:nvSpPr>
+        <p:spPr>
+          <a:xfrm>
+            <a:off x="8229600" y="4041648"/>
+            <a:ext cx="3063240" cy="640080"/>
+          </a:xfrm>
+          <a:prstGeom prst="rect">
+            <a:avLst/>
+          </a:prstGeom>
+          <a:noFill/>
+          <a:ln/>
+        </p:spPr>
+        <p:txBody>
+          <a:bodyPr wrap="square" lIns="0" tIns="0" rIns="0" bIns="0" rtlCol="0" anchor="ctr"/>
+          <a:lstStyle/>
+          <a:p>
+            <a:pPr marL="0" indent="0">
+              <a:buNone/>
+            </a:pPr>
+            <a:r>
+              <a:rPr lang="en-US" sz="1150" dirty="0">
+                <a:solidFill>
+                  <a:srgbClr val="5B6B73"/>
+                </a:solidFill>
+                <a:latin typeface="Calibri" pitchFamily="34" charset="0"/>
+                <a:ea typeface="Calibri" pitchFamily="34" charset="-122"/>
+                <a:cs typeface="Calibri" pitchFamily="34" charset="-120"/>
+              </a:rPr>
+              <a:t>Identification (86%), category (79%) and age-restriction recall (100%) were robust across all six categories.</a:t>
+            </a:r>
+            <a:endParaRPr lang="en-US" sz="1150" dirty="0"/>
+          </a:p>
+        </p:txBody>
+      </p:sp>
+      <p:sp>
+        <p:nvSpPr>
+          <p:cNvPr id="28" name="Text 26"/>
+          <p:cNvSpPr/>
+          <p:nvPr/>
+        </p:nvSpPr>
+        <p:spPr>
+          <a:xfrm>
+            <a:off x="548640" y="4956048"/>
+            <a:ext cx="11064240" cy="365760"/>
+          </a:xfrm>
+          <a:prstGeom prst="rect">
+            <a:avLst/>
+          </a:prstGeom>
+          <a:noFill/>
+          <a:ln/>
+        </p:spPr>
+        <p:txBody>
+          <a:bodyPr wrap="square" lIns="0" tIns="0" rIns="0" bIns="0" rtlCol="0" anchor="ctr"/>
+          <a:lstStyle/>
+          <a:p>
+            <a:pPr marL="0" indent="0">
+              <a:buNone/>
+            </a:pPr>
+            <a:r>
+              <a:rPr lang="en-US" sz="1250" i="1" dirty="0">
+                <a:solidFill>
+                  <a:srgbClr val="028090"/>
+                </a:solidFill>
+                <a:latin typeface="Calibri" pitchFamily="34" charset="0"/>
+                <a:ea typeface="Calibri" pitchFamily="34" charset="-122"/>
+                <a:cs typeface="Calibri" pitchFamily="34" charset="-120"/>
+              </a:rPr>
+              <a:t>Mitigations: per-unit price normalization, price-outlier rejection, brand-confirmation gate (decline + route to review), robust median reporting.</a:t>
+            </a:r>
+            <a:endParaRPr lang="en-US" sz="1250" dirty="0"/>
+          </a:p>
+        </p:txBody>
+      </p:sp>
+      <p:sp>
+        <p:nvSpPr>
+          <p:cNvPr id="29" name="Shape 27"/>
+          <p:cNvSpPr/>
+          <p:nvPr/>
+        </p:nvSpPr>
+        <p:spPr>
+          <a:xfrm>
+            <a:off x="548640" y="5394960"/>
+            <a:ext cx="11064240" cy="1051560"/>
+          </a:xfrm>
+          <a:prstGeom prst="roundRect">
+            <a:avLst>
+              <a:gd name="adj" fmla="val 8696"/>
+            </a:avLst>
+          </a:prstGeom>
+          <a:solidFill>
+            <a:srgbClr val="0B2A3B"/>
+          </a:solidFill>
+          <a:ln/>
+        </p:spPr>
+        <p:txBody>
+          <a:bodyPr/>
+          <a:lstStyle/>
+          <a:p>
+            <a:endParaRPr lang="en-US"/>
+          </a:p>
+        </p:txBody>
+      </p:sp>
+      <p:sp>
+        <p:nvSpPr>
+          <p:cNvPr id="30" name="Text 28"/>
+          <p:cNvSpPr/>
+          <p:nvPr/>
+        </p:nvSpPr>
+        <p:spPr>
+          <a:xfrm>
+            <a:off x="822960" y="5486400"/>
+            <a:ext cx="10515600" cy="868680"/>
+          </a:xfrm>
+          <a:prstGeom prst="rect">
+            <a:avLst/>
+          </a:prstGeom>
+          <a:noFill/>
+          <a:ln/>
+        </p:spPr>
+        <p:txBody>
+          <a:bodyPr wrap="square" lIns="0" tIns="0" rIns="0" bIns="0" rtlCol="0" anchor="ctr"/>
+          <a:lstStyle/>
+          <a:p>
+            <a:pPr marL="0" indent="0">
+              <a:buNone/>
+            </a:pPr>
+            <a:r>
+              <a:rPr lang="en-US" sz="1150" b="1" dirty="0">
+                <a:solidFill>
+                  <a:srgbClr val="02C39A"/>
+                </a:solidFill>
+                <a:latin typeface="Calibri" pitchFamily="34" charset="0"/>
+                <a:ea typeface="Calibri" pitchFamily="34" charset="-122"/>
+                <a:cs typeface="Calibri" pitchFamily="34" charset="-120"/>
+              </a:rPr>
+              <a:t>Interpretability &amp; explainability:  </a:t>
+            </a:r>
+            <a:r>
+              <a:rPr lang="en-US" sz="1150" dirty="0">
+                <a:solidFill>
+                  <a:srgbClr val="FFFFFF"/>
+                </a:solidFill>
+                <a:latin typeface="Calibri" pitchFamily="34" charset="0"/>
+                <a:ea typeface="Calibri" pitchFamily="34" charset="-122"/>
+                <a:cs typeface="Calibri" pitchFamily="34" charset="-120"/>
+              </a:rPr>
+              <a:t>the pipeline is white-box by construction — no black-box score decides a listing. Each output exposes its evidence: recognised attributes + OCR text, the ranked retrieval candidates with scores, the stated price basis, the LLM's same-SKU match reason, and explicit guardrail flags — all captured in a per-item trace log and an HTML run report for human review.</a:t>
+            </a:r>
+            <a:endParaRPr lang="en-US" sz="1150" dirty="0"/>
+          </a:p>
+        </p:txBody>
+      </p:sp>
+      <p:sp>
+        <p:nvSpPr>
+          <p:cNvPr id="31" name="Text 29"/>
           <p:cNvSpPr/>
           <p:nvPr/>
         </p:nvSpPr>
@@ -6993,7 +7734,7 @@
           <a:bodyPr wrap="square" rtlCol="0" anchor="ctr"/>
           <a:lstStyle/>
           <a:p>
-            <a:pPr algn="r" indent="0" marL="0">
+            <a:pPr marL="0" indent="0" algn="r">
               <a:buNone/>
             </a:pPr>
             <a:r>
@@ -7027,6 +7768,7 @@
         <a:solidFill>
           <a:srgbClr val="0B2A3B"/>
         </a:solidFill>
+        <a:effectLst/>
       </p:bgPr>
     </p:bg>
     <p:spTree>
@@ -7045,7 +7787,36 @@
       </p:grpSpPr>
       <p:sp>
         <p:nvSpPr>
-          <p:cNvPr id="2" name="Text 0"/>
+          <p:cNvPr id="2" name="Shape 0"/>
+          <p:cNvSpPr/>
+          <p:nvPr/>
+        </p:nvSpPr>
+        <p:spPr>
+          <a:xfrm>
+            <a:off x="-1645920" y="-1645920"/>
+            <a:ext cx="4572000" cy="4572000"/>
+          </a:xfrm>
+          <a:prstGeom prst="ellipse">
+            <a:avLst/>
+          </a:prstGeom>
+          <a:solidFill>
+            <a:srgbClr val="028090">
+              <a:alpha val="25000"/>
+            </a:srgbClr>
+          </a:solidFill>
+          <a:ln/>
+        </p:spPr>
+        <p:txBody>
+          <a:bodyPr/>
+          <a:lstStyle/>
+          <a:p>
+            <a:endParaRPr lang="en-US"/>
+          </a:p>
+        </p:txBody>
+      </p:sp>
+      <p:sp>
+        <p:nvSpPr>
+          <p:cNvPr id="3" name="Text 1"/>
           <p:cNvSpPr/>
           <p:nvPr/>
         </p:nvSpPr>
@@ -7064,11 +7835,11 @@
           <a:bodyPr wrap="square" lIns="0" tIns="0" rIns="0" bIns="0" rtlCol="0" anchor="ctr"/>
           <a:lstStyle/>
           <a:p>
-            <a:pPr indent="0" marL="0">
-              <a:buNone/>
-            </a:pPr>
-            <a:r>
-              <a:rPr lang="en-US" sz="1200" b="1" spc="200" kern="0" dirty="0">
+            <a:pPr marL="0" indent="0">
+              <a:buNone/>
+            </a:pPr>
+            <a:r>
+              <a:rPr lang="en-US" sz="1200" b="1" kern="0" spc="200" dirty="0">
                 <a:solidFill>
                   <a:srgbClr val="02C39A"/>
                 </a:solidFill>
@@ -7076,7 +7847,7 @@
                 <a:ea typeface="Calibri" pitchFamily="34" charset="-122"/>
                 <a:cs typeface="Calibri" pitchFamily="34" charset="-120"/>
               </a:rPr>
-              <a:t>SELECTED REFERENCES (APA)</a:t>
+              <a:t>SUMMARY &amp; CONCLUSION</a:t>
             </a:r>
             <a:endParaRPr lang="en-US" sz="1200" dirty="0"/>
           </a:p>
@@ -7084,7 +7855,7 @@
       </p:sp>
       <p:sp>
         <p:nvSpPr>
-          <p:cNvPr id="3" name="Text 1"/>
+          <p:cNvPr id="4" name="Text 2"/>
           <p:cNvSpPr/>
           <p:nvPr/>
         </p:nvSpPr>
@@ -7103,7 +7874,711 @@
           <a:bodyPr wrap="square" lIns="0" tIns="0" rIns="0" bIns="0" rtlCol="0" anchor="ctr"/>
           <a:lstStyle/>
           <a:p>
-            <a:pPr indent="0" marL="0">
+            <a:pPr marL="0" indent="0">
+              <a:buNone/>
+            </a:pPr>
+            <a:r>
+              <a:rPr lang="en-US" sz="3200" b="1" dirty="0">
+                <a:solidFill>
+                  <a:srgbClr val="FFFFFF"/>
+                </a:solidFill>
+                <a:latin typeface="Cambria" pitchFamily="34" charset="0"/>
+                <a:ea typeface="Cambria" pitchFamily="34" charset="-122"/>
+                <a:cs typeface="Cambria" pitchFamily="34" charset="-120"/>
+              </a:rPr>
+              <a:t>One photo → a defensible, safe listing</a:t>
+            </a:r>
+            <a:endParaRPr lang="en-US" sz="3200" dirty="0"/>
+          </a:p>
+        </p:txBody>
+      </p:sp>
+      <p:sp>
+        <p:nvSpPr>
+          <p:cNvPr id="5" name="Shape 3"/>
+          <p:cNvSpPr/>
+          <p:nvPr/>
+        </p:nvSpPr>
+        <p:spPr>
+          <a:xfrm>
+            <a:off x="548640" y="2057400"/>
+            <a:ext cx="365760" cy="365760"/>
+          </a:xfrm>
+          <a:prstGeom prst="ellipse">
+            <a:avLst/>
+          </a:prstGeom>
+          <a:solidFill>
+            <a:srgbClr val="028090"/>
+          </a:solidFill>
+          <a:ln/>
+        </p:spPr>
+        <p:txBody>
+          <a:bodyPr/>
+          <a:lstStyle/>
+          <a:p>
+            <a:endParaRPr lang="en-US"/>
+          </a:p>
+        </p:txBody>
+      </p:sp>
+      <p:sp>
+        <p:nvSpPr>
+          <p:cNvPr id="6" name="Text 4"/>
+          <p:cNvSpPr/>
+          <p:nvPr/>
+        </p:nvSpPr>
+        <p:spPr>
+          <a:xfrm>
+            <a:off x="548640" y="2057400"/>
+            <a:ext cx="365760" cy="365760"/>
+          </a:xfrm>
+          <a:prstGeom prst="rect">
+            <a:avLst/>
+          </a:prstGeom>
+          <a:noFill/>
+          <a:ln/>
+        </p:spPr>
+        <p:txBody>
+          <a:bodyPr wrap="square" lIns="0" tIns="0" rIns="0" bIns="0" rtlCol="0" anchor="ctr"/>
+          <a:lstStyle/>
+          <a:p>
+            <a:pPr marL="0" indent="0" algn="ctr">
+              <a:buNone/>
+            </a:pPr>
+            <a:r>
+              <a:rPr lang="en-US" sz="1600" b="1" dirty="0">
+                <a:solidFill>
+                  <a:srgbClr val="FFFFFF"/>
+                </a:solidFill>
+                <a:latin typeface="Calibri" pitchFamily="34" charset="0"/>
+                <a:ea typeface="Calibri" pitchFamily="34" charset="-122"/>
+                <a:cs typeface="Calibri" pitchFamily="34" charset="-120"/>
+              </a:rPr>
+              <a:t>✓</a:t>
+            </a:r>
+            <a:endParaRPr lang="en-US" sz="1600" dirty="0"/>
+          </a:p>
+        </p:txBody>
+      </p:sp>
+      <p:sp>
+        <p:nvSpPr>
+          <p:cNvPr id="7" name="Text 5"/>
+          <p:cNvSpPr/>
+          <p:nvPr/>
+        </p:nvSpPr>
+        <p:spPr>
+          <a:xfrm>
+            <a:off x="1143000" y="2011680"/>
+            <a:ext cx="7269480" cy="914400"/>
+          </a:xfrm>
+          <a:prstGeom prst="rect">
+            <a:avLst/>
+          </a:prstGeom>
+          <a:noFill/>
+          <a:ln/>
+        </p:spPr>
+        <p:txBody>
+          <a:bodyPr wrap="square" lIns="0" tIns="0" rIns="0" bIns="0" rtlCol="0" anchor="ctr"/>
+          <a:lstStyle/>
+          <a:p>
+            <a:pPr marL="0" indent="0">
+              <a:buNone/>
+            </a:pPr>
+            <a:r>
+              <a:rPr lang="en-US" sz="1500" dirty="0">
+                <a:solidFill>
+                  <a:srgbClr val="E4F1F1"/>
+                </a:solidFill>
+                <a:latin typeface="Calibri" pitchFamily="34" charset="0"/>
+                <a:ea typeface="Calibri" pitchFamily="34" charset="-122"/>
+                <a:cs typeface="Calibri" pitchFamily="34" charset="-120"/>
+              </a:rPr>
+              <a:t>Evaluated on 58 real corner-store products, Snap-to-Sell beats the naive baseline on identification, category, age-restriction recall (100%), and image upgrade.</a:t>
+            </a:r>
+            <a:endParaRPr lang="en-US" sz="1500" dirty="0"/>
+          </a:p>
+        </p:txBody>
+      </p:sp>
+      <p:sp>
+        <p:nvSpPr>
+          <p:cNvPr id="8" name="Shape 6"/>
+          <p:cNvSpPr/>
+          <p:nvPr/>
+        </p:nvSpPr>
+        <p:spPr>
+          <a:xfrm>
+            <a:off x="548640" y="3108960"/>
+            <a:ext cx="365760" cy="365760"/>
+          </a:xfrm>
+          <a:prstGeom prst="ellipse">
+            <a:avLst/>
+          </a:prstGeom>
+          <a:solidFill>
+            <a:srgbClr val="00A896"/>
+          </a:solidFill>
+          <a:ln/>
+        </p:spPr>
+        <p:txBody>
+          <a:bodyPr/>
+          <a:lstStyle/>
+          <a:p>
+            <a:endParaRPr lang="en-US"/>
+          </a:p>
+        </p:txBody>
+      </p:sp>
+      <p:sp>
+        <p:nvSpPr>
+          <p:cNvPr id="9" name="Text 7"/>
+          <p:cNvSpPr/>
+          <p:nvPr/>
+        </p:nvSpPr>
+        <p:spPr>
+          <a:xfrm>
+            <a:off x="548640" y="3108960"/>
+            <a:ext cx="365760" cy="365760"/>
+          </a:xfrm>
+          <a:prstGeom prst="rect">
+            <a:avLst/>
+          </a:prstGeom>
+          <a:noFill/>
+          <a:ln/>
+        </p:spPr>
+        <p:txBody>
+          <a:bodyPr wrap="square" lIns="0" tIns="0" rIns="0" bIns="0" rtlCol="0" anchor="ctr"/>
+          <a:lstStyle/>
+          <a:p>
+            <a:pPr marL="0" indent="0" algn="ctr">
+              <a:buNone/>
+            </a:pPr>
+            <a:r>
+              <a:rPr lang="en-US" sz="1600" b="1" dirty="0">
+                <a:solidFill>
+                  <a:srgbClr val="FFFFFF"/>
+                </a:solidFill>
+                <a:latin typeface="Calibri" pitchFamily="34" charset="0"/>
+                <a:ea typeface="Calibri" pitchFamily="34" charset="-122"/>
+                <a:cs typeface="Calibri" pitchFamily="34" charset="-120"/>
+              </a:rPr>
+              <a:t>✓</a:t>
+            </a:r>
+            <a:endParaRPr lang="en-US" sz="1600" dirty="0"/>
+          </a:p>
+        </p:txBody>
+      </p:sp>
+      <p:sp>
+        <p:nvSpPr>
+          <p:cNvPr id="10" name="Text 8"/>
+          <p:cNvSpPr/>
+          <p:nvPr/>
+        </p:nvSpPr>
+        <p:spPr>
+          <a:xfrm>
+            <a:off x="1143000" y="3063240"/>
+            <a:ext cx="7269480" cy="914400"/>
+          </a:xfrm>
+          <a:prstGeom prst="rect">
+            <a:avLst/>
+          </a:prstGeom>
+          <a:noFill/>
+          <a:ln/>
+        </p:spPr>
+        <p:txBody>
+          <a:bodyPr wrap="square" lIns="0" tIns="0" rIns="0" bIns="0" rtlCol="0" anchor="ctr"/>
+          <a:lstStyle/>
+          <a:p>
+            <a:pPr marL="0" indent="0">
+              <a:buNone/>
+            </a:pPr>
+            <a:r>
+              <a:rPr lang="en-US" sz="1500" dirty="0">
+                <a:solidFill>
+                  <a:srgbClr val="E4F1F1"/>
+                </a:solidFill>
+                <a:latin typeface="Calibri" pitchFamily="34" charset="0"/>
+                <a:ea typeface="Calibri" pitchFamily="34" charset="-122"/>
+                <a:cs typeface="Calibri" pitchFamily="34" charset="-120"/>
+              </a:rPr>
+              <a:t>Responsible-AI is first-class and measured: every tobacco / alcohol item flagged, and low-confidence matches are declined and routed to human review.</a:t>
+            </a:r>
+            <a:endParaRPr lang="en-US" sz="1500" dirty="0"/>
+          </a:p>
+        </p:txBody>
+      </p:sp>
+      <p:sp>
+        <p:nvSpPr>
+          <p:cNvPr id="11" name="Shape 9"/>
+          <p:cNvSpPr/>
+          <p:nvPr/>
+        </p:nvSpPr>
+        <p:spPr>
+          <a:xfrm>
+            <a:off x="548640" y="4160520"/>
+            <a:ext cx="365760" cy="365760"/>
+          </a:xfrm>
+          <a:prstGeom prst="ellipse">
+            <a:avLst/>
+          </a:prstGeom>
+          <a:solidFill>
+            <a:srgbClr val="02C39A"/>
+          </a:solidFill>
+          <a:ln/>
+        </p:spPr>
+        <p:txBody>
+          <a:bodyPr/>
+          <a:lstStyle/>
+          <a:p>
+            <a:endParaRPr lang="en-US"/>
+          </a:p>
+        </p:txBody>
+      </p:sp>
+      <p:sp>
+        <p:nvSpPr>
+          <p:cNvPr id="12" name="Text 10"/>
+          <p:cNvSpPr/>
+          <p:nvPr/>
+        </p:nvSpPr>
+        <p:spPr>
+          <a:xfrm>
+            <a:off x="548640" y="4160520"/>
+            <a:ext cx="365760" cy="365760"/>
+          </a:xfrm>
+          <a:prstGeom prst="rect">
+            <a:avLst/>
+          </a:prstGeom>
+          <a:noFill/>
+          <a:ln/>
+        </p:spPr>
+        <p:txBody>
+          <a:bodyPr wrap="square" lIns="0" tIns="0" rIns="0" bIns="0" rtlCol="0" anchor="ctr"/>
+          <a:lstStyle/>
+          <a:p>
+            <a:pPr marL="0" indent="0" algn="ctr">
+              <a:buNone/>
+            </a:pPr>
+            <a:r>
+              <a:rPr lang="en-US" sz="1600" b="1" dirty="0">
+                <a:solidFill>
+                  <a:srgbClr val="FFFFFF"/>
+                </a:solidFill>
+                <a:latin typeface="Calibri" pitchFamily="34" charset="0"/>
+                <a:ea typeface="Calibri" pitchFamily="34" charset="-122"/>
+                <a:cs typeface="Calibri" pitchFamily="34" charset="-120"/>
+              </a:rPr>
+              <a:t>✓</a:t>
+            </a:r>
+            <a:endParaRPr lang="en-US" sz="1600" dirty="0"/>
+          </a:p>
+        </p:txBody>
+      </p:sp>
+      <p:sp>
+        <p:nvSpPr>
+          <p:cNvPr id="13" name="Text 11"/>
+          <p:cNvSpPr/>
+          <p:nvPr/>
+        </p:nvSpPr>
+        <p:spPr>
+          <a:xfrm>
+            <a:off x="1143000" y="4114800"/>
+            <a:ext cx="7269480" cy="914400"/>
+          </a:xfrm>
+          <a:prstGeom prst="rect">
+            <a:avLst/>
+          </a:prstGeom>
+          <a:noFill/>
+          <a:ln/>
+        </p:spPr>
+        <p:txBody>
+          <a:bodyPr wrap="square" lIns="0" tIns="0" rIns="0" bIns="0" rtlCol="0" anchor="ctr"/>
+          <a:lstStyle/>
+          <a:p>
+            <a:pPr marL="0" indent="0">
+              <a:buNone/>
+            </a:pPr>
+            <a:r>
+              <a:rPr lang="en-US" sz="1500" dirty="0">
+                <a:solidFill>
+                  <a:srgbClr val="E4F1F1"/>
+                </a:solidFill>
+                <a:latin typeface="Calibri" pitchFamily="34" charset="0"/>
+                <a:ea typeface="Calibri" pitchFamily="34" charset="-122"/>
+                <a:cs typeface="Calibri" pitchFamily="34" charset="-120"/>
+              </a:rPr>
+              <a:t>Honestly evaluated: retrieval-grounded pricing is the one axis the baseline wins — a documented failure mode on low-value goods, reported rather than hidden.</a:t>
+            </a:r>
+            <a:endParaRPr lang="en-US" sz="1500" dirty="0"/>
+          </a:p>
+        </p:txBody>
+      </p:sp>
+      <p:sp>
+        <p:nvSpPr>
+          <p:cNvPr id="14" name="Shape 12"/>
+          <p:cNvSpPr/>
+          <p:nvPr/>
+        </p:nvSpPr>
+        <p:spPr>
+          <a:xfrm>
+            <a:off x="8686800" y="2011680"/>
+            <a:ext cx="2971800" cy="3063240"/>
+          </a:xfrm>
+          <a:prstGeom prst="roundRect">
+            <a:avLst>
+              <a:gd name="adj" fmla="val 3077"/>
+            </a:avLst>
+          </a:prstGeom>
+          <a:solidFill>
+            <a:srgbClr val="11384B"/>
+          </a:solidFill>
+          <a:ln w="12700">
+            <a:solidFill>
+              <a:srgbClr val="028090"/>
+            </a:solidFill>
+            <a:prstDash val="solid"/>
+          </a:ln>
+        </p:spPr>
+        <p:txBody>
+          <a:bodyPr/>
+          <a:lstStyle/>
+          <a:p>
+            <a:endParaRPr lang="en-US"/>
+          </a:p>
+        </p:txBody>
+      </p:sp>
+      <p:sp>
+        <p:nvSpPr>
+          <p:cNvPr id="15" name="Text 13"/>
+          <p:cNvSpPr/>
+          <p:nvPr/>
+        </p:nvSpPr>
+        <p:spPr>
+          <a:xfrm>
+            <a:off x="8915400" y="2194560"/>
+            <a:ext cx="2560320" cy="320040"/>
+          </a:xfrm>
+          <a:prstGeom prst="rect">
+            <a:avLst/>
+          </a:prstGeom>
+          <a:noFill/>
+          <a:ln/>
+        </p:spPr>
+        <p:txBody>
+          <a:bodyPr wrap="square" lIns="0" tIns="0" rIns="0" bIns="0" rtlCol="0" anchor="ctr"/>
+          <a:lstStyle/>
+          <a:p>
+            <a:pPr marL="0" indent="0">
+              <a:buNone/>
+            </a:pPr>
+            <a:r>
+              <a:rPr lang="en-US" sz="1200" b="1" kern="0" spc="200" dirty="0">
+                <a:solidFill>
+                  <a:srgbClr val="02C39A"/>
+                </a:solidFill>
+                <a:latin typeface="Calibri" pitchFamily="34" charset="0"/>
+                <a:ea typeface="Calibri" pitchFamily="34" charset="-122"/>
+                <a:cs typeface="Calibri" pitchFamily="34" charset="-120"/>
+              </a:rPr>
+              <a:t>FUTURE WORK</a:t>
+            </a:r>
+            <a:endParaRPr lang="en-US" sz="1200" dirty="0"/>
+          </a:p>
+        </p:txBody>
+      </p:sp>
+      <p:sp>
+        <p:nvSpPr>
+          <p:cNvPr id="16" name="Text 14"/>
+          <p:cNvSpPr/>
+          <p:nvPr/>
+        </p:nvSpPr>
+        <p:spPr>
+          <a:xfrm>
+            <a:off x="8915400" y="2606040"/>
+            <a:ext cx="2606040" cy="2286000"/>
+          </a:xfrm>
+          <a:prstGeom prst="rect">
+            <a:avLst/>
+          </a:prstGeom>
+          <a:noFill/>
+          <a:ln/>
+        </p:spPr>
+        <p:txBody>
+          <a:bodyPr wrap="square" lIns="0" tIns="0" rIns="0" bIns="0" rtlCol="0" anchor="ctr"/>
+          <a:lstStyle/>
+          <a:p>
+            <a:pPr marL="342900" indent="-342900">
+              <a:spcAft>
+                <a:spcPts val="900"/>
+              </a:spcAft>
+              <a:buSzPct val="100000"/>
+              <a:buChar char="•"/>
+            </a:pPr>
+            <a:r>
+              <a:rPr lang="en-US" sz="1250" dirty="0">
+                <a:solidFill>
+                  <a:srgbClr val="D8ECEC"/>
+                </a:solidFill>
+                <a:latin typeface="Calibri" pitchFamily="34" charset="0"/>
+                <a:ea typeface="Calibri" pitchFamily="34" charset="-122"/>
+                <a:cs typeface="Calibri" pitchFamily="34" charset="-120"/>
+              </a:rPr>
+              <a:t>Wider open-catalogue coverage</a:t>
+            </a:r>
+            <a:endParaRPr lang="en-US" sz="1250" dirty="0"/>
+          </a:p>
+          <a:p>
+            <a:pPr marL="342900" indent="-342900">
+              <a:spcAft>
+                <a:spcPts val="900"/>
+              </a:spcAft>
+              <a:buSzPct val="100000"/>
+              <a:buChar char="•"/>
+            </a:pPr>
+            <a:r>
+              <a:rPr lang="en-US" sz="1250" dirty="0">
+                <a:solidFill>
+                  <a:srgbClr val="D8ECEC"/>
+                </a:solidFill>
+                <a:latin typeface="Calibri" pitchFamily="34" charset="0"/>
+                <a:ea typeface="Calibri" pitchFamily="34" charset="-122"/>
+                <a:cs typeface="Calibri" pitchFamily="34" charset="-120"/>
+              </a:rPr>
+              <a:t>Larger labelled test set</a:t>
+            </a:r>
+            <a:endParaRPr lang="en-US" sz="1250" dirty="0"/>
+          </a:p>
+          <a:p>
+            <a:pPr marL="342900" indent="-342900">
+              <a:spcAft>
+                <a:spcPts val="900"/>
+              </a:spcAft>
+              <a:buSzPct val="100000"/>
+              <a:buChar char="•"/>
+            </a:pPr>
+            <a:r>
+              <a:rPr lang="en-US" sz="1250" dirty="0">
+                <a:solidFill>
+                  <a:srgbClr val="D8ECEC"/>
+                </a:solidFill>
+                <a:latin typeface="Calibri" pitchFamily="34" charset="0"/>
+                <a:ea typeface="Calibri" pitchFamily="34" charset="-122"/>
+                <a:cs typeface="Calibri" pitchFamily="34" charset="-120"/>
+              </a:rPr>
+              <a:t>Learned price adjustment</a:t>
+            </a:r>
+            <a:endParaRPr lang="en-US" sz="1250" dirty="0"/>
+          </a:p>
+          <a:p>
+            <a:pPr marL="342900" indent="-342900">
+              <a:spcAft>
+                <a:spcPts val="900"/>
+              </a:spcAft>
+              <a:buSzPct val="100000"/>
+              <a:buChar char="•"/>
+            </a:pPr>
+            <a:r>
+              <a:rPr lang="en-US" sz="1250" dirty="0">
+                <a:solidFill>
+                  <a:srgbClr val="D8ECEC"/>
+                </a:solidFill>
+                <a:latin typeface="Calibri" pitchFamily="34" charset="0"/>
+                <a:ea typeface="Calibri" pitchFamily="34" charset="-122"/>
+                <a:cs typeface="Calibri" pitchFamily="34" charset="-120"/>
+              </a:rPr>
+              <a:t>Multi-item shelf detection</a:t>
+            </a:r>
+            <a:endParaRPr lang="en-US" sz="1250" dirty="0"/>
+          </a:p>
+          <a:p>
+            <a:pPr marL="342900" indent="-342900">
+              <a:spcAft>
+                <a:spcPts val="900"/>
+              </a:spcAft>
+              <a:buSzPct val="100000"/>
+              <a:buChar char="•"/>
+            </a:pPr>
+            <a:r>
+              <a:rPr lang="en-US" sz="1250" dirty="0">
+                <a:solidFill>
+                  <a:srgbClr val="D8ECEC"/>
+                </a:solidFill>
+                <a:latin typeface="Calibri" pitchFamily="34" charset="0"/>
+                <a:ea typeface="Calibri" pitchFamily="34" charset="-122"/>
+                <a:cs typeface="Calibri" pitchFamily="34" charset="-120"/>
+              </a:rPr>
+              <a:t>Live marketplace publishing</a:t>
+            </a:r>
+            <a:endParaRPr lang="en-US" sz="1250" dirty="0"/>
+          </a:p>
+        </p:txBody>
+      </p:sp>
+      <p:sp>
+        <p:nvSpPr>
+          <p:cNvPr id="17" name="Text 15"/>
+          <p:cNvSpPr/>
+          <p:nvPr/>
+        </p:nvSpPr>
+        <p:spPr>
+          <a:xfrm>
+            <a:off x="548640" y="5852160"/>
+            <a:ext cx="10515600" cy="548640"/>
+          </a:xfrm>
+          <a:prstGeom prst="rect">
+            <a:avLst/>
+          </a:prstGeom>
+          <a:noFill/>
+          <a:ln/>
+        </p:spPr>
+        <p:txBody>
+          <a:bodyPr wrap="square" lIns="0" tIns="0" rIns="0" bIns="0" rtlCol="0" anchor="ctr"/>
+          <a:lstStyle/>
+          <a:p>
+            <a:pPr marL="0" indent="0">
+              <a:buNone/>
+            </a:pPr>
+            <a:r>
+              <a:rPr lang="en-US" sz="1600" i="1" dirty="0">
+                <a:solidFill>
+                  <a:srgbClr val="00A896"/>
+                </a:solidFill>
+                <a:latin typeface="Cambria" pitchFamily="34" charset="0"/>
+                <a:ea typeface="Cambria" pitchFamily="34" charset="-122"/>
+                <a:cs typeface="Cambria" pitchFamily="34" charset="-120"/>
+              </a:rPr>
+              <a:t>Snap-to-Sell — lowering the e-commerce barrier for the retailers automation leaves behind.</a:t>
+            </a:r>
+            <a:endParaRPr lang="en-US" sz="1600" dirty="0"/>
+          </a:p>
+        </p:txBody>
+      </p:sp>
+      <p:sp>
+        <p:nvSpPr>
+          <p:cNvPr id="18" name="Text 16"/>
+          <p:cNvSpPr/>
+          <p:nvPr/>
+        </p:nvSpPr>
+        <p:spPr>
+          <a:xfrm>
+            <a:off x="11274552" y="6400800"/>
+            <a:ext cx="457200" cy="274320"/>
+          </a:xfrm>
+          <a:prstGeom prst="rect">
+            <a:avLst/>
+          </a:prstGeom>
+          <a:noFill/>
+          <a:ln/>
+        </p:spPr>
+        <p:txBody>
+          <a:bodyPr wrap="square" rtlCol="0" anchor="ctr"/>
+          <a:lstStyle/>
+          <a:p>
+            <a:pPr marL="0" indent="0" algn="r">
+              <a:buNone/>
+            </a:pPr>
+            <a:r>
+              <a:rPr lang="en-US" sz="1000" dirty="0">
+                <a:solidFill>
+                  <a:srgbClr val="5B6B73"/>
+                </a:solidFill>
+                <a:latin typeface="Calibri" pitchFamily="34" charset="0"/>
+                <a:ea typeface="Calibri" pitchFamily="34" charset="-122"/>
+                <a:cs typeface="Calibri" pitchFamily="34" charset="-120"/>
+              </a:rPr>
+              <a:t>15</a:t>
+            </a:r>
+            <a:endParaRPr lang="en-US" sz="1000" dirty="0"/>
+          </a:p>
+        </p:txBody>
+      </p:sp>
+    </p:spTree>
+  </p:cSld>
+  <p:clrMapOvr>
+    <a:masterClrMapping/>
+  </p:clrMapOvr>
+</p:sld>
+</file>
+
+<file path=ppt/slides/slide16.xml><?xml version="1.0" encoding="utf-8"?>
+<p:sld xmlns:a="http://schemas.openxmlformats.org/drawingml/2006/main" xmlns:r="http://schemas.openxmlformats.org/officeDocument/2006/relationships" xmlns:p="http://schemas.openxmlformats.org/presentationml/2006/main">
+  <p:cSld name="Slide 16">
+    <p:bg>
+      <p:bgPr>
+        <a:solidFill>
+          <a:srgbClr val="0B2A3B"/>
+        </a:solidFill>
+        <a:effectLst/>
+      </p:bgPr>
+    </p:bg>
+    <p:spTree>
+      <p:nvGrpSpPr>
+        <p:cNvPr id="1" name=""/>
+        <p:cNvGrpSpPr/>
+        <p:nvPr/>
+      </p:nvGrpSpPr>
+      <p:grpSpPr>
+        <a:xfrm>
+          <a:off x="0" y="0"/>
+          <a:ext cx="0" cy="0"/>
+          <a:chOff x="0" y="0"/>
+          <a:chExt cx="0" cy="0"/>
+        </a:xfrm>
+      </p:grpSpPr>
+      <p:sp>
+        <p:nvSpPr>
+          <p:cNvPr id="2" name="Text 0"/>
+          <p:cNvSpPr/>
+          <p:nvPr/>
+        </p:nvSpPr>
+        <p:spPr>
+          <a:xfrm>
+            <a:off x="548640" y="502920"/>
+            <a:ext cx="8229600" cy="320040"/>
+          </a:xfrm>
+          <a:prstGeom prst="rect">
+            <a:avLst/>
+          </a:prstGeom>
+          <a:noFill/>
+          <a:ln/>
+        </p:spPr>
+        <p:txBody>
+          <a:bodyPr wrap="square" lIns="0" tIns="0" rIns="0" bIns="0" rtlCol="0" anchor="ctr"/>
+          <a:lstStyle/>
+          <a:p>
+            <a:pPr marL="0" indent="0">
+              <a:buNone/>
+            </a:pPr>
+            <a:r>
+              <a:rPr lang="en-US" sz="1200" b="1" kern="0" spc="200" dirty="0">
+                <a:solidFill>
+                  <a:srgbClr val="02C39A"/>
+                </a:solidFill>
+                <a:latin typeface="Calibri" pitchFamily="34" charset="0"/>
+                <a:ea typeface="Calibri" pitchFamily="34" charset="-122"/>
+                <a:cs typeface="Calibri" pitchFamily="34" charset="-120"/>
+              </a:rPr>
+              <a:t>SELECTED REFERENCES (APA)</a:t>
+            </a:r>
+            <a:endParaRPr lang="en-US" sz="1200" dirty="0"/>
+          </a:p>
+        </p:txBody>
+      </p:sp>
+      <p:sp>
+        <p:nvSpPr>
+          <p:cNvPr id="3" name="Text 1"/>
+          <p:cNvSpPr/>
+          <p:nvPr/>
+        </p:nvSpPr>
+        <p:spPr>
+          <a:xfrm>
+            <a:off x="548640" y="777240"/>
+            <a:ext cx="11091672" cy="822960"/>
+          </a:xfrm>
+          <a:prstGeom prst="rect">
+            <a:avLst/>
+          </a:prstGeom>
+          <a:noFill/>
+          <a:ln/>
+        </p:spPr>
+        <p:txBody>
+          <a:bodyPr wrap="square" lIns="0" tIns="0" rIns="0" bIns="0" rtlCol="0" anchor="ctr"/>
+          <a:lstStyle/>
+          <a:p>
+            <a:pPr marL="0" indent="0">
               <a:buNone/>
             </a:pPr>
             <a:r>
@@ -7290,7 +8765,7 @@
           <a:bodyPr wrap="square" lIns="0" tIns="0" rIns="0" bIns="0" rtlCol="0" anchor="ctr"/>
           <a:lstStyle/>
           <a:p>
-            <a:pPr indent="0" marL="0">
+            <a:pPr marL="0" indent="0">
               <a:buNone/>
             </a:pPr>
             <a:r>
@@ -7329,7 +8804,7 @@
           <a:bodyPr wrap="square" rtlCol="0" anchor="ctr"/>
           <a:lstStyle/>
           <a:p>
-            <a:pPr algn="r" indent="0" marL="0">
+            <a:pPr marL="0" indent="0" algn="r">
               <a:buNone/>
             </a:pPr>
             <a:r>
@@ -7341,7 +8816,7 @@
                 <a:ea typeface="Calibri" pitchFamily="34" charset="-122"/>
                 <a:cs typeface="Calibri" pitchFamily="34" charset="-120"/>
               </a:rPr>
-              <a:t>15</a:t>
+              <a:t>16</a:t>
             </a:r>
             <a:endParaRPr lang="en-US" sz="1000" dirty="0"/>
           </a:p>
@@ -7363,6 +8838,7 @@
         <a:solidFill>
           <a:srgbClr val="F4F7F7"/>
         </a:solidFill>
+        <a:effectLst/>
       </p:bgPr>
     </p:bg>
     <p:spTree>
@@ -7400,11 +8876,11 @@
           <a:bodyPr wrap="square" lIns="0" tIns="0" rIns="0" bIns="0" rtlCol="0" anchor="ctr"/>
           <a:lstStyle/>
           <a:p>
-            <a:pPr indent="0" marL="0">
-              <a:buNone/>
-            </a:pPr>
-            <a:r>
-              <a:rPr lang="en-US" sz="1200" b="1" spc="200" kern="0" dirty="0">
+            <a:pPr marL="0" indent="0">
+              <a:buNone/>
+            </a:pPr>
+            <a:r>
+              <a:rPr lang="en-US" sz="1200" b="1" kern="0" spc="200" dirty="0">
                 <a:solidFill>
                   <a:srgbClr val="028090"/>
                 </a:solidFill>
@@ -7439,7 +8915,7 @@
           <a:bodyPr wrap="square" lIns="0" tIns="0" rIns="0" bIns="0" rtlCol="0" anchor="ctr"/>
           <a:lstStyle/>
           <a:p>
-            <a:pPr indent="0" marL="0">
+            <a:pPr marL="0" indent="0">
               <a:buNone/>
             </a:pPr>
             <a:r>
@@ -7478,7 +8954,7 @@
           <a:bodyPr wrap="square" lIns="0" tIns="0" rIns="0" bIns="0" rtlCol="0" anchor="ctr"/>
           <a:lstStyle/>
           <a:p>
-            <a:pPr indent="0" marL="0">
+            <a:pPr marL="0" indent="0">
               <a:buNone/>
             </a:pPr>
             <a:r>
@@ -7495,7 +8971,7 @@
             <a:endParaRPr lang="en-US" sz="1700" dirty="0"/>
           </a:p>
           <a:p>
-            <a:pPr indent="0" marL="0">
+            <a:pPr marL="0" indent="0">
               <a:buNone/>
             </a:pPr>
             <a:r>
@@ -7534,7 +9010,7 @@
           <a:bodyPr wrap="square" lIns="0" tIns="0" rIns="0" bIns="0" rtlCol="0" anchor="ctr"/>
           <a:lstStyle/>
           <a:p>
-            <a:pPr indent="0" marL="0">
+            <a:pPr marL="0" indent="0">
               <a:buNone/>
             </a:pPr>
             <a:r>
@@ -7551,7 +9027,7 @@
             <a:endParaRPr lang="en-US" sz="1700" dirty="0"/>
           </a:p>
           <a:p>
-            <a:pPr indent="0" marL="0">
+            <a:pPr marL="0" indent="0">
               <a:buNone/>
             </a:pPr>
             <a:r>
@@ -7590,7 +9066,7 @@
           <a:bodyPr wrap="square" lIns="0" tIns="0" rIns="0" bIns="0" rtlCol="0" anchor="ctr"/>
           <a:lstStyle/>
           <a:p>
-            <a:pPr indent="0" marL="0">
+            <a:pPr marL="0" indent="0">
               <a:buNone/>
             </a:pPr>
             <a:r>
@@ -7634,13 +9110,20 @@
             <a:prstDash val="solid"/>
           </a:ln>
           <a:effectLst>
-            <a:outerShdw sx="100000" sy="100000" kx="0" ky="0" algn="bl" rotWithShape="0" blurRad="76200" dist="25400" dir="5400000">
+            <a:outerShdw blurRad="76200" dist="25400" dir="5400000" algn="bl" rotWithShape="0">
               <a:srgbClr val="99BBBB">
                 <a:alpha val="25000"/>
               </a:srgbClr>
             </a:outerShdw>
           </a:effectLst>
         </p:spPr>
+        <p:txBody>
+          <a:bodyPr/>
+          <a:lstStyle/>
+          <a:p>
+            <a:endParaRPr lang="en-US"/>
+          </a:p>
+        </p:txBody>
       </p:sp>
       <p:sp>
         <p:nvSpPr>
@@ -7663,7 +9146,7 @@
           <a:bodyPr wrap="square" lIns="0" tIns="0" rIns="0" bIns="0" rtlCol="0" anchor="ctr"/>
           <a:lstStyle/>
           <a:p>
-            <a:pPr indent="0" marL="0">
+            <a:pPr marL="0" indent="0">
               <a:buNone/>
             </a:pPr>
             <a:r>
@@ -7702,7 +9185,7 @@
           <a:bodyPr wrap="square" lIns="0" tIns="0" rIns="0" bIns="0" rtlCol="0" anchor="ctr"/>
           <a:lstStyle/>
           <a:p>
-            <a:pPr indent="0" marL="0">
+            <a:pPr marL="0" indent="0">
               <a:buNone/>
             </a:pPr>
             <a:r>
@@ -7746,13 +9229,20 @@
             <a:prstDash val="solid"/>
           </a:ln>
           <a:effectLst>
-            <a:outerShdw sx="100000" sy="100000" kx="0" ky="0" algn="bl" rotWithShape="0" blurRad="76200" dist="25400" dir="5400000">
+            <a:outerShdw blurRad="76200" dist="25400" dir="5400000" algn="bl" rotWithShape="0">
               <a:srgbClr val="99BBBB">
                 <a:alpha val="25000"/>
               </a:srgbClr>
             </a:outerShdw>
           </a:effectLst>
         </p:spPr>
+        <p:txBody>
+          <a:bodyPr/>
+          <a:lstStyle/>
+          <a:p>
+            <a:endParaRPr lang="en-US"/>
+          </a:p>
+        </p:txBody>
       </p:sp>
       <p:sp>
         <p:nvSpPr>
@@ -7775,7 +9265,7 @@
           <a:bodyPr wrap="square" lIns="0" tIns="0" rIns="0" bIns="0" rtlCol="0" anchor="ctr"/>
           <a:lstStyle/>
           <a:p>
-            <a:pPr indent="0" marL="0">
+            <a:pPr marL="0" indent="0">
               <a:buNone/>
             </a:pPr>
             <a:r>
@@ -7814,7 +9304,7 @@
           <a:bodyPr wrap="square" lIns="0" tIns="0" rIns="0" bIns="0" rtlCol="0" anchor="ctr"/>
           <a:lstStyle/>
           <a:p>
-            <a:pPr indent="0" marL="0">
+            <a:pPr marL="0" indent="0">
               <a:buNone/>
             </a:pPr>
             <a:r>
@@ -7858,13 +9348,20 @@
             <a:prstDash val="solid"/>
           </a:ln>
           <a:effectLst>
-            <a:outerShdw sx="100000" sy="100000" kx="0" ky="0" algn="bl" rotWithShape="0" blurRad="76200" dist="25400" dir="5400000">
+            <a:outerShdw blurRad="76200" dist="25400" dir="5400000" algn="bl" rotWithShape="0">
               <a:srgbClr val="99BBBB">
                 <a:alpha val="25000"/>
               </a:srgbClr>
             </a:outerShdw>
           </a:effectLst>
         </p:spPr>
+        <p:txBody>
+          <a:bodyPr/>
+          <a:lstStyle/>
+          <a:p>
+            <a:endParaRPr lang="en-US"/>
+          </a:p>
+        </p:txBody>
       </p:sp>
       <p:sp>
         <p:nvSpPr>
@@ -7887,7 +9384,7 @@
           <a:bodyPr wrap="square" lIns="0" tIns="0" rIns="0" bIns="0" rtlCol="0" anchor="ctr"/>
           <a:lstStyle/>
           <a:p>
-            <a:pPr indent="0" marL="0">
+            <a:pPr marL="0" indent="0">
               <a:buNone/>
             </a:pPr>
             <a:r>
@@ -7926,7 +9423,7 @@
           <a:bodyPr wrap="square" lIns="0" tIns="0" rIns="0" bIns="0" rtlCol="0" anchor="ctr"/>
           <a:lstStyle/>
           <a:p>
-            <a:pPr indent="0" marL="0">
+            <a:pPr marL="0" indent="0">
               <a:buNone/>
             </a:pPr>
             <a:r>
@@ -7965,7 +9462,7 @@
           <a:bodyPr wrap="square" rtlCol="0" anchor="ctr"/>
           <a:lstStyle/>
           <a:p>
-            <a:pPr algn="r" indent="0" marL="0">
+            <a:pPr marL="0" indent="0" algn="r">
               <a:buNone/>
             </a:pPr>
             <a:r>
@@ -7999,6 +9496,7 @@
         <a:solidFill>
           <a:srgbClr val="F4F7F7"/>
         </a:solidFill>
+        <a:effectLst/>
       </p:bgPr>
     </p:bg>
     <p:spTree>
@@ -8036,11 +9534,11 @@
           <a:bodyPr wrap="square" lIns="0" tIns="0" rIns="0" bIns="0" rtlCol="0" anchor="ctr"/>
           <a:lstStyle/>
           <a:p>
-            <a:pPr indent="0" marL="0">
-              <a:buNone/>
-            </a:pPr>
-            <a:r>
-              <a:rPr lang="en-US" sz="1200" b="1" spc="200" kern="0" dirty="0">
+            <a:pPr marL="0" indent="0">
+              <a:buNone/>
+            </a:pPr>
+            <a:r>
+              <a:rPr lang="en-US" sz="1200" b="1" kern="0" spc="200" dirty="0">
                 <a:solidFill>
                   <a:srgbClr val="028090"/>
                 </a:solidFill>
@@ -8075,7 +9573,7 @@
           <a:bodyPr wrap="square" lIns="0" tIns="0" rIns="0" bIns="0" rtlCol="0" anchor="ctr"/>
           <a:lstStyle/>
           <a:p>
-            <a:pPr indent="0" marL="0">
+            <a:pPr marL="0" indent="0">
               <a:buNone/>
             </a:pPr>
             <a:r>
@@ -8114,6 +9612,13 @@
           </a:solidFill>
           <a:ln/>
         </p:spPr>
+        <p:txBody>
+          <a:bodyPr/>
+          <a:lstStyle/>
+          <a:p>
+            <a:endParaRPr lang="en-US"/>
+          </a:p>
+        </p:txBody>
       </p:sp>
       <p:sp>
         <p:nvSpPr>
@@ -8136,7 +9641,7 @@
           <a:bodyPr wrap="square" lIns="0" tIns="0" rIns="0" bIns="0" rtlCol="0" anchor="ctr"/>
           <a:lstStyle/>
           <a:p>
-            <a:pPr indent="0" marL="0">
+            <a:pPr marL="0" indent="0">
               <a:buNone/>
             </a:pPr>
             <a:r>
@@ -8150,9 +9655,6 @@
               </a:rPr>
               <a:t>Core question:  </a:t>
             </a:r>
-            <a:pPr indent="0" marL="0">
-              <a:buNone/>
-            </a:pPr>
             <a:r>
               <a:rPr lang="en-US" sz="1800" dirty="0">
                 <a:solidFill>
@@ -8194,6 +9696,13 @@
             <a:prstDash val="solid"/>
           </a:ln>
         </p:spPr>
+        <p:txBody>
+          <a:bodyPr/>
+          <a:lstStyle/>
+          <a:p>
+            <a:endParaRPr lang="en-US"/>
+          </a:p>
+        </p:txBody>
       </p:sp>
       <p:sp>
         <p:nvSpPr>
@@ -8214,6 +9723,13 @@
           </a:solidFill>
           <a:ln/>
         </p:spPr>
+        <p:txBody>
+          <a:bodyPr/>
+          <a:lstStyle/>
+          <a:p>
+            <a:endParaRPr lang="en-US"/>
+          </a:p>
+        </p:txBody>
       </p:sp>
       <p:sp>
         <p:nvSpPr>
@@ -8236,7 +9752,7 @@
           <a:bodyPr wrap="square" lIns="0" tIns="0" rIns="0" bIns="0" rtlCol="0" anchor="ctr"/>
           <a:lstStyle/>
           <a:p>
-            <a:pPr algn="ctr" indent="0" marL="0">
+            <a:pPr marL="0" indent="0" algn="ctr">
               <a:buNone/>
             </a:pPr>
             <a:r>
@@ -8275,7 +9791,7 @@
           <a:bodyPr wrap="square" lIns="0" tIns="0" rIns="0" bIns="0" rtlCol="0" anchor="ctr"/>
           <a:lstStyle/>
           <a:p>
-            <a:pPr indent="0" marL="0">
+            <a:pPr marL="0" indent="0">
               <a:buNone/>
             </a:pPr>
             <a:r>
@@ -8314,7 +9830,7 @@
           <a:bodyPr wrap="square" lIns="0" tIns="0" rIns="0" bIns="0" rtlCol="0" anchor="ctr"/>
           <a:lstStyle/>
           <a:p>
-            <a:pPr indent="0" marL="0">
+            <a:pPr marL="0" indent="0">
               <a:buNone/>
             </a:pPr>
             <a:r>
@@ -8358,6 +9874,13 @@
             <a:prstDash val="solid"/>
           </a:ln>
         </p:spPr>
+        <p:txBody>
+          <a:bodyPr/>
+          <a:lstStyle/>
+          <a:p>
+            <a:endParaRPr lang="en-US"/>
+          </a:p>
+        </p:txBody>
       </p:sp>
       <p:sp>
         <p:nvSpPr>
@@ -8378,6 +9901,13 @@
           </a:solidFill>
           <a:ln/>
         </p:spPr>
+        <p:txBody>
+          <a:bodyPr/>
+          <a:lstStyle/>
+          <a:p>
+            <a:endParaRPr lang="en-US"/>
+          </a:p>
+        </p:txBody>
       </p:sp>
       <p:sp>
         <p:nvSpPr>
@@ -8400,7 +9930,7 @@
           <a:bodyPr wrap="square" lIns="0" tIns="0" rIns="0" bIns="0" rtlCol="0" anchor="ctr"/>
           <a:lstStyle/>
           <a:p>
-            <a:pPr algn="ctr" indent="0" marL="0">
+            <a:pPr marL="0" indent="0" algn="ctr">
               <a:buNone/>
             </a:pPr>
             <a:r>
@@ -8439,7 +9969,7 @@
           <a:bodyPr wrap="square" lIns="0" tIns="0" rIns="0" bIns="0" rtlCol="0" anchor="ctr"/>
           <a:lstStyle/>
           <a:p>
-            <a:pPr indent="0" marL="0">
+            <a:pPr marL="0" indent="0">
               <a:buNone/>
             </a:pPr>
             <a:r>
@@ -8478,7 +10008,7 @@
           <a:bodyPr wrap="square" lIns="0" tIns="0" rIns="0" bIns="0" rtlCol="0" anchor="ctr"/>
           <a:lstStyle/>
           <a:p>
-            <a:pPr indent="0" marL="0">
+            <a:pPr marL="0" indent="0">
               <a:buNone/>
             </a:pPr>
             <a:r>
@@ -8522,6 +10052,13 @@
             <a:prstDash val="solid"/>
           </a:ln>
         </p:spPr>
+        <p:txBody>
+          <a:bodyPr/>
+          <a:lstStyle/>
+          <a:p>
+            <a:endParaRPr lang="en-US"/>
+          </a:p>
+        </p:txBody>
       </p:sp>
       <p:sp>
         <p:nvSpPr>
@@ -8542,6 +10079,13 @@
           </a:solidFill>
           <a:ln/>
         </p:spPr>
+        <p:txBody>
+          <a:bodyPr/>
+          <a:lstStyle/>
+          <a:p>
+            <a:endParaRPr lang="en-US"/>
+          </a:p>
+        </p:txBody>
       </p:sp>
       <p:sp>
         <p:nvSpPr>
@@ -8564,7 +10108,7 @@
           <a:bodyPr wrap="square" lIns="0" tIns="0" rIns="0" bIns="0" rtlCol="0" anchor="ctr"/>
           <a:lstStyle/>
           <a:p>
-            <a:pPr algn="ctr" indent="0" marL="0">
+            <a:pPr marL="0" indent="0" algn="ctr">
               <a:buNone/>
             </a:pPr>
             <a:r>
@@ -8603,7 +10147,7 @@
           <a:bodyPr wrap="square" lIns="0" tIns="0" rIns="0" bIns="0" rtlCol="0" anchor="ctr"/>
           <a:lstStyle/>
           <a:p>
-            <a:pPr indent="0" marL="0">
+            <a:pPr marL="0" indent="0">
               <a:buNone/>
             </a:pPr>
             <a:r>
@@ -8642,7 +10186,7 @@
           <a:bodyPr wrap="square" lIns="0" tIns="0" rIns="0" bIns="0" rtlCol="0" anchor="ctr"/>
           <a:lstStyle/>
           <a:p>
-            <a:pPr indent="0" marL="0">
+            <a:pPr marL="0" indent="0">
               <a:buNone/>
             </a:pPr>
             <a:r>
@@ -8681,7 +10225,7 @@
           <a:bodyPr wrap="square" rtlCol="0" anchor="ctr"/>
           <a:lstStyle/>
           <a:p>
-            <a:pPr algn="r" indent="0" marL="0">
+            <a:pPr marL="0" indent="0" algn="r">
               <a:buNone/>
             </a:pPr>
             <a:r>
@@ -8715,6 +10259,7 @@
         <a:solidFill>
           <a:srgbClr val="F4F7F7"/>
         </a:solidFill>
+        <a:effectLst/>
       </p:bgPr>
     </p:bg>
     <p:spTree>
@@ -8752,11 +10297,11 @@
           <a:bodyPr wrap="square" lIns="0" tIns="0" rIns="0" bIns="0" rtlCol="0" anchor="ctr"/>
           <a:lstStyle/>
           <a:p>
-            <a:pPr indent="0" marL="0">
-              <a:buNone/>
-            </a:pPr>
-            <a:r>
-              <a:rPr lang="en-US" sz="1200" b="1" spc="200" kern="0" dirty="0">
+            <a:pPr marL="0" indent="0">
+              <a:buNone/>
+            </a:pPr>
+            <a:r>
+              <a:rPr lang="en-US" sz="1200" b="1" kern="0" spc="200" dirty="0">
                 <a:solidFill>
                   <a:srgbClr val="028090"/>
                 </a:solidFill>
@@ -8791,7 +10336,7 @@
           <a:bodyPr wrap="square" lIns="0" tIns="0" rIns="0" bIns="0" rtlCol="0" anchor="ctr"/>
           <a:lstStyle/>
           <a:p>
-            <a:pPr indent="0" marL="0">
+            <a:pPr marL="0" indent="0">
               <a:buNone/>
             </a:pPr>
             <a:r>
@@ -8830,11 +10375,11 @@
           <a:bodyPr wrap="square" lIns="0" tIns="0" rIns="0" bIns="0" rtlCol="0" anchor="ctr"/>
           <a:lstStyle/>
           <a:p>
-            <a:pPr indent="0" marL="0">
-              <a:buNone/>
-            </a:pPr>
-            <a:r>
-              <a:rPr lang="en-US" sz="1300" b="1" spc="100" kern="0" dirty="0">
+            <a:pPr marL="0" indent="0">
+              <a:buNone/>
+            </a:pPr>
+            <a:r>
+              <a:rPr lang="en-US" sz="1300" b="1" kern="0" spc="100" dirty="0">
                 <a:solidFill>
                   <a:srgbClr val="028090"/>
                 </a:solidFill>
@@ -8869,7 +10414,7 @@
           <a:bodyPr wrap="square" lIns="0" tIns="0" rIns="0" bIns="0" rtlCol="0" anchor="ctr"/>
           <a:lstStyle/>
           <a:p>
-            <a:pPr indent="0" marL="0">
+            <a:pPr marL="0" indent="0">
               <a:buNone/>
             </a:pPr>
             <a:r>
@@ -8908,7 +10453,7 @@
           <a:bodyPr wrap="square" lIns="0" tIns="0" rIns="0" bIns="0" rtlCol="0" anchor="ctr"/>
           <a:lstStyle/>
           <a:p>
-            <a:pPr indent="0" marL="0">
+            <a:pPr marL="0" indent="0">
               <a:buNone/>
             </a:pPr>
             <a:r>
@@ -8952,6 +10497,13 @@
             <a:prstDash val="solid"/>
           </a:ln>
         </p:spPr>
+        <p:txBody>
+          <a:bodyPr/>
+          <a:lstStyle/>
+          <a:p>
+            <a:endParaRPr lang="en-US"/>
+          </a:p>
+        </p:txBody>
       </p:sp>
       <p:sp>
         <p:nvSpPr>
@@ -8972,6 +10524,13 @@
           </a:solidFill>
           <a:ln/>
         </p:spPr>
+        <p:txBody>
+          <a:bodyPr/>
+          <a:lstStyle/>
+          <a:p>
+            <a:endParaRPr lang="en-US"/>
+          </a:p>
+        </p:txBody>
       </p:sp>
       <p:sp>
         <p:nvSpPr>
@@ -8994,7 +10553,7 @@
           <a:bodyPr wrap="square" lIns="0" tIns="0" rIns="0" bIns="0" rtlCol="0" anchor="ctr"/>
           <a:lstStyle/>
           <a:p>
-            <a:pPr algn="ctr" indent="0" marL="0">
+            <a:pPr marL="0" indent="0" algn="ctr">
               <a:buNone/>
             </a:pPr>
             <a:r>
@@ -9033,7 +10592,7 @@
           <a:bodyPr wrap="square" lIns="0" tIns="0" rIns="0" bIns="0" rtlCol="0" anchor="ctr"/>
           <a:lstStyle/>
           <a:p>
-            <a:pPr indent="0" marL="0">
+            <a:pPr marL="0" indent="0">
               <a:buNone/>
             </a:pPr>
             <a:r>
@@ -9072,7 +10631,7 @@
           <a:bodyPr wrap="square" lIns="0" tIns="0" rIns="0" bIns="0" rtlCol="0" anchor="ctr"/>
           <a:lstStyle/>
           <a:p>
-            <a:pPr indent="0" marL="0">
+            <a:pPr marL="0" indent="0">
               <a:buNone/>
             </a:pPr>
             <a:r>
@@ -9116,6 +10675,13 @@
             <a:prstDash val="solid"/>
           </a:ln>
         </p:spPr>
+        <p:txBody>
+          <a:bodyPr/>
+          <a:lstStyle/>
+          <a:p>
+            <a:endParaRPr lang="en-US"/>
+          </a:p>
+        </p:txBody>
       </p:sp>
       <p:sp>
         <p:nvSpPr>
@@ -9136,6 +10702,13 @@
           </a:solidFill>
           <a:ln/>
         </p:spPr>
+        <p:txBody>
+          <a:bodyPr/>
+          <a:lstStyle/>
+          <a:p>
+            <a:endParaRPr lang="en-US"/>
+          </a:p>
+        </p:txBody>
       </p:sp>
       <p:sp>
         <p:nvSpPr>
@@ -9158,7 +10731,7 @@
           <a:bodyPr wrap="square" lIns="0" tIns="0" rIns="0" bIns="0" rtlCol="0" anchor="ctr"/>
           <a:lstStyle/>
           <a:p>
-            <a:pPr algn="ctr" indent="0" marL="0">
+            <a:pPr marL="0" indent="0" algn="ctr">
               <a:buNone/>
             </a:pPr>
             <a:r>
@@ -9197,7 +10770,7 @@
           <a:bodyPr wrap="square" lIns="0" tIns="0" rIns="0" bIns="0" rtlCol="0" anchor="ctr"/>
           <a:lstStyle/>
           <a:p>
-            <a:pPr indent="0" marL="0">
+            <a:pPr marL="0" indent="0">
               <a:buNone/>
             </a:pPr>
             <a:r>
@@ -9236,7 +10809,7 @@
           <a:bodyPr wrap="square" lIns="0" tIns="0" rIns="0" bIns="0" rtlCol="0" anchor="ctr"/>
           <a:lstStyle/>
           <a:p>
-            <a:pPr indent="0" marL="0">
+            <a:pPr marL="0" indent="0">
               <a:buNone/>
             </a:pPr>
             <a:r>
@@ -9280,6 +10853,13 @@
             <a:prstDash val="solid"/>
           </a:ln>
         </p:spPr>
+        <p:txBody>
+          <a:bodyPr/>
+          <a:lstStyle/>
+          <a:p>
+            <a:endParaRPr lang="en-US"/>
+          </a:p>
+        </p:txBody>
       </p:sp>
       <p:sp>
         <p:nvSpPr>
@@ -9300,6 +10880,13 @@
           </a:solidFill>
           <a:ln/>
         </p:spPr>
+        <p:txBody>
+          <a:bodyPr/>
+          <a:lstStyle/>
+          <a:p>
+            <a:endParaRPr lang="en-US"/>
+          </a:p>
+        </p:txBody>
       </p:sp>
       <p:sp>
         <p:nvSpPr>
@@ -9322,7 +10909,7 @@
           <a:bodyPr wrap="square" lIns="0" tIns="0" rIns="0" bIns="0" rtlCol="0" anchor="ctr"/>
           <a:lstStyle/>
           <a:p>
-            <a:pPr algn="ctr" indent="0" marL="0">
+            <a:pPr marL="0" indent="0" algn="ctr">
               <a:buNone/>
             </a:pPr>
             <a:r>
@@ -9361,7 +10948,7 @@
           <a:bodyPr wrap="square" lIns="0" tIns="0" rIns="0" bIns="0" rtlCol="0" anchor="ctr"/>
           <a:lstStyle/>
           <a:p>
-            <a:pPr indent="0" marL="0">
+            <a:pPr marL="0" indent="0">
               <a:buNone/>
             </a:pPr>
             <a:r>
@@ -9400,7 +10987,7 @@
           <a:bodyPr wrap="square" lIns="0" tIns="0" rIns="0" bIns="0" rtlCol="0" anchor="ctr"/>
           <a:lstStyle/>
           <a:p>
-            <a:pPr indent="0" marL="0">
+            <a:pPr marL="0" indent="0">
               <a:buNone/>
             </a:pPr>
             <a:r>
@@ -9444,6 +11031,13 @@
             <a:prstDash val="solid"/>
           </a:ln>
         </p:spPr>
+        <p:txBody>
+          <a:bodyPr/>
+          <a:lstStyle/>
+          <a:p>
+            <a:endParaRPr lang="en-US"/>
+          </a:p>
+        </p:txBody>
       </p:sp>
       <p:sp>
         <p:nvSpPr>
@@ -9464,6 +11058,13 @@
           </a:solidFill>
           <a:ln/>
         </p:spPr>
+        <p:txBody>
+          <a:bodyPr/>
+          <a:lstStyle/>
+          <a:p>
+            <a:endParaRPr lang="en-US"/>
+          </a:p>
+        </p:txBody>
       </p:sp>
       <p:sp>
         <p:nvSpPr>
@@ -9486,7 +11087,7 @@
           <a:bodyPr wrap="square" lIns="0" tIns="0" rIns="0" bIns="0" rtlCol="0" anchor="ctr"/>
           <a:lstStyle/>
           <a:p>
-            <a:pPr algn="ctr" indent="0" marL="0">
+            <a:pPr marL="0" indent="0" algn="ctr">
               <a:buNone/>
             </a:pPr>
             <a:r>
@@ -9525,7 +11126,7 @@
           <a:bodyPr wrap="square" lIns="0" tIns="0" rIns="0" bIns="0" rtlCol="0" anchor="ctr"/>
           <a:lstStyle/>
           <a:p>
-            <a:pPr indent="0" marL="0">
+            <a:pPr marL="0" indent="0">
               <a:buNone/>
             </a:pPr>
             <a:r>
@@ -9564,7 +11165,7 @@
           <a:bodyPr wrap="square" lIns="0" tIns="0" rIns="0" bIns="0" rtlCol="0" anchor="ctr"/>
           <a:lstStyle/>
           <a:p>
-            <a:pPr indent="0" marL="0">
+            <a:pPr marL="0" indent="0">
               <a:buNone/>
             </a:pPr>
             <a:r>
@@ -9603,7 +11204,7 @@
           <a:bodyPr wrap="square" rtlCol="0" anchor="ctr"/>
           <a:lstStyle/>
           <a:p>
-            <a:pPr algn="r" indent="0" marL="0">
+            <a:pPr marL="0" indent="0" algn="r">
               <a:buNone/>
             </a:pPr>
             <a:r>
@@ -9637,6 +11238,7 @@
         <a:solidFill>
           <a:srgbClr val="F4F7F7"/>
         </a:solidFill>
+        <a:effectLst/>
       </p:bgPr>
     </p:bg>
     <p:spTree>
@@ -9674,11 +11276,11 @@
           <a:bodyPr wrap="square" lIns="0" tIns="0" rIns="0" bIns="0" rtlCol="0" anchor="ctr"/>
           <a:lstStyle/>
           <a:p>
-            <a:pPr indent="0" marL="0">
-              <a:buNone/>
-            </a:pPr>
-            <a:r>
-              <a:rPr lang="en-US" sz="1200" b="1" spc="200" kern="0" dirty="0">
+            <a:pPr marL="0" indent="0">
+              <a:buNone/>
+            </a:pPr>
+            <a:r>
+              <a:rPr lang="en-US" sz="1200" b="1" kern="0" spc="200" dirty="0">
                 <a:solidFill>
                   <a:srgbClr val="028090"/>
                 </a:solidFill>
@@ -9713,7 +11315,7 @@
           <a:bodyPr wrap="square" lIns="0" tIns="0" rIns="0" bIns="0" rtlCol="0" anchor="ctr"/>
           <a:lstStyle/>
           <a:p>
-            <a:pPr indent="0" marL="0">
+            <a:pPr marL="0" indent="0">
               <a:buNone/>
             </a:pPr>
             <a:r>
@@ -9750,6 +11352,13 @@
           </a:solidFill>
           <a:ln/>
         </p:spPr>
+        <p:txBody>
+          <a:bodyPr/>
+          <a:lstStyle/>
+          <a:p>
+            <a:endParaRPr lang="en-US"/>
+          </a:p>
+        </p:txBody>
       </p:sp>
       <p:sp>
         <p:nvSpPr>
@@ -9772,7 +11381,7 @@
           <a:bodyPr wrap="square" lIns="762" tIns="762" rIns="762" bIns="762" rtlCol="0" anchor="ctr"/>
           <a:lstStyle/>
           <a:p>
-            <a:pPr indent="0" marL="0">
+            <a:pPr marL="0" indent="0">
               <a:buNone/>
             </a:pPr>
             <a:r>
@@ -9811,7 +11420,7 @@
           <a:bodyPr wrap="square" lIns="762" tIns="762" rIns="762" bIns="762" rtlCol="0" anchor="ctr"/>
           <a:lstStyle/>
           <a:p>
-            <a:pPr indent="0" marL="0">
+            <a:pPr marL="0" indent="0">
               <a:buNone/>
             </a:pPr>
             <a:r>
@@ -9850,7 +11459,7 @@
           <a:bodyPr wrap="square" lIns="762" tIns="762" rIns="762" bIns="762" rtlCol="0" anchor="ctr"/>
           <a:lstStyle/>
           <a:p>
-            <a:pPr indent="0" marL="0">
+            <a:pPr marL="0" indent="0">
               <a:buNone/>
             </a:pPr>
             <a:r>
@@ -9887,6 +11496,13 @@
           </a:solidFill>
           <a:ln/>
         </p:spPr>
+        <p:txBody>
+          <a:bodyPr/>
+          <a:lstStyle/>
+          <a:p>
+            <a:endParaRPr lang="en-US"/>
+          </a:p>
+        </p:txBody>
       </p:sp>
       <p:sp>
         <p:nvSpPr>
@@ -9909,7 +11525,7 @@
           <a:bodyPr wrap="square" lIns="1016" tIns="1016" rIns="1016" bIns="1016" rtlCol="0" anchor="ctr"/>
           <a:lstStyle/>
           <a:p>
-            <a:pPr indent="0" marL="0">
+            <a:pPr marL="0" indent="0">
               <a:buNone/>
             </a:pPr>
             <a:r>
@@ -9948,7 +11564,7 @@
           <a:bodyPr wrap="square" lIns="1016" tIns="1016" rIns="1016" bIns="1016" rtlCol="0" anchor="ctr"/>
           <a:lstStyle/>
           <a:p>
-            <a:pPr indent="0" marL="0">
+            <a:pPr marL="0" indent="0">
               <a:buNone/>
             </a:pPr>
             <a:r>
@@ -9987,7 +11603,7 @@
           <a:bodyPr wrap="square" lIns="1016" tIns="1016" rIns="1016" bIns="1016" rtlCol="0" anchor="ctr"/>
           <a:lstStyle/>
           <a:p>
-            <a:pPr indent="0" marL="0">
+            <a:pPr marL="0" indent="0">
               <a:buNone/>
             </a:pPr>
             <a:r>
@@ -10024,6 +11640,13 @@
           </a:solidFill>
           <a:ln/>
         </p:spPr>
+        <p:txBody>
+          <a:bodyPr/>
+          <a:lstStyle/>
+          <a:p>
+            <a:endParaRPr lang="en-US"/>
+          </a:p>
+        </p:txBody>
       </p:sp>
       <p:sp>
         <p:nvSpPr>
@@ -10046,7 +11669,7 @@
           <a:bodyPr wrap="square" lIns="1016" tIns="1016" rIns="1016" bIns="1016" rtlCol="0" anchor="ctr"/>
           <a:lstStyle/>
           <a:p>
-            <a:pPr indent="0" marL="0">
+            <a:pPr marL="0" indent="0">
               <a:buNone/>
             </a:pPr>
             <a:r>
@@ -10085,7 +11708,7 @@
           <a:bodyPr wrap="square" lIns="1016" tIns="1016" rIns="1016" bIns="1016" rtlCol="0" anchor="ctr"/>
           <a:lstStyle/>
           <a:p>
-            <a:pPr indent="0" marL="0">
+            <a:pPr marL="0" indent="0">
               <a:buNone/>
             </a:pPr>
             <a:r>
@@ -10124,7 +11747,7 @@
           <a:bodyPr wrap="square" lIns="1016" tIns="1016" rIns="1016" bIns="1016" rtlCol="0" anchor="ctr"/>
           <a:lstStyle/>
           <a:p>
-            <a:pPr indent="0" marL="0">
+            <a:pPr marL="0" indent="0">
               <a:buNone/>
             </a:pPr>
             <a:r>
@@ -10161,6 +11784,13 @@
           </a:solidFill>
           <a:ln/>
         </p:spPr>
+        <p:txBody>
+          <a:bodyPr/>
+          <a:lstStyle/>
+          <a:p>
+            <a:endParaRPr lang="en-US"/>
+          </a:p>
+        </p:txBody>
       </p:sp>
       <p:sp>
         <p:nvSpPr>
@@ -10183,7 +11813,7 @@
           <a:bodyPr wrap="square" lIns="1016" tIns="1016" rIns="1016" bIns="1016" rtlCol="0" anchor="ctr"/>
           <a:lstStyle/>
           <a:p>
-            <a:pPr indent="0" marL="0">
+            <a:pPr marL="0" indent="0">
               <a:buNone/>
             </a:pPr>
             <a:r>
@@ -10222,7 +11852,7 @@
           <a:bodyPr wrap="square" lIns="1016" tIns="1016" rIns="1016" bIns="1016" rtlCol="0" anchor="ctr"/>
           <a:lstStyle/>
           <a:p>
-            <a:pPr indent="0" marL="0">
+            <a:pPr marL="0" indent="0">
               <a:buNone/>
             </a:pPr>
             <a:r>
@@ -10261,7 +11891,7 @@
           <a:bodyPr wrap="square" lIns="1016" tIns="1016" rIns="1016" bIns="1016" rtlCol="0" anchor="ctr"/>
           <a:lstStyle/>
           <a:p>
-            <a:pPr indent="0" marL="0">
+            <a:pPr marL="0" indent="0">
               <a:buNone/>
             </a:pPr>
             <a:r>
@@ -10298,6 +11928,13 @@
           </a:solidFill>
           <a:ln/>
         </p:spPr>
+        <p:txBody>
+          <a:bodyPr/>
+          <a:lstStyle/>
+          <a:p>
+            <a:endParaRPr lang="en-US"/>
+          </a:p>
+        </p:txBody>
       </p:sp>
       <p:sp>
         <p:nvSpPr>
@@ -10320,7 +11957,7 @@
           <a:bodyPr wrap="square" lIns="1016" tIns="1016" rIns="1016" bIns="1016" rtlCol="0" anchor="ctr"/>
           <a:lstStyle/>
           <a:p>
-            <a:pPr indent="0" marL="0">
+            <a:pPr marL="0" indent="0">
               <a:buNone/>
             </a:pPr>
             <a:r>
@@ -10359,7 +11996,7 @@
           <a:bodyPr wrap="square" lIns="1016" tIns="1016" rIns="1016" bIns="1016" rtlCol="0" anchor="ctr"/>
           <a:lstStyle/>
           <a:p>
-            <a:pPr indent="0" marL="0">
+            <a:pPr marL="0" indent="0">
               <a:buNone/>
             </a:pPr>
             <a:r>
@@ -10398,7 +12035,7 @@
           <a:bodyPr wrap="square" lIns="1016" tIns="1016" rIns="1016" bIns="1016" rtlCol="0" anchor="ctr"/>
           <a:lstStyle/>
           <a:p>
-            <a:pPr indent="0" marL="0">
+            <a:pPr marL="0" indent="0">
               <a:buNone/>
             </a:pPr>
             <a:r>
@@ -10437,6 +12074,13 @@
           </a:solidFill>
           <a:ln/>
         </p:spPr>
+        <p:txBody>
+          <a:bodyPr/>
+          <a:lstStyle/>
+          <a:p>
+            <a:endParaRPr lang="en-US"/>
+          </a:p>
+        </p:txBody>
       </p:sp>
       <p:sp>
         <p:nvSpPr>
@@ -10459,7 +12103,7 @@
           <a:bodyPr wrap="square" lIns="0" tIns="0" rIns="0" bIns="0" rtlCol="0" anchor="ctr"/>
           <a:lstStyle/>
           <a:p>
-            <a:pPr indent="0" marL="0">
+            <a:pPr marL="0" indent="0">
               <a:buNone/>
             </a:pPr>
             <a:r>
@@ -10473,9 +12117,6 @@
               </a:rPr>
               <a:t>The gap:  </a:t>
             </a:r>
-            <a:pPr indent="0" marL="0">
-              <a:buNone/>
-            </a:pPr>
             <a:r>
               <a:rPr lang="en-US" sz="1350" dirty="0">
                 <a:solidFill>
@@ -10512,7 +12153,7 @@
           <a:bodyPr wrap="square" rtlCol="0" anchor="ctr"/>
           <a:lstStyle/>
           <a:p>
-            <a:pPr algn="r" indent="0" marL="0">
+            <a:pPr marL="0" indent="0" algn="r">
               <a:buNone/>
             </a:pPr>
             <a:r>
@@ -10546,6 +12187,7 @@
         <a:solidFill>
           <a:srgbClr val="F4F7F7"/>
         </a:solidFill>
+        <a:effectLst/>
       </p:bgPr>
     </p:bg>
     <p:spTree>
@@ -10583,11 +12225,11 @@
           <a:bodyPr wrap="square" lIns="0" tIns="0" rIns="0" bIns="0" rtlCol="0" anchor="ctr"/>
           <a:lstStyle/>
           <a:p>
-            <a:pPr indent="0" marL="0">
-              <a:buNone/>
-            </a:pPr>
-            <a:r>
-              <a:rPr lang="en-US" sz="1200" b="1" spc="200" kern="0" dirty="0">
+            <a:pPr marL="0" indent="0">
+              <a:buNone/>
+            </a:pPr>
+            <a:r>
+              <a:rPr lang="en-US" sz="1200" b="1" kern="0" spc="200" dirty="0">
                 <a:solidFill>
                   <a:srgbClr val="028090"/>
                 </a:solidFill>
@@ -10622,7 +12264,7 @@
           <a:bodyPr wrap="square" lIns="0" tIns="0" rIns="0" bIns="0" rtlCol="0" anchor="ctr"/>
           <a:lstStyle/>
           <a:p>
-            <a:pPr indent="0" marL="0">
+            <a:pPr marL="0" indent="0">
               <a:buNone/>
             </a:pPr>
             <a:r>
@@ -10642,14 +12284,14 @@
       </p:sp>
       <p:pic>
         <p:nvPicPr>
-          <p:cNvPr id="4" name="Image 0" descr="fig_arch.png">    </p:cNvPr>
+          <p:cNvPr id="4" name="Image 0" descr="fig_arch.png"/>
           <p:cNvPicPr>
             <a:picLocks noChangeAspect="1"/>
           </p:cNvPicPr>
           <p:nvPr/>
         </p:nvPicPr>
         <p:blipFill>
-          <a:blip r:embed="rId1"/>
+          <a:blip r:embed="rId3"/>
           <a:stretch>
             <a:fillRect/>
           </a:stretch>
@@ -10690,6 +12332,13 @@
             <a:prstDash val="solid"/>
           </a:ln>
         </p:spPr>
+        <p:txBody>
+          <a:bodyPr/>
+          <a:lstStyle/>
+          <a:p>
+            <a:endParaRPr lang="en-US"/>
+          </a:p>
+        </p:txBody>
       </p:sp>
       <p:sp>
         <p:nvSpPr>
@@ -10710,6 +12359,13 @@
           </a:solidFill>
           <a:ln/>
         </p:spPr>
+        <p:txBody>
+          <a:bodyPr/>
+          <a:lstStyle/>
+          <a:p>
+            <a:endParaRPr lang="en-US"/>
+          </a:p>
+        </p:txBody>
       </p:sp>
       <p:sp>
         <p:nvSpPr>
@@ -10732,7 +12388,7 @@
           <a:bodyPr wrap="square" lIns="0" tIns="0" rIns="0" bIns="0" rtlCol="0" anchor="ctr"/>
           <a:lstStyle/>
           <a:p>
-            <a:pPr algn="ctr" indent="0" marL="0">
+            <a:pPr marL="0" indent="0" algn="ctr">
               <a:buNone/>
             </a:pPr>
             <a:r>
@@ -10771,7 +12427,7 @@
           <a:bodyPr wrap="square" lIns="0" tIns="0" rIns="0" bIns="0" rtlCol="0" anchor="ctr"/>
           <a:lstStyle/>
           <a:p>
-            <a:pPr indent="0" marL="0">
+            <a:pPr marL="0" indent="0">
               <a:buNone/>
             </a:pPr>
             <a:r>
@@ -10810,7 +12466,7 @@
           <a:bodyPr wrap="square" lIns="0" tIns="0" rIns="0" bIns="0" rtlCol="0" anchor="ctr"/>
           <a:lstStyle/>
           <a:p>
-            <a:pPr indent="0" marL="0">
+            <a:pPr marL="0" indent="0">
               <a:buNone/>
             </a:pPr>
             <a:r>
@@ -10854,6 +12510,13 @@
             <a:prstDash val="solid"/>
           </a:ln>
         </p:spPr>
+        <p:txBody>
+          <a:bodyPr/>
+          <a:lstStyle/>
+          <a:p>
+            <a:endParaRPr lang="en-US"/>
+          </a:p>
+        </p:txBody>
       </p:sp>
       <p:sp>
         <p:nvSpPr>
@@ -10874,6 +12537,13 @@
           </a:solidFill>
           <a:ln/>
         </p:spPr>
+        <p:txBody>
+          <a:bodyPr/>
+          <a:lstStyle/>
+          <a:p>
+            <a:endParaRPr lang="en-US"/>
+          </a:p>
+        </p:txBody>
       </p:sp>
       <p:sp>
         <p:nvSpPr>
@@ -10896,7 +12566,7 @@
           <a:bodyPr wrap="square" lIns="0" tIns="0" rIns="0" bIns="0" rtlCol="0" anchor="ctr"/>
           <a:lstStyle/>
           <a:p>
-            <a:pPr algn="ctr" indent="0" marL="0">
+            <a:pPr marL="0" indent="0" algn="ctr">
               <a:buNone/>
             </a:pPr>
             <a:r>
@@ -10935,7 +12605,7 @@
           <a:bodyPr wrap="square" lIns="0" tIns="0" rIns="0" bIns="0" rtlCol="0" anchor="ctr"/>
           <a:lstStyle/>
           <a:p>
-            <a:pPr indent="0" marL="0">
+            <a:pPr marL="0" indent="0">
               <a:buNone/>
             </a:pPr>
             <a:r>
@@ -10974,7 +12644,7 @@
           <a:bodyPr wrap="square" lIns="0" tIns="0" rIns="0" bIns="0" rtlCol="0" anchor="ctr"/>
           <a:lstStyle/>
           <a:p>
-            <a:pPr indent="0" marL="0">
+            <a:pPr marL="0" indent="0">
               <a:buNone/>
             </a:pPr>
             <a:r>
@@ -11018,6 +12688,13 @@
             <a:prstDash val="solid"/>
           </a:ln>
         </p:spPr>
+        <p:txBody>
+          <a:bodyPr/>
+          <a:lstStyle/>
+          <a:p>
+            <a:endParaRPr lang="en-US"/>
+          </a:p>
+        </p:txBody>
       </p:sp>
       <p:sp>
         <p:nvSpPr>
@@ -11038,6 +12715,13 @@
           </a:solidFill>
           <a:ln/>
         </p:spPr>
+        <p:txBody>
+          <a:bodyPr/>
+          <a:lstStyle/>
+          <a:p>
+            <a:endParaRPr lang="en-US"/>
+          </a:p>
+        </p:txBody>
       </p:sp>
       <p:sp>
         <p:nvSpPr>
@@ -11060,7 +12744,7 @@
           <a:bodyPr wrap="square" lIns="0" tIns="0" rIns="0" bIns="0" rtlCol="0" anchor="ctr"/>
           <a:lstStyle/>
           <a:p>
-            <a:pPr algn="ctr" indent="0" marL="0">
+            <a:pPr marL="0" indent="0" algn="ctr">
               <a:buNone/>
             </a:pPr>
             <a:r>
@@ -11099,7 +12783,7 @@
           <a:bodyPr wrap="square" lIns="0" tIns="0" rIns="0" bIns="0" rtlCol="0" anchor="ctr"/>
           <a:lstStyle/>
           <a:p>
-            <a:pPr indent="0" marL="0">
+            <a:pPr marL="0" indent="0">
               <a:buNone/>
             </a:pPr>
             <a:r>
@@ -11138,7 +12822,7 @@
           <a:bodyPr wrap="square" lIns="0" tIns="0" rIns="0" bIns="0" rtlCol="0" anchor="ctr"/>
           <a:lstStyle/>
           <a:p>
-            <a:pPr indent="0" marL="0">
+            <a:pPr marL="0" indent="0">
               <a:buNone/>
             </a:pPr>
             <a:r>
@@ -11182,6 +12866,13 @@
             <a:prstDash val="solid"/>
           </a:ln>
         </p:spPr>
+        <p:txBody>
+          <a:bodyPr/>
+          <a:lstStyle/>
+          <a:p>
+            <a:endParaRPr lang="en-US"/>
+          </a:p>
+        </p:txBody>
       </p:sp>
       <p:sp>
         <p:nvSpPr>
@@ -11202,6 +12893,13 @@
           </a:solidFill>
           <a:ln/>
         </p:spPr>
+        <p:txBody>
+          <a:bodyPr/>
+          <a:lstStyle/>
+          <a:p>
+            <a:endParaRPr lang="en-US"/>
+          </a:p>
+        </p:txBody>
       </p:sp>
       <p:sp>
         <p:nvSpPr>
@@ -11224,7 +12922,7 @@
           <a:bodyPr wrap="square" lIns="0" tIns="0" rIns="0" bIns="0" rtlCol="0" anchor="ctr"/>
           <a:lstStyle/>
           <a:p>
-            <a:pPr algn="ctr" indent="0" marL="0">
+            <a:pPr marL="0" indent="0" algn="ctr">
               <a:buNone/>
             </a:pPr>
             <a:r>
@@ -11263,7 +12961,7 @@
           <a:bodyPr wrap="square" lIns="0" tIns="0" rIns="0" bIns="0" rtlCol="0" anchor="ctr"/>
           <a:lstStyle/>
           <a:p>
-            <a:pPr indent="0" marL="0">
+            <a:pPr marL="0" indent="0">
               <a:buNone/>
             </a:pPr>
             <a:r>
@@ -11302,7 +13000,7 @@
           <a:bodyPr wrap="square" lIns="0" tIns="0" rIns="0" bIns="0" rtlCol="0" anchor="ctr"/>
           <a:lstStyle/>
           <a:p>
-            <a:pPr indent="0" marL="0">
+            <a:pPr marL="0" indent="0">
               <a:buNone/>
             </a:pPr>
             <a:r>
@@ -11346,6 +13044,13 @@
             <a:prstDash val="solid"/>
           </a:ln>
         </p:spPr>
+        <p:txBody>
+          <a:bodyPr/>
+          <a:lstStyle/>
+          <a:p>
+            <a:endParaRPr lang="en-US"/>
+          </a:p>
+        </p:txBody>
       </p:sp>
       <p:sp>
         <p:nvSpPr>
@@ -11366,6 +13071,13 @@
           </a:solidFill>
           <a:ln/>
         </p:spPr>
+        <p:txBody>
+          <a:bodyPr/>
+          <a:lstStyle/>
+          <a:p>
+            <a:endParaRPr lang="en-US"/>
+          </a:p>
+        </p:txBody>
       </p:sp>
       <p:sp>
         <p:nvSpPr>
@@ -11388,7 +13100,7 @@
           <a:bodyPr wrap="square" lIns="0" tIns="0" rIns="0" bIns="0" rtlCol="0" anchor="ctr"/>
           <a:lstStyle/>
           <a:p>
-            <a:pPr algn="ctr" indent="0" marL="0">
+            <a:pPr marL="0" indent="0" algn="ctr">
               <a:buNone/>
             </a:pPr>
             <a:r>
@@ -11427,7 +13139,7 @@
           <a:bodyPr wrap="square" lIns="0" tIns="0" rIns="0" bIns="0" rtlCol="0" anchor="ctr"/>
           <a:lstStyle/>
           <a:p>
-            <a:pPr indent="0" marL="0">
+            <a:pPr marL="0" indent="0">
               <a:buNone/>
             </a:pPr>
             <a:r>
@@ -11466,7 +13178,7 @@
           <a:bodyPr wrap="square" lIns="0" tIns="0" rIns="0" bIns="0" rtlCol="0" anchor="ctr"/>
           <a:lstStyle/>
           <a:p>
-            <a:pPr indent="0" marL="0">
+            <a:pPr marL="0" indent="0">
               <a:buNone/>
             </a:pPr>
             <a:r>
@@ -11510,6 +13222,13 @@
             <a:prstDash val="solid"/>
           </a:ln>
         </p:spPr>
+        <p:txBody>
+          <a:bodyPr/>
+          <a:lstStyle/>
+          <a:p>
+            <a:endParaRPr lang="en-US"/>
+          </a:p>
+        </p:txBody>
       </p:sp>
       <p:sp>
         <p:nvSpPr>
@@ -11530,6 +13249,13 @@
           </a:solidFill>
           <a:ln/>
         </p:spPr>
+        <p:txBody>
+          <a:bodyPr/>
+          <a:lstStyle/>
+          <a:p>
+            <a:endParaRPr lang="en-US"/>
+          </a:p>
+        </p:txBody>
       </p:sp>
       <p:sp>
         <p:nvSpPr>
@@ -11552,7 +13278,7 @@
           <a:bodyPr wrap="square" lIns="0" tIns="0" rIns="0" bIns="0" rtlCol="0" anchor="ctr"/>
           <a:lstStyle/>
           <a:p>
-            <a:pPr algn="ctr" indent="0" marL="0">
+            <a:pPr marL="0" indent="0" algn="ctr">
               <a:buNone/>
             </a:pPr>
             <a:r>
@@ -11591,7 +13317,7 @@
           <a:bodyPr wrap="square" lIns="0" tIns="0" rIns="0" bIns="0" rtlCol="0" anchor="ctr"/>
           <a:lstStyle/>
           <a:p>
-            <a:pPr indent="0" marL="0">
+            <a:pPr marL="0" indent="0">
               <a:buNone/>
             </a:pPr>
             <a:r>
@@ -11630,7 +13356,7 @@
           <a:bodyPr wrap="square" lIns="0" tIns="0" rIns="0" bIns="0" rtlCol="0" anchor="ctr"/>
           <a:lstStyle/>
           <a:p>
-            <a:pPr indent="0" marL="0">
+            <a:pPr marL="0" indent="0">
               <a:buNone/>
             </a:pPr>
             <a:r>
@@ -11669,7 +13395,7 @@
           <a:bodyPr wrap="square" rtlCol="0" anchor="ctr"/>
           <a:lstStyle/>
           <a:p>
-            <a:pPr algn="r" indent="0" marL="0">
+            <a:pPr marL="0" indent="0" algn="r">
               <a:buNone/>
             </a:pPr>
             <a:r>
@@ -11703,6 +13429,7 @@
         <a:solidFill>
           <a:srgbClr val="F4F7F7"/>
         </a:solidFill>
+        <a:effectLst/>
       </p:bgPr>
     </p:bg>
     <p:spTree>
@@ -11740,11 +13467,11 @@
           <a:bodyPr wrap="square" lIns="0" tIns="0" rIns="0" bIns="0" rtlCol="0" anchor="ctr"/>
           <a:lstStyle/>
           <a:p>
-            <a:pPr indent="0" marL="0">
-              <a:buNone/>
-            </a:pPr>
-            <a:r>
-              <a:rPr lang="en-US" sz="1200" b="1" spc="200" kern="0" dirty="0">
+            <a:pPr marL="0" indent="0">
+              <a:buNone/>
+            </a:pPr>
+            <a:r>
+              <a:rPr lang="en-US" sz="1200" b="1" kern="0" spc="200" dirty="0">
                 <a:solidFill>
                   <a:srgbClr val="028090"/>
                 </a:solidFill>
@@ -11779,7 +13506,7 @@
           <a:bodyPr wrap="square" lIns="0" tIns="0" rIns="0" bIns="0" rtlCol="0" anchor="ctr"/>
           <a:lstStyle/>
           <a:p>
-            <a:pPr indent="0" marL="0">
+            <a:pPr marL="0" indent="0">
               <a:buNone/>
             </a:pPr>
             <a:r>
@@ -11799,14 +13526,14 @@
       </p:sp>
       <p:pic>
         <p:nvPicPr>
-          <p:cNvPr id="4" name="Image 0" descr="fig_dataflow.png">    </p:cNvPr>
+          <p:cNvPr id="4" name="Image 0" descr="fig_dataflow.png"/>
           <p:cNvPicPr>
             <a:picLocks noChangeAspect="1"/>
           </p:cNvPicPr>
           <p:nvPr/>
         </p:nvPicPr>
         <p:blipFill>
-          <a:blip r:embed="rId1"/>
+          <a:blip r:embed="rId3"/>
           <a:stretch>
             <a:fillRect/>
           </a:stretch>
@@ -11842,7 +13569,7 @@
           <a:bodyPr wrap="square" lIns="0" tIns="0" rIns="0" bIns="0" rtlCol="0" anchor="ctr"/>
           <a:lstStyle/>
           <a:p>
-            <a:pPr indent="0" marL="0">
+            <a:pPr marL="0" indent="0">
               <a:buNone/>
             </a:pPr>
             <a:r>
@@ -11886,6 +13613,13 @@
             <a:prstDash val="solid"/>
           </a:ln>
         </p:spPr>
+        <p:txBody>
+          <a:bodyPr/>
+          <a:lstStyle/>
+          <a:p>
+            <a:endParaRPr lang="en-US"/>
+          </a:p>
+        </p:txBody>
       </p:sp>
       <p:sp>
         <p:nvSpPr>
@@ -11908,7 +13642,7 @@
           <a:bodyPr wrap="square" lIns="635" tIns="635" rIns="635" bIns="635" rtlCol="0" anchor="ctr"/>
           <a:lstStyle/>
           <a:p>
-            <a:pPr indent="0" marL="0">
+            <a:pPr marL="0" indent="0">
               <a:buNone/>
             </a:pPr>
             <a:r>
@@ -11947,7 +13681,7 @@
           <a:bodyPr wrap="square" lIns="635" tIns="635" rIns="635" bIns="635" rtlCol="0" anchor="ctr"/>
           <a:lstStyle/>
           <a:p>
-            <a:pPr indent="0" marL="0">
+            <a:pPr marL="0" indent="0">
               <a:buNone/>
             </a:pPr>
             <a:r>
@@ -11991,6 +13725,13 @@
             <a:prstDash val="solid"/>
           </a:ln>
         </p:spPr>
+        <p:txBody>
+          <a:bodyPr/>
+          <a:lstStyle/>
+          <a:p>
+            <a:endParaRPr lang="en-US"/>
+          </a:p>
+        </p:txBody>
       </p:sp>
       <p:sp>
         <p:nvSpPr>
@@ -12013,7 +13754,7 @@
           <a:bodyPr wrap="square" lIns="635" tIns="635" rIns="635" bIns="635" rtlCol="0" anchor="ctr"/>
           <a:lstStyle/>
           <a:p>
-            <a:pPr indent="0" marL="0">
+            <a:pPr marL="0" indent="0">
               <a:buNone/>
             </a:pPr>
             <a:r>
@@ -12052,7 +13793,7 @@
           <a:bodyPr wrap="square" lIns="635" tIns="635" rIns="635" bIns="635" rtlCol="0" anchor="ctr"/>
           <a:lstStyle/>
           <a:p>
-            <a:pPr indent="0" marL="0">
+            <a:pPr marL="0" indent="0">
               <a:buNone/>
             </a:pPr>
             <a:r>
@@ -12096,6 +13837,13 @@
             <a:prstDash val="solid"/>
           </a:ln>
         </p:spPr>
+        <p:txBody>
+          <a:bodyPr/>
+          <a:lstStyle/>
+          <a:p>
+            <a:endParaRPr lang="en-US"/>
+          </a:p>
+        </p:txBody>
       </p:sp>
       <p:sp>
         <p:nvSpPr>
@@ -12118,7 +13866,7 @@
           <a:bodyPr wrap="square" lIns="635" tIns="635" rIns="635" bIns="635" rtlCol="0" anchor="ctr"/>
           <a:lstStyle/>
           <a:p>
-            <a:pPr indent="0" marL="0">
+            <a:pPr marL="0" indent="0">
               <a:buNone/>
             </a:pPr>
             <a:r>
@@ -12157,7 +13905,7 @@
           <a:bodyPr wrap="square" lIns="635" tIns="635" rIns="635" bIns="635" rtlCol="0" anchor="ctr"/>
           <a:lstStyle/>
           <a:p>
-            <a:pPr indent="0" marL="0">
+            <a:pPr marL="0" indent="0">
               <a:buNone/>
             </a:pPr>
             <a:r>
@@ -12201,6 +13949,13 @@
             <a:prstDash val="solid"/>
           </a:ln>
         </p:spPr>
+        <p:txBody>
+          <a:bodyPr/>
+          <a:lstStyle/>
+          <a:p>
+            <a:endParaRPr lang="en-US"/>
+          </a:p>
+        </p:txBody>
       </p:sp>
       <p:sp>
         <p:nvSpPr>
@@ -12223,7 +13978,7 @@
           <a:bodyPr wrap="square" lIns="635" tIns="635" rIns="635" bIns="635" rtlCol="0" anchor="ctr"/>
           <a:lstStyle/>
           <a:p>
-            <a:pPr indent="0" marL="0">
+            <a:pPr marL="0" indent="0">
               <a:buNone/>
             </a:pPr>
             <a:r>
@@ -12262,7 +14017,7 @@
           <a:bodyPr wrap="square" lIns="635" tIns="635" rIns="635" bIns="635" rtlCol="0" anchor="ctr"/>
           <a:lstStyle/>
           <a:p>
-            <a:pPr indent="0" marL="0">
+            <a:pPr marL="0" indent="0">
               <a:buNone/>
             </a:pPr>
             <a:r>
@@ -12306,6 +14061,13 @@
             <a:prstDash val="solid"/>
           </a:ln>
         </p:spPr>
+        <p:txBody>
+          <a:bodyPr/>
+          <a:lstStyle/>
+          <a:p>
+            <a:endParaRPr lang="en-US"/>
+          </a:p>
+        </p:txBody>
       </p:sp>
       <p:sp>
         <p:nvSpPr>
@@ -12328,7 +14090,7 @@
           <a:bodyPr wrap="square" lIns="635" tIns="635" rIns="635" bIns="635" rtlCol="0" anchor="ctr"/>
           <a:lstStyle/>
           <a:p>
-            <a:pPr indent="0" marL="0">
+            <a:pPr marL="0" indent="0">
               <a:buNone/>
             </a:pPr>
             <a:r>
@@ -12367,7 +14129,7 @@
           <a:bodyPr wrap="square" lIns="635" tIns="635" rIns="635" bIns="635" rtlCol="0" anchor="ctr"/>
           <a:lstStyle/>
           <a:p>
-            <a:pPr indent="0" marL="0">
+            <a:pPr marL="0" indent="0">
               <a:buNone/>
             </a:pPr>
             <a:r>
@@ -12406,7 +14168,7 @@
           <a:bodyPr wrap="square" rtlCol="0" anchor="ctr"/>
           <a:lstStyle/>
           <a:p>
-            <a:pPr algn="r" indent="0" marL="0">
+            <a:pPr marL="0" indent="0" algn="r">
               <a:buNone/>
             </a:pPr>
             <a:r>
@@ -12440,6 +14202,7 @@
         <a:solidFill>
           <a:srgbClr val="F4F7F7"/>
         </a:solidFill>
+        <a:effectLst/>
       </p:bgPr>
     </p:bg>
     <p:spTree>
@@ -12477,11 +14240,11 @@
           <a:bodyPr wrap="square" lIns="0" tIns="0" rIns="0" bIns="0" rtlCol="0" anchor="ctr"/>
           <a:lstStyle/>
           <a:p>
-            <a:pPr indent="0" marL="0">
-              <a:buNone/>
-            </a:pPr>
-            <a:r>
-              <a:rPr lang="en-US" sz="1200" b="1" spc="200" kern="0" dirty="0">
+            <a:pPr marL="0" indent="0">
+              <a:buNone/>
+            </a:pPr>
+            <a:r>
+              <a:rPr lang="en-US" sz="1200" b="1" kern="0" spc="200" dirty="0">
                 <a:solidFill>
                   <a:srgbClr val="028090"/>
                 </a:solidFill>
@@ -12516,7 +14279,7 @@
           <a:bodyPr wrap="square" lIns="0" tIns="0" rIns="0" bIns="0" rtlCol="0" anchor="ctr"/>
           <a:lstStyle/>
           <a:p>
-            <a:pPr indent="0" marL="0">
+            <a:pPr marL="0" indent="0">
               <a:buNone/>
             </a:pPr>
             <a:r>
@@ -12560,6 +14323,13 @@
             <a:prstDash val="solid"/>
           </a:ln>
         </p:spPr>
+        <p:txBody>
+          <a:bodyPr/>
+          <a:lstStyle/>
+          <a:p>
+            <a:endParaRPr lang="en-US"/>
+          </a:p>
+        </p:txBody>
       </p:sp>
       <p:sp>
         <p:nvSpPr>
@@ -12580,6 +14350,13 @@
           </a:solidFill>
           <a:ln/>
         </p:spPr>
+        <p:txBody>
+          <a:bodyPr/>
+          <a:lstStyle/>
+          <a:p>
+            <a:endParaRPr lang="en-US"/>
+          </a:p>
+        </p:txBody>
       </p:sp>
       <p:sp>
         <p:nvSpPr>
@@ -12602,7 +14379,7 @@
           <a:bodyPr wrap="square" lIns="0" tIns="0" rIns="0" bIns="0" rtlCol="0" anchor="ctr"/>
           <a:lstStyle/>
           <a:p>
-            <a:pPr algn="ctr" indent="0" marL="0">
+            <a:pPr marL="0" indent="0" algn="ctr">
               <a:buNone/>
             </a:pPr>
             <a:r>
@@ -12641,7 +14418,7 @@
           <a:bodyPr wrap="square" lIns="0" tIns="0" rIns="0" bIns="0" rtlCol="0" anchor="ctr"/>
           <a:lstStyle/>
           <a:p>
-            <a:pPr indent="0" marL="0">
+            <a:pPr marL="0" indent="0">
               <a:buNone/>
             </a:pPr>
             <a:r>
@@ -12680,7 +14457,7 @@
           <a:bodyPr wrap="square" lIns="0" tIns="0" rIns="0" bIns="0" rtlCol="0" anchor="ctr"/>
           <a:lstStyle/>
           <a:p>
-            <a:pPr indent="0" marL="0">
+            <a:pPr marL="0" indent="0">
               <a:buNone/>
             </a:pPr>
             <a:r>
@@ -12724,6 +14501,13 @@
             <a:prstDash val="solid"/>
           </a:ln>
         </p:spPr>
+        <p:txBody>
+          <a:bodyPr/>
+          <a:lstStyle/>
+          <a:p>
+            <a:endParaRPr lang="en-US"/>
+          </a:p>
+        </p:txBody>
       </p:sp>
       <p:sp>
         <p:nvSpPr>
@@ -12744,6 +14528,13 @@
           </a:solidFill>
           <a:ln/>
         </p:spPr>
+        <p:txBody>
+          <a:bodyPr/>
+          <a:lstStyle/>
+          <a:p>
+            <a:endParaRPr lang="en-US"/>
+          </a:p>
+        </p:txBody>
       </p:sp>
       <p:sp>
         <p:nvSpPr>
@@ -12766,7 +14557,7 @@
           <a:bodyPr wrap="square" lIns="0" tIns="0" rIns="0" bIns="0" rtlCol="0" anchor="ctr"/>
           <a:lstStyle/>
           <a:p>
-            <a:pPr algn="ctr" indent="0" marL="0">
+            <a:pPr marL="0" indent="0" algn="ctr">
               <a:buNone/>
             </a:pPr>
             <a:r>
@@ -12805,7 +14596,7 @@
           <a:bodyPr wrap="square" lIns="0" tIns="0" rIns="0" bIns="0" rtlCol="0" anchor="ctr"/>
           <a:lstStyle/>
           <a:p>
-            <a:pPr indent="0" marL="0">
+            <a:pPr marL="0" indent="0">
               <a:buNone/>
             </a:pPr>
             <a:r>
@@ -12844,7 +14635,7 @@
           <a:bodyPr wrap="square" lIns="0" tIns="0" rIns="0" bIns="0" rtlCol="0" anchor="ctr"/>
           <a:lstStyle/>
           <a:p>
-            <a:pPr indent="0" marL="0">
+            <a:pPr marL="0" indent="0">
               <a:buNone/>
             </a:pPr>
             <a:r>
@@ -12888,6 +14679,13 @@
             <a:prstDash val="solid"/>
           </a:ln>
         </p:spPr>
+        <p:txBody>
+          <a:bodyPr/>
+          <a:lstStyle/>
+          <a:p>
+            <a:endParaRPr lang="en-US"/>
+          </a:p>
+        </p:txBody>
       </p:sp>
       <p:sp>
         <p:nvSpPr>
@@ -12908,6 +14706,13 @@
           </a:solidFill>
           <a:ln/>
         </p:spPr>
+        <p:txBody>
+          <a:bodyPr/>
+          <a:lstStyle/>
+          <a:p>
+            <a:endParaRPr lang="en-US"/>
+          </a:p>
+        </p:txBody>
       </p:sp>
       <p:sp>
         <p:nvSpPr>
@@ -12930,7 +14735,7 @@
           <a:bodyPr wrap="square" lIns="0" tIns="0" rIns="0" bIns="0" rtlCol="0" anchor="ctr"/>
           <a:lstStyle/>
           <a:p>
-            <a:pPr algn="ctr" indent="0" marL="0">
+            <a:pPr marL="0" indent="0" algn="ctr">
               <a:buNone/>
             </a:pPr>
             <a:r>
@@ -12969,7 +14774,7 @@
           <a:bodyPr wrap="square" lIns="0" tIns="0" rIns="0" bIns="0" rtlCol="0" anchor="ctr"/>
           <a:lstStyle/>
           <a:p>
-            <a:pPr indent="0" marL="0">
+            <a:pPr marL="0" indent="0">
               <a:buNone/>
             </a:pPr>
             <a:r>
@@ -13008,7 +14813,7 @@
           <a:bodyPr wrap="square" lIns="0" tIns="0" rIns="0" bIns="0" rtlCol="0" anchor="ctr"/>
           <a:lstStyle/>
           <a:p>
-            <a:pPr indent="0" marL="0">
+            <a:pPr marL="0" indent="0">
               <a:buNone/>
             </a:pPr>
             <a:r>
@@ -13052,6 +14857,13 @@
             <a:prstDash val="solid"/>
           </a:ln>
         </p:spPr>
+        <p:txBody>
+          <a:bodyPr/>
+          <a:lstStyle/>
+          <a:p>
+            <a:endParaRPr lang="en-US"/>
+          </a:p>
+        </p:txBody>
       </p:sp>
       <p:sp>
         <p:nvSpPr>
@@ -13072,6 +14884,13 @@
           </a:solidFill>
           <a:ln/>
         </p:spPr>
+        <p:txBody>
+          <a:bodyPr/>
+          <a:lstStyle/>
+          <a:p>
+            <a:endParaRPr lang="en-US"/>
+          </a:p>
+        </p:txBody>
       </p:sp>
       <p:sp>
         <p:nvSpPr>
@@ -13094,7 +14913,7 @@
           <a:bodyPr wrap="square" lIns="0" tIns="0" rIns="0" bIns="0" rtlCol="0" anchor="ctr"/>
           <a:lstStyle/>
           <a:p>
-            <a:pPr algn="ctr" indent="0" marL="0">
+            <a:pPr marL="0" indent="0" algn="ctr">
               <a:buNone/>
             </a:pPr>
             <a:r>
@@ -13133,7 +14952,7 @@
           <a:bodyPr wrap="square" lIns="0" tIns="0" rIns="0" bIns="0" rtlCol="0" anchor="ctr"/>
           <a:lstStyle/>
           <a:p>
-            <a:pPr indent="0" marL="0">
+            <a:pPr marL="0" indent="0">
               <a:buNone/>
             </a:pPr>
             <a:r>
@@ -13172,7 +14991,7 @@
           <a:bodyPr wrap="square" lIns="0" tIns="0" rIns="0" bIns="0" rtlCol="0" anchor="ctr"/>
           <a:lstStyle/>
           <a:p>
-            <a:pPr indent="0" marL="0">
+            <a:pPr marL="0" indent="0">
               <a:buNone/>
             </a:pPr>
             <a:r>
@@ -13216,6 +15035,13 @@
             <a:prstDash val="solid"/>
           </a:ln>
         </p:spPr>
+        <p:txBody>
+          <a:bodyPr/>
+          <a:lstStyle/>
+          <a:p>
+            <a:endParaRPr lang="en-US"/>
+          </a:p>
+        </p:txBody>
       </p:sp>
       <p:sp>
         <p:nvSpPr>
@@ -13236,6 +15062,13 @@
           </a:solidFill>
           <a:ln/>
         </p:spPr>
+        <p:txBody>
+          <a:bodyPr/>
+          <a:lstStyle/>
+          <a:p>
+            <a:endParaRPr lang="en-US"/>
+          </a:p>
+        </p:txBody>
       </p:sp>
       <p:sp>
         <p:nvSpPr>
@@ -13258,7 +15091,7 @@
           <a:bodyPr wrap="square" lIns="0" tIns="0" rIns="0" bIns="0" rtlCol="0" anchor="ctr"/>
           <a:lstStyle/>
           <a:p>
-            <a:pPr algn="ctr" indent="0" marL="0">
+            <a:pPr marL="0" indent="0" algn="ctr">
               <a:buNone/>
             </a:pPr>
             <a:r>
@@ -13297,7 +15130,7 @@
           <a:bodyPr wrap="square" lIns="0" tIns="0" rIns="0" bIns="0" rtlCol="0" anchor="ctr"/>
           <a:lstStyle/>
           <a:p>
-            <a:pPr indent="0" marL="0">
+            <a:pPr marL="0" indent="0">
               <a:buNone/>
             </a:pPr>
             <a:r>
@@ -13336,7 +15169,7 @@
           <a:bodyPr wrap="square" lIns="0" tIns="0" rIns="0" bIns="0" rtlCol="0" anchor="ctr"/>
           <a:lstStyle/>
           <a:p>
-            <a:pPr indent="0" marL="0">
+            <a:pPr marL="0" indent="0">
               <a:buNone/>
             </a:pPr>
             <a:r>
@@ -13380,6 +15213,13 @@
             <a:prstDash val="solid"/>
           </a:ln>
         </p:spPr>
+        <p:txBody>
+          <a:bodyPr/>
+          <a:lstStyle/>
+          <a:p>
+            <a:endParaRPr lang="en-US"/>
+          </a:p>
+        </p:txBody>
       </p:sp>
       <p:sp>
         <p:nvSpPr>
@@ -13400,6 +15240,13 @@
           </a:solidFill>
           <a:ln/>
         </p:spPr>
+        <p:txBody>
+          <a:bodyPr/>
+          <a:lstStyle/>
+          <a:p>
+            <a:endParaRPr lang="en-US"/>
+          </a:p>
+        </p:txBody>
       </p:sp>
       <p:sp>
         <p:nvSpPr>
@@ -13422,7 +15269,7 @@
           <a:bodyPr wrap="square" lIns="0" tIns="0" rIns="0" bIns="0" rtlCol="0" anchor="ctr"/>
           <a:lstStyle/>
           <a:p>
-            <a:pPr algn="ctr" indent="0" marL="0">
+            <a:pPr marL="0" indent="0" algn="ctr">
               <a:buNone/>
             </a:pPr>
             <a:r>
@@ -13461,7 +15308,7 @@
           <a:bodyPr wrap="square" lIns="0" tIns="0" rIns="0" bIns="0" rtlCol="0" anchor="ctr"/>
           <a:lstStyle/>
           <a:p>
-            <a:pPr indent="0" marL="0">
+            <a:pPr marL="0" indent="0">
               <a:buNone/>
             </a:pPr>
             <a:r>
@@ -13500,7 +15347,7 @@
           <a:bodyPr wrap="square" lIns="0" tIns="0" rIns="0" bIns="0" rtlCol="0" anchor="ctr"/>
           <a:lstStyle/>
           <a:p>
-            <a:pPr indent="0" marL="0">
+            <a:pPr marL="0" indent="0">
               <a:buNone/>
             </a:pPr>
             <a:r>
@@ -13539,7 +15386,7 @@
           <a:bodyPr wrap="square" rtlCol="0" anchor="ctr"/>
           <a:lstStyle/>
           <a:p>
-            <a:pPr algn="r" indent="0" marL="0">
+            <a:pPr marL="0" indent="0" algn="r">
               <a:buNone/>
             </a:pPr>
             <a:r>
@@ -13573,6 +15420,7 @@
         <a:solidFill>
           <a:srgbClr val="F4F7F7"/>
         </a:solidFill>
+        <a:effectLst/>
       </p:bgPr>
     </p:bg>
     <p:spTree>
@@ -13610,11 +15458,11 @@
           <a:bodyPr wrap="square" lIns="0" tIns="0" rIns="0" bIns="0" rtlCol="0" anchor="ctr"/>
           <a:lstStyle/>
           <a:p>
-            <a:pPr indent="0" marL="0">
-              <a:buNone/>
-            </a:pPr>
-            <a:r>
-              <a:rPr lang="en-US" sz="1200" b="1" spc="200" kern="0" dirty="0">
+            <a:pPr marL="0" indent="0">
+              <a:buNone/>
+            </a:pPr>
+            <a:r>
+              <a:rPr lang="en-US" sz="1200" b="1" kern="0" spc="200" dirty="0">
                 <a:solidFill>
                   <a:srgbClr val="028090"/>
                 </a:solidFill>
@@ -13649,7 +15497,7 @@
           <a:bodyPr wrap="square" lIns="0" tIns="0" rIns="0" bIns="0" rtlCol="0" anchor="ctr"/>
           <a:lstStyle/>
           <a:p>
-            <a:pPr indent="0" marL="0">
+            <a:pPr marL="0" indent="0">
               <a:buNone/>
             </a:pPr>
             <a:r>
@@ -13693,6 +15541,13 @@
             <a:prstDash val="solid"/>
           </a:ln>
         </p:spPr>
+        <p:txBody>
+          <a:bodyPr/>
+          <a:lstStyle/>
+          <a:p>
+            <a:endParaRPr lang="en-US"/>
+          </a:p>
+        </p:txBody>
       </p:sp>
       <p:sp>
         <p:nvSpPr>
@@ -13715,7 +15570,7 @@
           <a:bodyPr wrap="square" lIns="635" tIns="635" rIns="635" bIns="635" rtlCol="0" anchor="ctr"/>
           <a:lstStyle/>
           <a:p>
-            <a:pPr indent="0" marL="0">
+            <a:pPr marL="0" indent="0">
               <a:buNone/>
             </a:pPr>
             <a:r>
@@ -13754,7 +15609,7 @@
           <a:bodyPr wrap="square" lIns="762" tIns="762" rIns="762" bIns="762" rtlCol="0" anchor="ctr"/>
           <a:lstStyle/>
           <a:p>
-            <a:pPr indent="0" marL="0">
+            <a:pPr marL="0" indent="0">
               <a:buNone/>
             </a:pPr>
             <a:r>
@@ -13798,6 +15653,13 @@
             <a:prstDash val="solid"/>
           </a:ln>
         </p:spPr>
+        <p:txBody>
+          <a:bodyPr/>
+          <a:lstStyle/>
+          <a:p>
+            <a:endParaRPr lang="en-US"/>
+          </a:p>
+        </p:txBody>
       </p:sp>
       <p:sp>
         <p:nvSpPr>
@@ -13820,7 +15682,7 @@
           <a:bodyPr wrap="square" lIns="635" tIns="635" rIns="635" bIns="635" rtlCol="0" anchor="ctr"/>
           <a:lstStyle/>
           <a:p>
-            <a:pPr indent="0" marL="0">
+            <a:pPr marL="0" indent="0">
               <a:buNone/>
             </a:pPr>
             <a:r>
@@ -13859,7 +15721,7 @@
           <a:bodyPr wrap="square" lIns="762" tIns="762" rIns="762" bIns="762" rtlCol="0" anchor="ctr"/>
           <a:lstStyle/>
           <a:p>
-            <a:pPr indent="0" marL="0">
+            <a:pPr marL="0" indent="0">
               <a:buNone/>
             </a:pPr>
             <a:r>
@@ -13903,6 +15765,13 @@
             <a:prstDash val="solid"/>
           </a:ln>
         </p:spPr>
+        <p:txBody>
+          <a:bodyPr/>
+          <a:lstStyle/>
+          <a:p>
+            <a:endParaRPr lang="en-US"/>
+          </a:p>
+        </p:txBody>
       </p:sp>
       <p:sp>
         <p:nvSpPr>
@@ -13925,7 +15794,7 @@
           <a:bodyPr wrap="square" lIns="635" tIns="635" rIns="635" bIns="635" rtlCol="0" anchor="ctr"/>
           <a:lstStyle/>
           <a:p>
-            <a:pPr indent="0" marL="0">
+            <a:pPr marL="0" indent="0">
               <a:buNone/>
             </a:pPr>
             <a:r>
@@ -13964,7 +15833,7 @@
           <a:bodyPr wrap="square" lIns="762" tIns="762" rIns="762" bIns="762" rtlCol="0" anchor="ctr"/>
           <a:lstStyle/>
           <a:p>
-            <a:pPr indent="0" marL="0">
+            <a:pPr marL="0" indent="0">
               <a:buNone/>
             </a:pPr>
             <a:r>
@@ -14008,6 +15877,13 @@
             <a:prstDash val="solid"/>
           </a:ln>
         </p:spPr>
+        <p:txBody>
+          <a:bodyPr/>
+          <a:lstStyle/>
+          <a:p>
+            <a:endParaRPr lang="en-US"/>
+          </a:p>
+        </p:txBody>
       </p:sp>
       <p:sp>
         <p:nvSpPr>
@@ -14030,7 +15906,7 @@
           <a:bodyPr wrap="square" lIns="635" tIns="635" rIns="635" bIns="635" rtlCol="0" anchor="ctr"/>
           <a:lstStyle/>
           <a:p>
-            <a:pPr indent="0" marL="0">
+            <a:pPr marL="0" indent="0">
               <a:buNone/>
             </a:pPr>
             <a:r>
@@ -14069,7 +15945,7 @@
           <a:bodyPr wrap="square" lIns="762" tIns="762" rIns="762" bIns="762" rtlCol="0" anchor="ctr"/>
           <a:lstStyle/>
           <a:p>
-            <a:pPr indent="0" marL="0">
+            <a:pPr marL="0" indent="0">
               <a:buNone/>
             </a:pPr>
             <a:r>
@@ -14113,6 +15989,13 @@
             <a:prstDash val="solid"/>
           </a:ln>
         </p:spPr>
+        <p:txBody>
+          <a:bodyPr/>
+          <a:lstStyle/>
+          <a:p>
+            <a:endParaRPr lang="en-US"/>
+          </a:p>
+        </p:txBody>
       </p:sp>
       <p:sp>
         <p:nvSpPr>
@@ -14135,7 +16018,7 @@
           <a:bodyPr wrap="square" lIns="635" tIns="635" rIns="635" bIns="635" rtlCol="0" anchor="ctr"/>
           <a:lstStyle/>
           <a:p>
-            <a:pPr indent="0" marL="0">
+            <a:pPr marL="0" indent="0">
               <a:buNone/>
             </a:pPr>
             <a:r>
@@ -14174,7 +16057,7 @@
           <a:bodyPr wrap="square" lIns="762" tIns="762" rIns="762" bIns="762" rtlCol="0" anchor="ctr"/>
           <a:lstStyle/>
           <a:p>
-            <a:pPr indent="0" marL="0">
+            <a:pPr marL="0" indent="0">
               <a:buNone/>
             </a:pPr>
             <a:r>
@@ -14213,6 +16096,13 @@
           </a:solidFill>
           <a:ln/>
         </p:spPr>
+        <p:txBody>
+          <a:bodyPr/>
+          <a:lstStyle/>
+          <a:p>
+            <a:endParaRPr lang="en-US"/>
+          </a:p>
+        </p:txBody>
       </p:sp>
       <p:sp>
         <p:nvSpPr>
@@ -14235,11 +16125,11 @@
           <a:bodyPr wrap="square" lIns="0" tIns="0" rIns="0" bIns="0" rtlCol="0" anchor="ctr"/>
           <a:lstStyle/>
           <a:p>
-            <a:pPr indent="0" marL="0">
-              <a:buNone/>
-            </a:pPr>
-            <a:r>
-              <a:rPr lang="en-US" sz="1200" b="1" spc="200" kern="0" dirty="0">
+            <a:pPr marL="0" indent="0">
+              <a:buNone/>
+            </a:pPr>
+            <a:r>
+              <a:rPr lang="en-US" sz="1200" b="1" kern="0" spc="200" dirty="0">
                 <a:solidFill>
                   <a:srgbClr val="02C39A"/>
                 </a:solidFill>
@@ -14464,7 +16354,7 @@
           <a:bodyPr wrap="square" rtlCol="0" anchor="ctr"/>
           <a:lstStyle/>
           <a:p>
-            <a:pPr algn="r" indent="0" marL="0">
+            <a:pPr marL="0" indent="0" algn="r">
               <a:buNone/>
             </a:pPr>
             <a:r>
@@ -14783,4 +16673,319 @@
     </a:ext>
   </a:extLst>
 </a:theme>
+</file>
+
+<file path=ppt/theme/theme2.xml><?xml version="1.0" encoding="utf-8"?>
+<a:theme xmlns:a="http://schemas.openxmlformats.org/drawingml/2006/main" name="Office Theme">
+  <a:themeElements>
+    <a:clrScheme name="Office">
+      <a:dk1>
+        <a:sysClr val="windowText" lastClr="000000"/>
+      </a:dk1>
+      <a:lt1>
+        <a:sysClr val="window" lastClr="FFFFFF"/>
+      </a:lt1>
+      <a:dk2>
+        <a:srgbClr val="0E2841"/>
+      </a:dk2>
+      <a:lt2>
+        <a:srgbClr val="E8E8E8"/>
+      </a:lt2>
+      <a:accent1>
+        <a:srgbClr val="156082"/>
+      </a:accent1>
+      <a:accent2>
+        <a:srgbClr val="E97132"/>
+      </a:accent2>
+      <a:accent3>
+        <a:srgbClr val="196B24"/>
+      </a:accent3>
+      <a:accent4>
+        <a:srgbClr val="0F9ED5"/>
+      </a:accent4>
+      <a:accent5>
+        <a:srgbClr val="A02B93"/>
+      </a:accent5>
+      <a:accent6>
+        <a:srgbClr val="4EA72E"/>
+      </a:accent6>
+      <a:hlink>
+        <a:srgbClr val="467886"/>
+      </a:hlink>
+      <a:folHlink>
+        <a:srgbClr val="96607D"/>
+      </a:folHlink>
+    </a:clrScheme>
+    <a:fontScheme name="Office">
+      <a:majorFont>
+        <a:latin typeface="Aptos Display" panose="02110004020202020204"/>
+        <a:ea typeface=""/>
+        <a:cs typeface=""/>
+        <a:font script="Jpan" typeface="游ゴシック Light"/>
+        <a:font script="Hang" typeface="맑은 고딕"/>
+        <a:font script="Hans" typeface="等线 Light"/>
+        <a:font script="Hant" typeface="新細明體"/>
+        <a:font script="Arab" typeface="Times New Roman"/>
+        <a:font script="Hebr" typeface="Times New Roman"/>
+        <a:font script="Thai" typeface="Angsana New"/>
+        <a:font script="Ethi" typeface="Nyala"/>
+        <a:font script="Beng" typeface="Vrinda"/>
+        <a:font script="Gujr" typeface="Shruti"/>
+        <a:font script="Khmr" typeface="MoolBoran"/>
+        <a:font script="Knda" typeface="Tunga"/>
+        <a:font script="Guru" typeface="Raavi"/>
+        <a:font script="Cans" typeface="Euphemia"/>
+        <a:font script="Cher" typeface="Plantagenet Cherokee"/>
+        <a:font script="Yiii" typeface="Microsoft Yi Baiti"/>
+        <a:font script="Tibt" typeface="Microsoft Himalaya"/>
+        <a:font script="Thaa" typeface="MV Boli"/>
+        <a:font script="Deva" typeface="Mangal"/>
+        <a:font script="Telu" typeface="Gautami"/>
+        <a:font script="Taml" typeface="Latha"/>
+        <a:font script="Syrc" typeface="Estrangelo Edessa"/>
+        <a:font script="Orya" typeface="Kalinga"/>
+        <a:font script="Mlym" typeface="Kartika"/>
+        <a:font script="Laoo" typeface="DokChampa"/>
+        <a:font script="Sinh" typeface="Iskoola Pota"/>
+        <a:font script="Mong" typeface="Mongolian Baiti"/>
+        <a:font script="Viet" typeface="Times New Roman"/>
+        <a:font script="Uigh" typeface="Microsoft Uighur"/>
+        <a:font script="Geor" typeface="Sylfaen"/>
+        <a:font script="Armn" typeface="Arial"/>
+        <a:font script="Bugi" typeface="Leelawadee UI"/>
+        <a:font script="Bopo" typeface="Microsoft JhengHei"/>
+        <a:font script="Java" typeface="Javanese Text"/>
+        <a:font script="Lisu" typeface="Segoe UI"/>
+        <a:font script="Mymr" typeface="Myanmar Text"/>
+        <a:font script="Nkoo" typeface="Ebrima"/>
+        <a:font script="Olck" typeface="Nirmala UI"/>
+        <a:font script="Osma" typeface="Ebrima"/>
+        <a:font script="Phag" typeface="Phagspa"/>
+        <a:font script="Syrn" typeface="Estrangelo Edessa"/>
+        <a:font script="Syrj" typeface="Estrangelo Edessa"/>
+        <a:font script="Syre" typeface="Estrangelo Edessa"/>
+        <a:font script="Sora" typeface="Nirmala UI"/>
+        <a:font script="Tale" typeface="Microsoft Tai Le"/>
+        <a:font script="Talu" typeface="Microsoft New Tai Lue"/>
+        <a:font script="Tfng" typeface="Ebrima"/>
+      </a:majorFont>
+      <a:minorFont>
+        <a:latin typeface="Aptos" panose="02110004020202020204"/>
+        <a:ea typeface=""/>
+        <a:cs typeface=""/>
+        <a:font script="Jpan" typeface="游ゴシック"/>
+        <a:font script="Hang" typeface="맑은 고딕"/>
+        <a:font script="Hans" typeface="等线"/>
+        <a:font script="Hant" typeface="新細明體"/>
+        <a:font script="Arab" typeface="Arial"/>
+        <a:font script="Hebr" typeface="Arial"/>
+        <a:font script="Thai" typeface="Cordia New"/>
+        <a:font script="Ethi" typeface="Nyala"/>
+        <a:font script="Beng" typeface="Vrinda"/>
+        <a:font script="Gujr" typeface="Shruti"/>
+        <a:font script="Khmr" typeface="DaunPenh"/>
+        <a:font script="Knda" typeface="Tunga"/>
+        <a:font script="Guru" typeface="Raavi"/>
+        <a:font script="Cans" typeface="Euphemia"/>
+        <a:font script="Cher" typeface="Plantagenet Cherokee"/>
+        <a:font script="Yiii" typeface="Microsoft Yi Baiti"/>
+        <a:font script="Tibt" typeface="Microsoft Himalaya"/>
+        <a:font script="Thaa" typeface="MV Boli"/>
+        <a:font script="Deva" typeface="Mangal"/>
+        <a:font script="Telu" typeface="Gautami"/>
+        <a:font script="Taml" typeface="Latha"/>
+        <a:font script="Syrc" typeface="Estrangelo Edessa"/>
+        <a:font script="Orya" typeface="Kalinga"/>
+        <a:font script="Mlym" typeface="Kartika"/>
+        <a:font script="Laoo" typeface="DokChampa"/>
+        <a:font script="Sinh" typeface="Iskoola Pota"/>
+        <a:font script="Mong" typeface="Mongolian Baiti"/>
+        <a:font script="Viet" typeface="Arial"/>
+        <a:font script="Uigh" typeface="Microsoft Uighur"/>
+        <a:font script="Geor" typeface="Sylfaen"/>
+        <a:font script="Armn" typeface="Arial"/>
+        <a:font script="Bugi" typeface="Leelawadee UI"/>
+        <a:font script="Bopo" typeface="Microsoft JhengHei"/>
+        <a:font script="Java" typeface="Javanese Text"/>
+        <a:font script="Lisu" typeface="Segoe UI"/>
+        <a:font script="Mymr" typeface="Myanmar Text"/>
+        <a:font script="Nkoo" typeface="Ebrima"/>
+        <a:font script="Olck" typeface="Nirmala UI"/>
+        <a:font script="Osma" typeface="Ebrima"/>
+        <a:font script="Phag" typeface="Phagspa"/>
+        <a:font script="Syrn" typeface="Estrangelo Edessa"/>
+        <a:font script="Syrj" typeface="Estrangelo Edessa"/>
+        <a:font script="Syre" typeface="Estrangelo Edessa"/>
+        <a:font script="Sora" typeface="Nirmala UI"/>
+        <a:font script="Tale" typeface="Microsoft Tai Le"/>
+        <a:font script="Talu" typeface="Microsoft New Tai Lue"/>
+        <a:font script="Tfng" typeface="Ebrima"/>
+      </a:minorFont>
+    </a:fontScheme>
+    <a:fmtScheme name="Office">
+      <a:fillStyleLst>
+        <a:solidFill>
+          <a:schemeClr val="phClr"/>
+        </a:solidFill>
+        <a:gradFill rotWithShape="1">
+          <a:gsLst>
+            <a:gs pos="0">
+              <a:schemeClr val="phClr">
+                <a:lumMod val="110000"/>
+                <a:satMod val="105000"/>
+                <a:tint val="67000"/>
+              </a:schemeClr>
+            </a:gs>
+            <a:gs pos="50000">
+              <a:schemeClr val="phClr">
+                <a:lumMod val="105000"/>
+                <a:satMod val="103000"/>
+                <a:tint val="73000"/>
+              </a:schemeClr>
+            </a:gs>
+            <a:gs pos="100000">
+              <a:schemeClr val="phClr">
+                <a:lumMod val="105000"/>
+                <a:satMod val="109000"/>
+                <a:tint val="81000"/>
+              </a:schemeClr>
+            </a:gs>
+          </a:gsLst>
+          <a:lin ang="5400000" scaled="0"/>
+        </a:gradFill>
+        <a:gradFill rotWithShape="1">
+          <a:gsLst>
+            <a:gs pos="0">
+              <a:schemeClr val="phClr">
+                <a:satMod val="103000"/>
+                <a:lumMod val="102000"/>
+                <a:tint val="94000"/>
+              </a:schemeClr>
+            </a:gs>
+            <a:gs pos="50000">
+              <a:schemeClr val="phClr">
+                <a:satMod val="110000"/>
+                <a:lumMod val="100000"/>
+                <a:shade val="100000"/>
+              </a:schemeClr>
+            </a:gs>
+            <a:gs pos="100000">
+              <a:schemeClr val="phClr">
+                <a:lumMod val="99000"/>
+                <a:satMod val="120000"/>
+                <a:shade val="78000"/>
+              </a:schemeClr>
+            </a:gs>
+          </a:gsLst>
+          <a:lin ang="5400000" scaled="0"/>
+        </a:gradFill>
+      </a:fillStyleLst>
+      <a:lnStyleLst>
+        <a:ln w="12700" cap="flat" cmpd="sng" algn="ctr">
+          <a:solidFill>
+            <a:schemeClr val="phClr"/>
+          </a:solidFill>
+          <a:prstDash val="solid"/>
+          <a:miter lim="800000"/>
+        </a:ln>
+        <a:ln w="19050" cap="flat" cmpd="sng" algn="ctr">
+          <a:solidFill>
+            <a:schemeClr val="phClr"/>
+          </a:solidFill>
+          <a:prstDash val="solid"/>
+          <a:miter lim="800000"/>
+        </a:ln>
+        <a:ln w="25400" cap="flat" cmpd="sng" algn="ctr">
+          <a:solidFill>
+            <a:schemeClr val="phClr"/>
+          </a:solidFill>
+          <a:prstDash val="solid"/>
+          <a:miter lim="800000"/>
+        </a:ln>
+      </a:lnStyleLst>
+      <a:effectStyleLst>
+        <a:effectStyle>
+          <a:effectLst/>
+        </a:effectStyle>
+        <a:effectStyle>
+          <a:effectLst/>
+        </a:effectStyle>
+        <a:effectStyle>
+          <a:effectLst>
+            <a:outerShdw blurRad="57150" dist="19050" dir="5400000" algn="ctr" rotWithShape="0">
+              <a:srgbClr val="000000">
+                <a:alpha val="63000"/>
+              </a:srgbClr>
+            </a:outerShdw>
+          </a:effectLst>
+        </a:effectStyle>
+      </a:effectStyleLst>
+      <a:bgFillStyleLst>
+        <a:solidFill>
+          <a:schemeClr val="phClr"/>
+        </a:solidFill>
+        <a:solidFill>
+          <a:schemeClr val="phClr">
+            <a:tint val="95000"/>
+            <a:satMod val="170000"/>
+          </a:schemeClr>
+        </a:solidFill>
+        <a:gradFill rotWithShape="1">
+          <a:gsLst>
+            <a:gs pos="0">
+              <a:schemeClr val="phClr">
+                <a:tint val="93000"/>
+                <a:satMod val="150000"/>
+                <a:shade val="98000"/>
+                <a:lumMod val="102000"/>
+              </a:schemeClr>
+            </a:gs>
+            <a:gs pos="50000">
+              <a:schemeClr val="phClr">
+                <a:tint val="98000"/>
+                <a:satMod val="130000"/>
+                <a:shade val="90000"/>
+                <a:lumMod val="103000"/>
+              </a:schemeClr>
+            </a:gs>
+            <a:gs pos="100000">
+              <a:schemeClr val="phClr">
+                <a:shade val="63000"/>
+                <a:satMod val="120000"/>
+              </a:schemeClr>
+            </a:gs>
+          </a:gsLst>
+          <a:lin ang="5400000" scaled="0"/>
+        </a:gradFill>
+      </a:bgFillStyleLst>
+    </a:fmtScheme>
+  </a:themeElements>
+  <a:objectDefaults>
+    <a:lnDef>
+      <a:spPr/>
+      <a:bodyPr/>
+      <a:lstStyle/>
+      <a:style>
+        <a:lnRef idx="2">
+          <a:schemeClr val="accent1"/>
+        </a:lnRef>
+        <a:fillRef idx="0">
+          <a:schemeClr val="accent1"/>
+        </a:fillRef>
+        <a:effectRef idx="1">
+          <a:schemeClr val="accent1"/>
+        </a:effectRef>
+        <a:fontRef idx="minor">
+          <a:schemeClr val="tx1"/>
+        </a:fontRef>
+      </a:style>
+    </a:lnDef>
+  </a:objectDefaults>
+  <a:extraClrSchemeLst/>
+  <a:extLst>
+    <a:ext uri="{05A4C25C-085E-4340-85A3-A5531E510DB2}">
+      <thm15:themeFamily xmlns:thm15="http://schemas.microsoft.com/office/thememl/2012/main" name="Office Theme" id="{2E142A2C-CD16-42D6-873A-C26D2A0506FA}" vid="{1BDDFF52-6CD6-40A5-AB3C-68EB2F1E4D0A}"/>
+    </a:ext>
+  </a:extLst>
+</a:theme>
 </file>